--- a/01_ideation/SanjeeviniAushad_Full.pptx
+++ b/01_ideation/SanjeeviniAushad_Full.pptx
@@ -5,24 +5,25 @@
     <p:sldMasterId id="2147483648" r:id="rId1"/>
   </p:sldMasterIdLst>
   <p:sldIdLst>
-    <p:sldId id="256" r:id="rId7"/>
-    <p:sldId id="257" r:id="rId8"/>
-    <p:sldId id="258" r:id="rId9"/>
-    <p:sldId id="259" r:id="rId10"/>
-    <p:sldId id="260" r:id="rId11"/>
-    <p:sldId id="261" r:id="rId12"/>
-    <p:sldId id="262" r:id="rId13"/>
-    <p:sldId id="263" r:id="rId14"/>
-    <p:sldId id="264" r:id="rId15"/>
-    <p:sldId id="265" r:id="rId16"/>
-    <p:sldId id="266" r:id="rId17"/>
-    <p:sldId id="267" r:id="rId18"/>
-    <p:sldId id="268" r:id="rId19"/>
-    <p:sldId id="269" r:id="rId20"/>
-    <p:sldId id="270" r:id="rId21"/>
-    <p:sldId id="271" r:id="rId22"/>
+    <p:sldId id="256" r:id="rId2"/>
+    <p:sldId id="257" r:id="rId3"/>
+    <p:sldId id="258" r:id="rId4"/>
+    <p:sldId id="259" r:id="rId5"/>
+    <p:sldId id="260" r:id="rId6"/>
+    <p:sldId id="261" r:id="rId7"/>
+    <p:sldId id="262" r:id="rId8"/>
+    <p:sldId id="263" r:id="rId9"/>
+    <p:sldId id="264" r:id="rId10"/>
+    <p:sldId id="265" r:id="rId11"/>
+    <p:sldId id="266" r:id="rId12"/>
+    <p:sldId id="267" r:id="rId13"/>
+    <p:sldId id="268" r:id="rId14"/>
+    <p:sldId id="269" r:id="rId15"/>
+    <p:sldId id="270" r:id="rId16"/>
+    <p:sldId id="271" r:id="rId17"/>
+    <p:sldId id="272" r:id="rId18"/>
   </p:sldIdLst>
-  <p:sldSz cx="12191695" cy="6858000" type="screen4x3"/>
+  <p:sldSz cx="12192000" cy="6858000"/>
   <p:notesSz cx="6858000" cy="9144000"/>
   <p:defaultTextStyle>
     <a:defPPr>
@@ -119,6 +120,22 @@
       </a:defRPr>
     </a:lvl9pPr>
   </p:defaultTextStyle>
+  <p:extLst>
+    <p:ext uri="{EFAFB233-063F-42B5-8137-9DF3F51BA10A}">
+      <p15:sldGuideLst xmlns:p15="http://schemas.microsoft.com/office/powerpoint/2012/main">
+        <p15:guide id="1" orient="horz" pos="2160">
+          <p15:clr>
+            <a:srgbClr val="A4A3A4"/>
+          </p15:clr>
+        </p15:guide>
+        <p15:guide id="2" pos="2880">
+          <p15:clr>
+            <a:srgbClr val="A4A3A4"/>
+          </p15:clr>
+        </p15:guide>
+      </p15:sldGuideLst>
+    </p:ext>
+  </p:extLst>
 </p:presentation>
 </file>
 
@@ -160,10 +177,9 @@
           <a:lstStyle/>
           <a:p>
             <a:r>
-              <a:rPr lang="en-US" smtClean="0"/>
+              <a:rPr lang="en-US"/>
               <a:t>Click to edit Master title style</a:t>
             </a:r>
-            <a:endParaRPr lang="en-US"/>
           </a:p>
         </p:txBody>
       </p:sp>
@@ -279,10 +295,9 @@
           </a:lstStyle>
           <a:p>
             <a:r>
-              <a:rPr lang="en-US" smtClean="0"/>
+              <a:rPr lang="en-US"/>
               <a:t>Click to edit Master subtitle style</a:t>
             </a:r>
-            <a:endParaRPr lang="en-US"/>
           </a:p>
         </p:txBody>
       </p:sp>
@@ -303,7 +318,7 @@
           <a:p>
             <a:fld id="{5BCAD085-E8A6-8845-BD4E-CB4CCA059FC4}" type="datetimeFigureOut">
               <a:rPr lang="en-US" smtClean="0"/>
-              <a:t>1/27/13</a:t>
+              <a:t>7/21/2026</a:t>
             </a:fld>
             <a:endParaRPr lang="en-US"/>
           </a:p>
@@ -397,10 +412,9 @@
           <a:lstStyle/>
           <a:p>
             <a:r>
-              <a:rPr lang="en-US" smtClean="0"/>
+              <a:rPr lang="en-US"/>
               <a:t>Click to edit Master title style</a:t>
             </a:r>
-            <a:endParaRPr lang="en-US"/>
           </a:p>
         </p:txBody>
       </p:sp>
@@ -421,38 +435,37 @@
           <a:p>
             <a:pPr lvl="0"/>
             <a:r>
-              <a:rPr lang="en-US" smtClean="0"/>
+              <a:rPr lang="en-US"/>
               <a:t>Click to edit Master text styles</a:t>
             </a:r>
           </a:p>
           <a:p>
             <a:pPr lvl="1"/>
             <a:r>
-              <a:rPr lang="en-US" smtClean="0"/>
+              <a:rPr lang="en-US"/>
               <a:t>Second level</a:t>
             </a:r>
           </a:p>
           <a:p>
             <a:pPr lvl="2"/>
             <a:r>
-              <a:rPr lang="en-US" smtClean="0"/>
+              <a:rPr lang="en-US"/>
               <a:t>Third level</a:t>
             </a:r>
           </a:p>
           <a:p>
             <a:pPr lvl="3"/>
             <a:r>
-              <a:rPr lang="en-US" smtClean="0"/>
+              <a:rPr lang="en-US"/>
               <a:t>Fourth level</a:t>
             </a:r>
           </a:p>
           <a:p>
             <a:pPr lvl="4"/>
             <a:r>
-              <a:rPr lang="en-US" smtClean="0"/>
+              <a:rPr lang="en-US"/>
               <a:t>Fifth level</a:t>
             </a:r>
-            <a:endParaRPr lang="en-US"/>
           </a:p>
         </p:txBody>
       </p:sp>
@@ -473,7 +486,7 @@
           <a:p>
             <a:fld id="{5BCAD085-E8A6-8845-BD4E-CB4CCA059FC4}" type="datetimeFigureOut">
               <a:rPr lang="en-US" smtClean="0"/>
-              <a:t>1/27/13</a:t>
+              <a:t>7/21/2026</a:t>
             </a:fld>
             <a:endParaRPr lang="en-US"/>
           </a:p>
@@ -572,10 +585,9 @@
           <a:lstStyle/>
           <a:p>
             <a:r>
-              <a:rPr lang="en-US" smtClean="0"/>
+              <a:rPr lang="en-US"/>
               <a:t>Click to edit Master title style</a:t>
             </a:r>
-            <a:endParaRPr lang="en-US"/>
           </a:p>
         </p:txBody>
       </p:sp>
@@ -601,38 +613,37 @@
           <a:p>
             <a:pPr lvl="0"/>
             <a:r>
-              <a:rPr lang="en-US" smtClean="0"/>
+              <a:rPr lang="en-US"/>
               <a:t>Click to edit Master text styles</a:t>
             </a:r>
           </a:p>
           <a:p>
             <a:pPr lvl="1"/>
             <a:r>
-              <a:rPr lang="en-US" smtClean="0"/>
+              <a:rPr lang="en-US"/>
               <a:t>Second level</a:t>
             </a:r>
           </a:p>
           <a:p>
             <a:pPr lvl="2"/>
             <a:r>
-              <a:rPr lang="en-US" smtClean="0"/>
+              <a:rPr lang="en-US"/>
               <a:t>Third level</a:t>
             </a:r>
           </a:p>
           <a:p>
             <a:pPr lvl="3"/>
             <a:r>
-              <a:rPr lang="en-US" smtClean="0"/>
+              <a:rPr lang="en-US"/>
               <a:t>Fourth level</a:t>
             </a:r>
           </a:p>
           <a:p>
             <a:pPr lvl="4"/>
             <a:r>
-              <a:rPr lang="en-US" smtClean="0"/>
+              <a:rPr lang="en-US"/>
               <a:t>Fifth level</a:t>
             </a:r>
-            <a:endParaRPr lang="en-US"/>
           </a:p>
         </p:txBody>
       </p:sp>
@@ -653,7 +664,7 @@
           <a:p>
             <a:fld id="{5BCAD085-E8A6-8845-BD4E-CB4CCA059FC4}" type="datetimeFigureOut">
               <a:rPr lang="en-US" smtClean="0"/>
-              <a:t>1/27/13</a:t>
+              <a:t>7/21/2026</a:t>
             </a:fld>
             <a:endParaRPr lang="en-US"/>
           </a:p>
@@ -747,10 +758,9 @@
           <a:lstStyle/>
           <a:p>
             <a:r>
-              <a:rPr lang="en-US" smtClean="0"/>
+              <a:rPr lang="en-US"/>
               <a:t>Click to edit Master title style</a:t>
             </a:r>
-            <a:endParaRPr lang="en-US"/>
           </a:p>
         </p:txBody>
       </p:sp>
@@ -771,38 +781,37 @@
           <a:p>
             <a:pPr lvl="0"/>
             <a:r>
-              <a:rPr lang="en-US" smtClean="0"/>
+              <a:rPr lang="en-US"/>
               <a:t>Click to edit Master text styles</a:t>
             </a:r>
           </a:p>
           <a:p>
             <a:pPr lvl="1"/>
             <a:r>
-              <a:rPr lang="en-US" smtClean="0"/>
+              <a:rPr lang="en-US"/>
               <a:t>Second level</a:t>
             </a:r>
           </a:p>
           <a:p>
             <a:pPr lvl="2"/>
             <a:r>
-              <a:rPr lang="en-US" smtClean="0"/>
+              <a:rPr lang="en-US"/>
               <a:t>Third level</a:t>
             </a:r>
           </a:p>
           <a:p>
             <a:pPr lvl="3"/>
             <a:r>
-              <a:rPr lang="en-US" smtClean="0"/>
+              <a:rPr lang="en-US"/>
               <a:t>Fourth level</a:t>
             </a:r>
           </a:p>
           <a:p>
             <a:pPr lvl="4"/>
             <a:r>
-              <a:rPr lang="en-US" smtClean="0"/>
+              <a:rPr lang="en-US"/>
               <a:t>Fifth level</a:t>
             </a:r>
-            <a:endParaRPr lang="en-US"/>
           </a:p>
         </p:txBody>
       </p:sp>
@@ -823,7 +832,7 @@
           <a:p>
             <a:fld id="{5BCAD085-E8A6-8845-BD4E-CB4CCA059FC4}" type="datetimeFigureOut">
               <a:rPr lang="en-US" smtClean="0"/>
-              <a:t>1/27/13</a:t>
+              <a:t>7/21/2026</a:t>
             </a:fld>
             <a:endParaRPr lang="en-US"/>
           </a:p>
@@ -926,10 +935,9 @@
           </a:lstStyle>
           <a:p>
             <a:r>
-              <a:rPr lang="en-US" smtClean="0"/>
+              <a:rPr lang="en-US"/>
               <a:t>Click to edit Master title style</a:t>
             </a:r>
-            <a:endParaRPr lang="en-US"/>
           </a:p>
         </p:txBody>
       </p:sp>
@@ -1046,7 +1054,7 @@
           <a:p>
             <a:pPr lvl="0"/>
             <a:r>
-              <a:rPr lang="en-US" smtClean="0"/>
+              <a:rPr lang="en-US"/>
               <a:t>Click to edit Master text styles</a:t>
             </a:r>
           </a:p>
@@ -1069,7 +1077,7 @@
           <a:p>
             <a:fld id="{5BCAD085-E8A6-8845-BD4E-CB4CCA059FC4}" type="datetimeFigureOut">
               <a:rPr lang="en-US" smtClean="0"/>
-              <a:t>1/27/13</a:t>
+              <a:t>7/21/2026</a:t>
             </a:fld>
             <a:endParaRPr lang="en-US"/>
           </a:p>
@@ -1163,10 +1171,9 @@
           <a:lstStyle/>
           <a:p>
             <a:r>
-              <a:rPr lang="en-US" smtClean="0"/>
+              <a:rPr lang="en-US"/>
               <a:t>Click to edit Master title style</a:t>
             </a:r>
-            <a:endParaRPr lang="en-US"/>
           </a:p>
         </p:txBody>
       </p:sp>
@@ -1220,38 +1227,37 @@
           <a:p>
             <a:pPr lvl="0"/>
             <a:r>
-              <a:rPr lang="en-US" smtClean="0"/>
+              <a:rPr lang="en-US"/>
               <a:t>Click to edit Master text styles</a:t>
             </a:r>
           </a:p>
           <a:p>
             <a:pPr lvl="1"/>
             <a:r>
-              <a:rPr lang="en-US" smtClean="0"/>
+              <a:rPr lang="en-US"/>
               <a:t>Second level</a:t>
             </a:r>
           </a:p>
           <a:p>
             <a:pPr lvl="2"/>
             <a:r>
-              <a:rPr lang="en-US" smtClean="0"/>
+              <a:rPr lang="en-US"/>
               <a:t>Third level</a:t>
             </a:r>
           </a:p>
           <a:p>
             <a:pPr lvl="3"/>
             <a:r>
-              <a:rPr lang="en-US" smtClean="0"/>
+              <a:rPr lang="en-US"/>
               <a:t>Fourth level</a:t>
             </a:r>
           </a:p>
           <a:p>
             <a:pPr lvl="4"/>
             <a:r>
-              <a:rPr lang="en-US" smtClean="0"/>
+              <a:rPr lang="en-US"/>
               <a:t>Fifth level</a:t>
             </a:r>
-            <a:endParaRPr lang="en-US"/>
           </a:p>
         </p:txBody>
       </p:sp>
@@ -1305,38 +1311,37 @@
           <a:p>
             <a:pPr lvl="0"/>
             <a:r>
-              <a:rPr lang="en-US" smtClean="0"/>
+              <a:rPr lang="en-US"/>
               <a:t>Click to edit Master text styles</a:t>
             </a:r>
           </a:p>
           <a:p>
             <a:pPr lvl="1"/>
             <a:r>
-              <a:rPr lang="en-US" smtClean="0"/>
+              <a:rPr lang="en-US"/>
               <a:t>Second level</a:t>
             </a:r>
           </a:p>
           <a:p>
             <a:pPr lvl="2"/>
             <a:r>
-              <a:rPr lang="en-US" smtClean="0"/>
+              <a:rPr lang="en-US"/>
               <a:t>Third level</a:t>
             </a:r>
           </a:p>
           <a:p>
             <a:pPr lvl="3"/>
             <a:r>
-              <a:rPr lang="en-US" smtClean="0"/>
+              <a:rPr lang="en-US"/>
               <a:t>Fourth level</a:t>
             </a:r>
           </a:p>
           <a:p>
             <a:pPr lvl="4"/>
             <a:r>
-              <a:rPr lang="en-US" smtClean="0"/>
+              <a:rPr lang="en-US"/>
               <a:t>Fifth level</a:t>
             </a:r>
-            <a:endParaRPr lang="en-US"/>
           </a:p>
         </p:txBody>
       </p:sp>
@@ -1357,7 +1362,7 @@
           <a:p>
             <a:fld id="{5BCAD085-E8A6-8845-BD4E-CB4CCA059FC4}" type="datetimeFigureOut">
               <a:rPr lang="en-US" smtClean="0"/>
-              <a:t>1/27/13</a:t>
+              <a:t>7/21/2026</a:t>
             </a:fld>
             <a:endParaRPr lang="en-US"/>
           </a:p>
@@ -1455,10 +1460,9 @@
           </a:lstStyle>
           <a:p>
             <a:r>
-              <a:rPr lang="en-US" smtClean="0"/>
+              <a:rPr lang="en-US"/>
               <a:t>Click to edit Master title style</a:t>
             </a:r>
-            <a:endParaRPr lang="en-US"/>
           </a:p>
         </p:txBody>
       </p:sp>
@@ -1521,7 +1525,7 @@
           <a:p>
             <a:pPr lvl="0"/>
             <a:r>
-              <a:rPr lang="en-US" smtClean="0"/>
+              <a:rPr lang="en-US"/>
               <a:t>Click to edit Master text styles</a:t>
             </a:r>
           </a:p>
@@ -1577,38 +1581,37 @@
           <a:p>
             <a:pPr lvl="0"/>
             <a:r>
-              <a:rPr lang="en-US" smtClean="0"/>
+              <a:rPr lang="en-US"/>
               <a:t>Click to edit Master text styles</a:t>
             </a:r>
           </a:p>
           <a:p>
             <a:pPr lvl="1"/>
             <a:r>
-              <a:rPr lang="en-US" smtClean="0"/>
+              <a:rPr lang="en-US"/>
               <a:t>Second level</a:t>
             </a:r>
           </a:p>
           <a:p>
             <a:pPr lvl="2"/>
             <a:r>
-              <a:rPr lang="en-US" smtClean="0"/>
+              <a:rPr lang="en-US"/>
               <a:t>Third level</a:t>
             </a:r>
           </a:p>
           <a:p>
             <a:pPr lvl="3"/>
             <a:r>
-              <a:rPr lang="en-US" smtClean="0"/>
+              <a:rPr lang="en-US"/>
               <a:t>Fourth level</a:t>
             </a:r>
           </a:p>
           <a:p>
             <a:pPr lvl="4"/>
             <a:r>
-              <a:rPr lang="en-US" smtClean="0"/>
+              <a:rPr lang="en-US"/>
               <a:t>Fifth level</a:t>
             </a:r>
-            <a:endParaRPr lang="en-US"/>
           </a:p>
         </p:txBody>
       </p:sp>
@@ -1671,7 +1674,7 @@
           <a:p>
             <a:pPr lvl="0"/>
             <a:r>
-              <a:rPr lang="en-US" smtClean="0"/>
+              <a:rPr lang="en-US"/>
               <a:t>Click to edit Master text styles</a:t>
             </a:r>
           </a:p>
@@ -1727,38 +1730,37 @@
           <a:p>
             <a:pPr lvl="0"/>
             <a:r>
-              <a:rPr lang="en-US" smtClean="0"/>
+              <a:rPr lang="en-US"/>
               <a:t>Click to edit Master text styles</a:t>
             </a:r>
           </a:p>
           <a:p>
             <a:pPr lvl="1"/>
             <a:r>
-              <a:rPr lang="en-US" smtClean="0"/>
+              <a:rPr lang="en-US"/>
               <a:t>Second level</a:t>
             </a:r>
           </a:p>
           <a:p>
             <a:pPr lvl="2"/>
             <a:r>
-              <a:rPr lang="en-US" smtClean="0"/>
+              <a:rPr lang="en-US"/>
               <a:t>Third level</a:t>
             </a:r>
           </a:p>
           <a:p>
             <a:pPr lvl="3"/>
             <a:r>
-              <a:rPr lang="en-US" smtClean="0"/>
+              <a:rPr lang="en-US"/>
               <a:t>Fourth level</a:t>
             </a:r>
           </a:p>
           <a:p>
             <a:pPr lvl="4"/>
             <a:r>
-              <a:rPr lang="en-US" smtClean="0"/>
+              <a:rPr lang="en-US"/>
               <a:t>Fifth level</a:t>
             </a:r>
-            <a:endParaRPr lang="en-US"/>
           </a:p>
         </p:txBody>
       </p:sp>
@@ -1779,7 +1781,7 @@
           <a:p>
             <a:fld id="{5BCAD085-E8A6-8845-BD4E-CB4CCA059FC4}" type="datetimeFigureOut">
               <a:rPr lang="en-US" smtClean="0"/>
-              <a:t>1/27/13</a:t>
+              <a:t>7/21/2026</a:t>
             </a:fld>
             <a:endParaRPr lang="en-US"/>
           </a:p>
@@ -1873,10 +1875,9 @@
           <a:lstStyle/>
           <a:p>
             <a:r>
-              <a:rPr lang="en-US" smtClean="0"/>
+              <a:rPr lang="en-US"/>
               <a:t>Click to edit Master title style</a:t>
             </a:r>
-            <a:endParaRPr lang="en-US"/>
           </a:p>
         </p:txBody>
       </p:sp>
@@ -1897,7 +1898,7 @@
           <a:p>
             <a:fld id="{5BCAD085-E8A6-8845-BD4E-CB4CCA059FC4}" type="datetimeFigureOut">
               <a:rPr lang="en-US" smtClean="0"/>
-              <a:t>1/27/13</a:t>
+              <a:t>7/21/2026</a:t>
             </a:fld>
             <a:endParaRPr lang="en-US"/>
           </a:p>
@@ -1992,7 +1993,7 @@
           <a:p>
             <a:fld id="{5BCAD085-E8A6-8845-BD4E-CB4CCA059FC4}" type="datetimeFigureOut">
               <a:rPr lang="en-US" smtClean="0"/>
-              <a:t>1/27/13</a:t>
+              <a:t>7/21/2026</a:t>
             </a:fld>
             <a:endParaRPr lang="en-US"/>
           </a:p>
@@ -2095,10 +2096,9 @@
           </a:lstStyle>
           <a:p>
             <a:r>
-              <a:rPr lang="en-US" smtClean="0"/>
+              <a:rPr lang="en-US"/>
               <a:t>Click to edit Master title style</a:t>
             </a:r>
-            <a:endParaRPr lang="en-US"/>
           </a:p>
         </p:txBody>
       </p:sp>
@@ -2152,38 +2152,37 @@
           <a:p>
             <a:pPr lvl="0"/>
             <a:r>
-              <a:rPr lang="en-US" smtClean="0"/>
+              <a:rPr lang="en-US"/>
               <a:t>Click to edit Master text styles</a:t>
             </a:r>
           </a:p>
           <a:p>
             <a:pPr lvl="1"/>
             <a:r>
-              <a:rPr lang="en-US" smtClean="0"/>
+              <a:rPr lang="en-US"/>
               <a:t>Second level</a:t>
             </a:r>
           </a:p>
           <a:p>
             <a:pPr lvl="2"/>
             <a:r>
-              <a:rPr lang="en-US" smtClean="0"/>
+              <a:rPr lang="en-US"/>
               <a:t>Third level</a:t>
             </a:r>
           </a:p>
           <a:p>
             <a:pPr lvl="3"/>
             <a:r>
-              <a:rPr lang="en-US" smtClean="0"/>
+              <a:rPr lang="en-US"/>
               <a:t>Fourth level</a:t>
             </a:r>
           </a:p>
           <a:p>
             <a:pPr lvl="4"/>
             <a:r>
-              <a:rPr lang="en-US" smtClean="0"/>
+              <a:rPr lang="en-US"/>
               <a:t>Fifth level</a:t>
             </a:r>
-            <a:endParaRPr lang="en-US"/>
           </a:p>
         </p:txBody>
       </p:sp>
@@ -2246,7 +2245,7 @@
           <a:p>
             <a:pPr lvl="0"/>
             <a:r>
-              <a:rPr lang="en-US" smtClean="0"/>
+              <a:rPr lang="en-US"/>
               <a:t>Click to edit Master text styles</a:t>
             </a:r>
           </a:p>
@@ -2269,7 +2268,7 @@
           <a:p>
             <a:fld id="{5BCAD085-E8A6-8845-BD4E-CB4CCA059FC4}" type="datetimeFigureOut">
               <a:rPr lang="en-US" smtClean="0"/>
-              <a:t>1/27/13</a:t>
+              <a:t>7/21/2026</a:t>
             </a:fld>
             <a:endParaRPr lang="en-US"/>
           </a:p>
@@ -2372,10 +2371,9 @@
           </a:lstStyle>
           <a:p>
             <a:r>
-              <a:rPr lang="en-US" smtClean="0"/>
+              <a:rPr lang="en-US"/>
               <a:t>Click to edit Master title style</a:t>
             </a:r>
-            <a:endParaRPr lang="en-US"/>
           </a:p>
         </p:txBody>
       </p:sp>
@@ -2499,7 +2497,7 @@
           <a:p>
             <a:pPr lvl="0"/>
             <a:r>
-              <a:rPr lang="en-US" smtClean="0"/>
+              <a:rPr lang="en-US"/>
               <a:t>Click to edit Master text styles</a:t>
             </a:r>
           </a:p>
@@ -2522,7 +2520,7 @@
           <a:p>
             <a:fld id="{5BCAD085-E8A6-8845-BD4E-CB4CCA059FC4}" type="datetimeFigureOut">
               <a:rPr lang="en-US" smtClean="0"/>
-              <a:t>1/27/13</a:t>
+              <a:t>7/21/2026</a:t>
             </a:fld>
             <a:endParaRPr lang="en-US"/>
           </a:p>
@@ -2631,10 +2629,9 @@
           <a:lstStyle/>
           <a:p>
             <a:r>
-              <a:rPr lang="en-US" smtClean="0"/>
+              <a:rPr lang="en-US"/>
               <a:t>Click to edit Master title style</a:t>
             </a:r>
-            <a:endParaRPr lang="en-US"/>
           </a:p>
         </p:txBody>
       </p:sp>
@@ -2665,38 +2662,37 @@
           <a:p>
             <a:pPr lvl="0"/>
             <a:r>
-              <a:rPr lang="en-US" smtClean="0"/>
+              <a:rPr lang="en-US"/>
               <a:t>Click to edit Master text styles</a:t>
             </a:r>
           </a:p>
           <a:p>
             <a:pPr lvl="1"/>
             <a:r>
-              <a:rPr lang="en-US" smtClean="0"/>
+              <a:rPr lang="en-US"/>
               <a:t>Second level</a:t>
             </a:r>
           </a:p>
           <a:p>
             <a:pPr lvl="2"/>
             <a:r>
-              <a:rPr lang="en-US" smtClean="0"/>
+              <a:rPr lang="en-US"/>
               <a:t>Third level</a:t>
             </a:r>
           </a:p>
           <a:p>
             <a:pPr lvl="3"/>
             <a:r>
-              <a:rPr lang="en-US" smtClean="0"/>
+              <a:rPr lang="en-US"/>
               <a:t>Fourth level</a:t>
             </a:r>
           </a:p>
           <a:p>
             <a:pPr lvl="4"/>
             <a:r>
-              <a:rPr lang="en-US" smtClean="0"/>
+              <a:rPr lang="en-US"/>
               <a:t>Fifth level</a:t>
             </a:r>
-            <a:endParaRPr lang="en-US"/>
           </a:p>
         </p:txBody>
       </p:sp>
@@ -2735,7 +2731,7 @@
           <a:p>
             <a:fld id="{5BCAD085-E8A6-8845-BD4E-CB4CCA059FC4}" type="datetimeFigureOut">
               <a:rPr lang="en-US" smtClean="0"/>
-              <a:t>1/27/13</a:t>
+              <a:t>7/21/2026</a:t>
             </a:fld>
             <a:endParaRPr lang="en-US"/>
           </a:p>
@@ -3094,7 +3090,7 @@
 </file>
 
 <file path=ppt/slides/slide1.xml><?xml version="1.0" encoding="utf-8"?>
-<p:sld xmlns:a="http://schemas.openxmlformats.org/drawingml/2006/main" xmlns:p="http://schemas.openxmlformats.org/presentationml/2006/main" xmlns:r="http://schemas.openxmlformats.org/officeDocument/2006/relationships">
+<p:sld xmlns:a="http://schemas.openxmlformats.org/drawingml/2006/main" xmlns:r="http://schemas.openxmlformats.org/officeDocument/2006/relationships" xmlns:p="http://schemas.openxmlformats.org/presentationml/2006/main">
   <p:cSld>
     <p:spTree>
       <p:nvGrpSpPr>
@@ -3102,7 +3098,14 @@
         <p:cNvGrpSpPr/>
         <p:nvPr/>
       </p:nvGrpSpPr>
-      <p:grpSpPr/>
+      <p:grpSpPr>
+        <a:xfrm>
+          <a:off x="0" y="0"/>
+          <a:ext cx="0" cy="0"/>
+          <a:chOff x="0" y="0"/>
+          <a:chExt cx="0" cy="0"/>
+        </a:xfrm>
+      </p:grpSpPr>
       <p:sp>
         <p:nvSpPr>
           <p:cNvPr id="2" name="Rectangle 1"/>
@@ -3144,6 +3147,7 @@
           <a:lstStyle/>
           <a:p>
             <a:pPr algn="ctr"/>
+            <a:endParaRPr/>
           </a:p>
         </p:txBody>
       </p:sp>
@@ -3164,7 +3168,7 @@
           <a:noFill/>
         </p:spPr>
         <p:txBody>
-          <a:bodyPr wrap="square" anchor="t" lIns="0" rIns="0" tIns="0" bIns="0">
+          <a:bodyPr wrap="square" lIns="0" tIns="0" rIns="0" bIns="0" anchor="t">
             <a:spAutoFit/>
           </a:bodyPr>
           <a:lstStyle/>
@@ -3199,7 +3203,7 @@
           <a:noFill/>
         </p:spPr>
         <p:txBody>
-          <a:bodyPr wrap="square" anchor="t" lIns="0" rIns="0" tIns="0" bIns="0">
+          <a:bodyPr wrap="square" lIns="0" tIns="0" rIns="0" bIns="0" anchor="t">
             <a:spAutoFit/>
           </a:bodyPr>
           <a:lstStyle/>
@@ -3234,7 +3238,7 @@
           <a:noFill/>
         </p:spPr>
         <p:txBody>
-          <a:bodyPr wrap="square" anchor="t" lIns="0" rIns="0" tIns="0" bIns="0">
+          <a:bodyPr wrap="square" lIns="0" tIns="0" rIns="0" bIns="0" anchor="t">
             <a:spAutoFit/>
           </a:bodyPr>
           <a:lstStyle/>
@@ -3295,6 +3299,7 @@
           <a:lstStyle/>
           <a:p>
             <a:pPr algn="ctr"/>
+            <a:endParaRPr/>
           </a:p>
         </p:txBody>
       </p:sp>
@@ -3315,7 +3320,7 @@
           <a:noFill/>
         </p:spPr>
         <p:txBody>
-          <a:bodyPr wrap="square" anchor="t" lIns="0" rIns="0" tIns="0" bIns="0">
+          <a:bodyPr wrap="square" lIns="0" tIns="0" rIns="0" bIns="0" anchor="t">
             <a:spAutoFit/>
           </a:bodyPr>
           <a:lstStyle/>
@@ -3350,7 +3355,7 @@
           <a:noFill/>
         </p:spPr>
         <p:txBody>
-          <a:bodyPr wrap="square" anchor="t" lIns="0" rIns="0" tIns="0" bIns="0">
+          <a:bodyPr wrap="square" lIns="0" tIns="0" rIns="0" bIns="0" anchor="t">
             <a:spAutoFit/>
           </a:bodyPr>
           <a:lstStyle/>
@@ -3411,6 +3416,7 @@
           <a:lstStyle/>
           <a:p>
             <a:pPr algn="ctr"/>
+            <a:endParaRPr/>
           </a:p>
         </p:txBody>
       </p:sp>
@@ -3431,7 +3437,7 @@
           <a:noFill/>
         </p:spPr>
         <p:txBody>
-          <a:bodyPr wrap="square" anchor="t" lIns="0" rIns="0" tIns="0" bIns="0">
+          <a:bodyPr wrap="square" lIns="0" tIns="0" rIns="0" bIns="0" anchor="t">
             <a:spAutoFit/>
           </a:bodyPr>
           <a:lstStyle/>
@@ -3466,7 +3472,7 @@
           <a:noFill/>
         </p:spPr>
         <p:txBody>
-          <a:bodyPr wrap="square" anchor="t" lIns="0" rIns="0" tIns="0" bIns="0">
+          <a:bodyPr wrap="square" lIns="0" tIns="0" rIns="0" bIns="0" anchor="t">
             <a:spAutoFit/>
           </a:bodyPr>
           <a:lstStyle/>
@@ -3527,6 +3533,7 @@
           <a:lstStyle/>
           <a:p>
             <a:pPr algn="ctr"/>
+            <a:endParaRPr/>
           </a:p>
         </p:txBody>
       </p:sp>
@@ -3547,7 +3554,7 @@
           <a:noFill/>
         </p:spPr>
         <p:txBody>
-          <a:bodyPr wrap="square" anchor="t" lIns="0" rIns="0" tIns="0" bIns="0">
+          <a:bodyPr wrap="square" lIns="0" tIns="0" rIns="0" bIns="0" anchor="t">
             <a:spAutoFit/>
           </a:bodyPr>
           <a:lstStyle/>
@@ -3582,7 +3589,7 @@
           <a:noFill/>
         </p:spPr>
         <p:txBody>
-          <a:bodyPr wrap="square" anchor="t" lIns="0" rIns="0" tIns="0" bIns="0">
+          <a:bodyPr wrap="square" lIns="0" tIns="0" rIns="0" bIns="0" anchor="t">
             <a:spAutoFit/>
           </a:bodyPr>
           <a:lstStyle/>
@@ -3617,7 +3624,7 @@
           <a:noFill/>
         </p:spPr>
         <p:txBody>
-          <a:bodyPr wrap="square" anchor="t" lIns="0" rIns="0" tIns="0" bIns="0">
+          <a:bodyPr wrap="square" lIns="0" tIns="0" rIns="0" bIns="0" anchor="t">
             <a:spAutoFit/>
           </a:bodyPr>
           <a:lstStyle/>
@@ -3644,7 +3651,7 @@
 </file>
 
 <file path=ppt/slides/slide10.xml><?xml version="1.0" encoding="utf-8"?>
-<p:sld xmlns:a="http://schemas.openxmlformats.org/drawingml/2006/main" xmlns:p="http://schemas.openxmlformats.org/presentationml/2006/main" xmlns:r="http://schemas.openxmlformats.org/officeDocument/2006/relationships">
+<p:sld xmlns:a="http://schemas.openxmlformats.org/drawingml/2006/main" xmlns:r="http://schemas.openxmlformats.org/officeDocument/2006/relationships" xmlns:p="http://schemas.openxmlformats.org/presentationml/2006/main">
   <p:cSld>
     <p:spTree>
       <p:nvGrpSpPr>
@@ -3652,7 +3659,14 @@
         <p:cNvGrpSpPr/>
         <p:nvPr/>
       </p:nvGrpSpPr>
-      <p:grpSpPr/>
+      <p:grpSpPr>
+        <a:xfrm>
+          <a:off x="0" y="0"/>
+          <a:ext cx="0" cy="0"/>
+          <a:chOff x="0" y="0"/>
+          <a:chExt cx="0" cy="0"/>
+        </a:xfrm>
+      </p:grpSpPr>
       <p:sp>
         <p:nvSpPr>
           <p:cNvPr id="2" name="Rectangle 1"/>
@@ -3694,6 +3708,7 @@
           <a:lstStyle/>
           <a:p>
             <a:pPr algn="ctr"/>
+            <a:endParaRPr/>
           </a:p>
         </p:txBody>
       </p:sp>
@@ -3714,7 +3729,7 @@
           <a:noFill/>
         </p:spPr>
         <p:txBody>
-          <a:bodyPr wrap="square" anchor="t" lIns="0" rIns="0" tIns="0" bIns="0">
+          <a:bodyPr wrap="square" lIns="0" tIns="0" rIns="0" bIns="0" anchor="t">
             <a:spAutoFit/>
           </a:bodyPr>
           <a:lstStyle/>
@@ -3749,7 +3764,7 @@
           <a:noFill/>
         </p:spPr>
         <p:txBody>
-          <a:bodyPr wrap="square" anchor="t" lIns="0" rIns="0" tIns="0" bIns="0">
+          <a:bodyPr wrap="square" lIns="0" tIns="0" rIns="0" bIns="0" anchor="t">
             <a:spAutoFit/>
           </a:bodyPr>
           <a:lstStyle/>
@@ -3808,6 +3823,7 @@
           <a:lstStyle/>
           <a:p>
             <a:pPr algn="ctr"/>
+            <a:endParaRPr/>
           </a:p>
         </p:txBody>
       </p:sp>
@@ -3828,7 +3844,7 @@
           <a:noFill/>
         </p:spPr>
         <p:txBody>
-          <a:bodyPr wrap="square" anchor="t" lIns="0" rIns="0" tIns="0" bIns="0">
+          <a:bodyPr wrap="square" lIns="0" tIns="0" rIns="0" bIns="0" anchor="t">
             <a:spAutoFit/>
           </a:bodyPr>
           <a:lstStyle/>
@@ -3863,7 +3879,7 @@
           <a:noFill/>
         </p:spPr>
         <p:txBody>
-          <a:bodyPr wrap="square" anchor="t" lIns="0" rIns="0" tIns="0" bIns="0">
+          <a:bodyPr wrap="square" lIns="0" tIns="0" rIns="0" bIns="0" anchor="t">
             <a:spAutoFit/>
           </a:bodyPr>
           <a:lstStyle/>
@@ -3898,7 +3914,7 @@
           <a:noFill/>
         </p:spPr>
         <p:txBody>
-          <a:bodyPr wrap="square" anchor="t" lIns="0" rIns="0" tIns="0" bIns="0">
+          <a:bodyPr wrap="square" lIns="0" tIns="0" rIns="0" bIns="0" anchor="t">
             <a:spAutoFit/>
           </a:bodyPr>
           <a:lstStyle/>
@@ -3933,7 +3949,7 @@
           <a:noFill/>
         </p:spPr>
         <p:txBody>
-          <a:bodyPr wrap="square" lIns="0" rIns="0" tIns="0" bIns="0">
+          <a:bodyPr wrap="square" lIns="0" tIns="0" rIns="0" bIns="0">
             <a:spAutoFit/>
           </a:bodyPr>
           <a:lstStyle/>
@@ -4048,6 +4064,7 @@
           <a:lstStyle/>
           <a:p>
             <a:pPr algn="ctr"/>
+            <a:endParaRPr/>
           </a:p>
         </p:txBody>
       </p:sp>
@@ -4088,7 +4105,7 @@
           </a:fontRef>
         </p:style>
         <p:txBody>
-          <a:bodyPr rtlCol="0" anchor="ctr" wrap="none" lIns="50800" rIns="50800" tIns="0" bIns="0"/>
+          <a:bodyPr wrap="none" lIns="50800" tIns="0" rIns="50800" bIns="0" rtlCol="0" anchor="ctr"/>
           <a:lstStyle/>
           <a:p>
             <a:pPr algn="ctr"/>
@@ -4147,6 +4164,7 @@
           <a:lstStyle/>
           <a:p>
             <a:pPr algn="ctr"/>
+            <a:endParaRPr/>
           </a:p>
         </p:txBody>
       </p:sp>
@@ -4167,7 +4185,7 @@
           <a:noFill/>
         </p:spPr>
         <p:txBody>
-          <a:bodyPr wrap="square" anchor="t" lIns="0" rIns="0" tIns="0" bIns="0">
+          <a:bodyPr wrap="square" lIns="0" tIns="0" rIns="0" bIns="0" anchor="t">
             <a:spAutoFit/>
           </a:bodyPr>
           <a:lstStyle/>
@@ -4202,7 +4220,7 @@
           <a:noFill/>
         </p:spPr>
         <p:txBody>
-          <a:bodyPr wrap="square" anchor="t" lIns="0" rIns="0" tIns="0" bIns="0">
+          <a:bodyPr wrap="square" lIns="0" tIns="0" rIns="0" bIns="0" anchor="t">
             <a:spAutoFit/>
           </a:bodyPr>
           <a:lstStyle/>
@@ -4237,7 +4255,7 @@
           <a:noFill/>
         </p:spPr>
         <p:txBody>
-          <a:bodyPr wrap="square" anchor="t" lIns="0" rIns="0" tIns="0" bIns="0">
+          <a:bodyPr wrap="square" lIns="0" tIns="0" rIns="0" bIns="0" anchor="t">
             <a:spAutoFit/>
           </a:bodyPr>
           <a:lstStyle/>
@@ -4272,7 +4290,7 @@
           <a:noFill/>
         </p:spPr>
         <p:txBody>
-          <a:bodyPr wrap="square" anchor="t" lIns="0" rIns="0" tIns="0" bIns="0">
+          <a:bodyPr wrap="square" lIns="0" tIns="0" rIns="0" bIns="0" anchor="t">
             <a:spAutoFit/>
           </a:bodyPr>
           <a:lstStyle/>
@@ -4333,6 +4351,7 @@
           <a:lstStyle/>
           <a:p>
             <a:pPr algn="ctr"/>
+            <a:endParaRPr/>
           </a:p>
         </p:txBody>
       </p:sp>
@@ -4353,7 +4372,7 @@
           <a:noFill/>
         </p:spPr>
         <p:txBody>
-          <a:bodyPr wrap="square" anchor="t" lIns="0" rIns="0" tIns="0" bIns="0">
+          <a:bodyPr wrap="square" lIns="0" tIns="0" rIns="0" bIns="0" anchor="t">
             <a:spAutoFit/>
           </a:bodyPr>
           <a:lstStyle/>
@@ -4388,7 +4407,7 @@
           <a:noFill/>
         </p:spPr>
         <p:txBody>
-          <a:bodyPr wrap="square" anchor="t" lIns="0" rIns="0" tIns="0" bIns="0">
+          <a:bodyPr wrap="square" lIns="0" tIns="0" rIns="0" bIns="0" anchor="t">
             <a:spAutoFit/>
           </a:bodyPr>
           <a:lstStyle/>
@@ -4423,7 +4442,7 @@
           <a:noFill/>
         </p:spPr>
         <p:txBody>
-          <a:bodyPr wrap="square" anchor="t" lIns="0" rIns="0" tIns="0" bIns="0">
+          <a:bodyPr wrap="square" lIns="0" tIns="0" rIns="0" bIns="0" anchor="t">
             <a:spAutoFit/>
           </a:bodyPr>
           <a:lstStyle/>
@@ -4458,7 +4477,7 @@
           <a:noFill/>
         </p:spPr>
         <p:txBody>
-          <a:bodyPr wrap="square" anchor="t" lIns="0" rIns="0" tIns="0" bIns="0">
+          <a:bodyPr wrap="square" lIns="0" tIns="0" rIns="0" bIns="0" anchor="t">
             <a:spAutoFit/>
           </a:bodyPr>
           <a:lstStyle/>
@@ -4485,7 +4504,7 @@
 </file>
 
 <file path=ppt/slides/slide11.xml><?xml version="1.0" encoding="utf-8"?>
-<p:sld xmlns:a="http://schemas.openxmlformats.org/drawingml/2006/main" xmlns:p="http://schemas.openxmlformats.org/presentationml/2006/main" xmlns:r="http://schemas.openxmlformats.org/officeDocument/2006/relationships">
+<p:sld xmlns:a="http://schemas.openxmlformats.org/drawingml/2006/main" xmlns:r="http://schemas.openxmlformats.org/officeDocument/2006/relationships" xmlns:p="http://schemas.openxmlformats.org/presentationml/2006/main">
   <p:cSld>
     <p:spTree>
       <p:nvGrpSpPr>
@@ -4493,7 +4512,14 @@
         <p:cNvGrpSpPr/>
         <p:nvPr/>
       </p:nvGrpSpPr>
-      <p:grpSpPr/>
+      <p:grpSpPr>
+        <a:xfrm>
+          <a:off x="0" y="0"/>
+          <a:ext cx="0" cy="0"/>
+          <a:chOff x="0" y="0"/>
+          <a:chExt cx="0" cy="0"/>
+        </a:xfrm>
+      </p:grpSpPr>
       <p:sp>
         <p:nvSpPr>
           <p:cNvPr id="2" name="Rectangle 1"/>
@@ -4535,6 +4561,7 @@
           <a:lstStyle/>
           <a:p>
             <a:pPr algn="ctr"/>
+            <a:endParaRPr/>
           </a:p>
         </p:txBody>
       </p:sp>
@@ -4555,7 +4582,7 @@
           <a:noFill/>
         </p:spPr>
         <p:txBody>
-          <a:bodyPr wrap="square" anchor="t" lIns="0" rIns="0" tIns="0" bIns="0">
+          <a:bodyPr wrap="square" lIns="0" tIns="0" rIns="0" bIns="0" anchor="t">
             <a:spAutoFit/>
           </a:bodyPr>
           <a:lstStyle/>
@@ -4590,7 +4617,7 @@
           <a:noFill/>
         </p:spPr>
         <p:txBody>
-          <a:bodyPr wrap="square" anchor="t" lIns="0" rIns="0" tIns="0" bIns="0">
+          <a:bodyPr wrap="square" lIns="0" tIns="0" rIns="0" bIns="0" anchor="t">
             <a:spAutoFit/>
           </a:bodyPr>
           <a:lstStyle/>
@@ -4649,6 +4676,7 @@
           <a:lstStyle/>
           <a:p>
             <a:pPr algn="ctr"/>
+            <a:endParaRPr/>
           </a:p>
         </p:txBody>
       </p:sp>
@@ -4669,7 +4697,7 @@
           <a:noFill/>
         </p:spPr>
         <p:txBody>
-          <a:bodyPr wrap="square" anchor="t" lIns="0" rIns="0" tIns="0" bIns="0">
+          <a:bodyPr wrap="square" lIns="0" tIns="0" rIns="0" bIns="0" anchor="t">
             <a:spAutoFit/>
           </a:bodyPr>
           <a:lstStyle/>
@@ -4704,7 +4732,7 @@
           <a:noFill/>
         </p:spPr>
         <p:txBody>
-          <a:bodyPr wrap="square" anchor="t" lIns="0" rIns="0" tIns="0" bIns="0">
+          <a:bodyPr wrap="square" lIns="0" tIns="0" rIns="0" bIns="0" anchor="t">
             <a:spAutoFit/>
           </a:bodyPr>
           <a:lstStyle/>
@@ -4739,7 +4767,7 @@
           <a:noFill/>
         </p:spPr>
         <p:txBody>
-          <a:bodyPr wrap="square" anchor="t" lIns="0" rIns="0" tIns="0" bIns="0">
+          <a:bodyPr wrap="square" lIns="0" tIns="0" rIns="0" bIns="0" anchor="t">
             <a:spAutoFit/>
           </a:bodyPr>
           <a:lstStyle/>
@@ -4802,6 +4830,7 @@
           <a:lstStyle/>
           <a:p>
             <a:pPr algn="ctr"/>
+            <a:endParaRPr/>
           </a:p>
         </p:txBody>
       </p:sp>
@@ -4842,7 +4871,7 @@
           </a:fontRef>
         </p:style>
         <p:txBody>
-          <a:bodyPr rtlCol="0" anchor="ctr" wrap="none" lIns="50800" rIns="50800" tIns="0" bIns="0"/>
+          <a:bodyPr wrap="none" lIns="50800" tIns="0" rIns="50800" bIns="0" rtlCol="0" anchor="ctr"/>
           <a:lstStyle/>
           <a:p>
             <a:pPr algn="ctr"/>
@@ -4875,7 +4904,7 @@
           <a:noFill/>
         </p:spPr>
         <p:txBody>
-          <a:bodyPr wrap="square" anchor="t" lIns="0" rIns="0" tIns="0" bIns="0">
+          <a:bodyPr wrap="square" lIns="0" tIns="0" rIns="0" bIns="0" anchor="t">
             <a:spAutoFit/>
           </a:bodyPr>
           <a:lstStyle/>
@@ -4938,6 +4967,7 @@
           <a:lstStyle/>
           <a:p>
             <a:pPr algn="ctr"/>
+            <a:endParaRPr/>
           </a:p>
         </p:txBody>
       </p:sp>
@@ -4978,7 +5008,7 @@
           </a:fontRef>
         </p:style>
         <p:txBody>
-          <a:bodyPr rtlCol="0" anchor="ctr" wrap="none" lIns="50800" rIns="50800" tIns="0" bIns="0"/>
+          <a:bodyPr wrap="none" lIns="50800" tIns="0" rIns="50800" bIns="0" rtlCol="0" anchor="ctr"/>
           <a:lstStyle/>
           <a:p>
             <a:pPr algn="ctr"/>
@@ -5011,7 +5041,7 @@
           <a:noFill/>
         </p:spPr>
         <p:txBody>
-          <a:bodyPr wrap="square" anchor="t" lIns="0" rIns="0" tIns="0" bIns="0">
+          <a:bodyPr wrap="square" lIns="0" tIns="0" rIns="0" bIns="0" anchor="t">
             <a:spAutoFit/>
           </a:bodyPr>
           <a:lstStyle/>
@@ -5074,6 +5104,7 @@
           <a:lstStyle/>
           <a:p>
             <a:pPr algn="ctr"/>
+            <a:endParaRPr/>
           </a:p>
         </p:txBody>
       </p:sp>
@@ -5114,7 +5145,7 @@
           </a:fontRef>
         </p:style>
         <p:txBody>
-          <a:bodyPr rtlCol="0" anchor="ctr" wrap="none" lIns="50800" rIns="50800" tIns="0" bIns="0"/>
+          <a:bodyPr wrap="none" lIns="50800" tIns="0" rIns="50800" bIns="0" rtlCol="0" anchor="ctr"/>
           <a:lstStyle/>
           <a:p>
             <a:pPr algn="ctr"/>
@@ -5147,7 +5178,7 @@
           <a:noFill/>
         </p:spPr>
         <p:txBody>
-          <a:bodyPr wrap="square" anchor="t" lIns="0" rIns="0" tIns="0" bIns="0">
+          <a:bodyPr wrap="square" lIns="0" tIns="0" rIns="0" bIns="0" anchor="t">
             <a:spAutoFit/>
           </a:bodyPr>
           <a:lstStyle/>
@@ -5210,6 +5241,7 @@
           <a:lstStyle/>
           <a:p>
             <a:pPr algn="ctr"/>
+            <a:endParaRPr/>
           </a:p>
         </p:txBody>
       </p:sp>
@@ -5250,7 +5282,7 @@
           </a:fontRef>
         </p:style>
         <p:txBody>
-          <a:bodyPr rtlCol="0" anchor="ctr" wrap="none" lIns="50800" rIns="50800" tIns="0" bIns="0"/>
+          <a:bodyPr wrap="none" lIns="50800" tIns="0" rIns="50800" bIns="0" rtlCol="0" anchor="ctr"/>
           <a:lstStyle/>
           <a:p>
             <a:pPr algn="ctr"/>
@@ -5283,7 +5315,7 @@
           <a:noFill/>
         </p:spPr>
         <p:txBody>
-          <a:bodyPr wrap="square" anchor="t" lIns="0" rIns="0" tIns="0" bIns="0">
+          <a:bodyPr wrap="square" lIns="0" tIns="0" rIns="0" bIns="0" anchor="t">
             <a:spAutoFit/>
           </a:bodyPr>
           <a:lstStyle/>
@@ -5318,7 +5350,7 @@
           <a:noFill/>
         </p:spPr>
         <p:txBody>
-          <a:bodyPr wrap="square" anchor="t" lIns="0" rIns="0" tIns="0" bIns="0">
+          <a:bodyPr wrap="square" lIns="0" tIns="0" rIns="0" bIns="0" anchor="t">
             <a:spAutoFit/>
           </a:bodyPr>
           <a:lstStyle/>
@@ -5345,7 +5377,7 @@
 </file>
 
 <file path=ppt/slides/slide12.xml><?xml version="1.0" encoding="utf-8"?>
-<p:sld xmlns:a="http://schemas.openxmlformats.org/drawingml/2006/main" xmlns:p="http://schemas.openxmlformats.org/presentationml/2006/main" xmlns:r="http://schemas.openxmlformats.org/officeDocument/2006/relationships">
+<p:sld xmlns:a="http://schemas.openxmlformats.org/drawingml/2006/main" xmlns:r="http://schemas.openxmlformats.org/officeDocument/2006/relationships" xmlns:p="http://schemas.openxmlformats.org/presentationml/2006/main">
   <p:cSld>
     <p:spTree>
       <p:nvGrpSpPr>
@@ -5353,7 +5385,14 @@
         <p:cNvGrpSpPr/>
         <p:nvPr/>
       </p:nvGrpSpPr>
-      <p:grpSpPr/>
+      <p:grpSpPr>
+        <a:xfrm>
+          <a:off x="0" y="0"/>
+          <a:ext cx="0" cy="0"/>
+          <a:chOff x="0" y="0"/>
+          <a:chExt cx="0" cy="0"/>
+        </a:xfrm>
+      </p:grpSpPr>
       <p:sp>
         <p:nvSpPr>
           <p:cNvPr id="2" name="Rectangle 1"/>
@@ -5395,6 +5434,7 @@
           <a:lstStyle/>
           <a:p>
             <a:pPr algn="ctr"/>
+            <a:endParaRPr/>
           </a:p>
         </p:txBody>
       </p:sp>
@@ -5415,7 +5455,7 @@
           <a:noFill/>
         </p:spPr>
         <p:txBody>
-          <a:bodyPr wrap="square" anchor="t" lIns="0" rIns="0" tIns="0" bIns="0">
+          <a:bodyPr wrap="square" lIns="0" tIns="0" rIns="0" bIns="0" anchor="t">
             <a:spAutoFit/>
           </a:bodyPr>
           <a:lstStyle/>
@@ -5450,7 +5490,7 @@
           <a:noFill/>
         </p:spPr>
         <p:txBody>
-          <a:bodyPr wrap="square" anchor="t" lIns="0" rIns="0" tIns="0" bIns="0">
+          <a:bodyPr wrap="square" lIns="0" tIns="0" rIns="0" bIns="0" anchor="t">
             <a:spAutoFit/>
           </a:bodyPr>
           <a:lstStyle/>
@@ -5509,6 +5549,7 @@
           <a:lstStyle/>
           <a:p>
             <a:pPr algn="ctr"/>
+            <a:endParaRPr/>
           </a:p>
         </p:txBody>
       </p:sp>
@@ -5529,7 +5570,7 @@
           <a:noFill/>
         </p:spPr>
         <p:txBody>
-          <a:bodyPr wrap="square" anchor="t" lIns="0" rIns="0" tIns="0" bIns="0">
+          <a:bodyPr wrap="square" lIns="0" tIns="0" rIns="0" bIns="0" anchor="t">
             <a:spAutoFit/>
           </a:bodyPr>
           <a:lstStyle/>
@@ -5564,7 +5605,7 @@
           <a:noFill/>
         </p:spPr>
         <p:txBody>
-          <a:bodyPr wrap="square" anchor="t" lIns="0" rIns="0" tIns="0" bIns="0">
+          <a:bodyPr wrap="square" lIns="0" tIns="0" rIns="0" bIns="0" anchor="t">
             <a:spAutoFit/>
           </a:bodyPr>
           <a:lstStyle/>
@@ -5599,7 +5640,7 @@
           <a:noFill/>
         </p:spPr>
         <p:txBody>
-          <a:bodyPr wrap="square" anchor="t" lIns="0" rIns="0" tIns="0" bIns="0">
+          <a:bodyPr wrap="square" lIns="0" tIns="0" rIns="0" bIns="0" anchor="t">
             <a:spAutoFit/>
           </a:bodyPr>
           <a:lstStyle/>
@@ -5662,6 +5703,7 @@
           <a:lstStyle/>
           <a:p>
             <a:pPr algn="ctr"/>
+            <a:endParaRPr/>
           </a:p>
         </p:txBody>
       </p:sp>
@@ -5702,7 +5744,7 @@
           </a:fontRef>
         </p:style>
         <p:txBody>
-          <a:bodyPr rtlCol="0" anchor="ctr" wrap="none" lIns="50800" rIns="50800" tIns="0" bIns="0"/>
+          <a:bodyPr wrap="none" lIns="50800" tIns="0" rIns="50800" bIns="0" rtlCol="0" anchor="ctr"/>
           <a:lstStyle/>
           <a:p>
             <a:pPr algn="ctr"/>
@@ -5735,7 +5777,7 @@
           <a:noFill/>
         </p:spPr>
         <p:txBody>
-          <a:bodyPr wrap="square" anchor="t" lIns="0" rIns="0" tIns="0" bIns="0">
+          <a:bodyPr wrap="square" lIns="0" tIns="0" rIns="0" bIns="0" anchor="t">
             <a:spAutoFit/>
           </a:bodyPr>
           <a:lstStyle/>
@@ -5798,6 +5840,7 @@
           <a:lstStyle/>
           <a:p>
             <a:pPr algn="ctr"/>
+            <a:endParaRPr/>
           </a:p>
         </p:txBody>
       </p:sp>
@@ -5838,7 +5881,7 @@
           </a:fontRef>
         </p:style>
         <p:txBody>
-          <a:bodyPr rtlCol="0" anchor="ctr" wrap="none" lIns="50800" rIns="50800" tIns="0" bIns="0"/>
+          <a:bodyPr wrap="none" lIns="50800" tIns="0" rIns="50800" bIns="0" rtlCol="0" anchor="ctr"/>
           <a:lstStyle/>
           <a:p>
             <a:pPr algn="ctr"/>
@@ -5871,7 +5914,7 @@
           <a:noFill/>
         </p:spPr>
         <p:txBody>
-          <a:bodyPr wrap="square" anchor="t" lIns="0" rIns="0" tIns="0" bIns="0">
+          <a:bodyPr wrap="square" lIns="0" tIns="0" rIns="0" bIns="0" anchor="t">
             <a:spAutoFit/>
           </a:bodyPr>
           <a:lstStyle/>
@@ -5934,6 +5977,7 @@
           <a:lstStyle/>
           <a:p>
             <a:pPr algn="ctr"/>
+            <a:endParaRPr/>
           </a:p>
         </p:txBody>
       </p:sp>
@@ -5974,7 +6018,7 @@
           </a:fontRef>
         </p:style>
         <p:txBody>
-          <a:bodyPr rtlCol="0" anchor="ctr" wrap="none" lIns="50800" rIns="50800" tIns="0" bIns="0"/>
+          <a:bodyPr wrap="none" lIns="50800" tIns="0" rIns="50800" bIns="0" rtlCol="0" anchor="ctr"/>
           <a:lstStyle/>
           <a:p>
             <a:pPr algn="ctr"/>
@@ -6007,7 +6051,7 @@
           <a:noFill/>
         </p:spPr>
         <p:txBody>
-          <a:bodyPr wrap="square" anchor="t" lIns="0" rIns="0" tIns="0" bIns="0">
+          <a:bodyPr wrap="square" lIns="0" tIns="0" rIns="0" bIns="0" anchor="t">
             <a:spAutoFit/>
           </a:bodyPr>
           <a:lstStyle/>
@@ -6070,6 +6114,7 @@
           <a:lstStyle/>
           <a:p>
             <a:pPr algn="ctr"/>
+            <a:endParaRPr/>
           </a:p>
         </p:txBody>
       </p:sp>
@@ -6110,7 +6155,7 @@
           </a:fontRef>
         </p:style>
         <p:txBody>
-          <a:bodyPr rtlCol="0" anchor="ctr" wrap="none" lIns="50800" rIns="50800" tIns="0" bIns="0"/>
+          <a:bodyPr wrap="none" lIns="50800" tIns="0" rIns="50800" bIns="0" rtlCol="0" anchor="ctr"/>
           <a:lstStyle/>
           <a:p>
             <a:pPr algn="ctr"/>
@@ -6143,7 +6188,7 @@
           <a:noFill/>
         </p:spPr>
         <p:txBody>
-          <a:bodyPr wrap="square" anchor="t" lIns="0" rIns="0" tIns="0" bIns="0">
+          <a:bodyPr wrap="square" lIns="0" tIns="0" rIns="0" bIns="0" anchor="t">
             <a:spAutoFit/>
           </a:bodyPr>
           <a:lstStyle/>
@@ -6206,6 +6251,7 @@
           <a:lstStyle/>
           <a:p>
             <a:pPr algn="ctr"/>
+            <a:endParaRPr/>
           </a:p>
         </p:txBody>
       </p:sp>
@@ -6246,7 +6292,7 @@
           </a:fontRef>
         </p:style>
         <p:txBody>
-          <a:bodyPr rtlCol="0" anchor="ctr" wrap="none" lIns="50800" rIns="50800" tIns="0" bIns="0"/>
+          <a:bodyPr wrap="none" lIns="50800" tIns="0" rIns="50800" bIns="0" rtlCol="0" anchor="ctr"/>
           <a:lstStyle/>
           <a:p>
             <a:pPr algn="ctr"/>
@@ -6279,7 +6325,7 @@
           <a:noFill/>
         </p:spPr>
         <p:txBody>
-          <a:bodyPr wrap="square" anchor="t" lIns="0" rIns="0" tIns="0" bIns="0">
+          <a:bodyPr wrap="square" lIns="0" tIns="0" rIns="0" bIns="0" anchor="t">
             <a:spAutoFit/>
           </a:bodyPr>
           <a:lstStyle/>
@@ -6342,6 +6388,7 @@
           <a:lstStyle/>
           <a:p>
             <a:pPr algn="ctr"/>
+            <a:endParaRPr/>
           </a:p>
         </p:txBody>
       </p:sp>
@@ -6382,7 +6429,7 @@
           </a:fontRef>
         </p:style>
         <p:txBody>
-          <a:bodyPr rtlCol="0" anchor="ctr" wrap="none" lIns="50800" rIns="50800" tIns="0" bIns="0"/>
+          <a:bodyPr wrap="none" lIns="50800" tIns="0" rIns="50800" bIns="0" rtlCol="0" anchor="ctr"/>
           <a:lstStyle/>
           <a:p>
             <a:pPr algn="ctr"/>
@@ -6415,7 +6462,7 @@
           <a:noFill/>
         </p:spPr>
         <p:txBody>
-          <a:bodyPr wrap="square" anchor="t" lIns="0" rIns="0" tIns="0" bIns="0">
+          <a:bodyPr wrap="square" lIns="0" tIns="0" rIns="0" bIns="0" anchor="t">
             <a:spAutoFit/>
           </a:bodyPr>
           <a:lstStyle/>
@@ -6450,7 +6497,7 @@
           <a:noFill/>
         </p:spPr>
         <p:txBody>
-          <a:bodyPr wrap="square" anchor="t" lIns="0" rIns="0" tIns="0" bIns="0">
+          <a:bodyPr wrap="square" lIns="0" tIns="0" rIns="0" bIns="0" anchor="t">
             <a:spAutoFit/>
           </a:bodyPr>
           <a:lstStyle/>
@@ -6477,7 +6524,7 @@
 </file>
 
 <file path=ppt/slides/slide13.xml><?xml version="1.0" encoding="utf-8"?>
-<p:sld xmlns:a="http://schemas.openxmlformats.org/drawingml/2006/main" xmlns:p="http://schemas.openxmlformats.org/presentationml/2006/main" xmlns:r="http://schemas.openxmlformats.org/officeDocument/2006/relationships">
+<p:sld xmlns:a="http://schemas.openxmlformats.org/drawingml/2006/main" xmlns:r="http://schemas.openxmlformats.org/officeDocument/2006/relationships" xmlns:p="http://schemas.openxmlformats.org/presentationml/2006/main">
   <p:cSld>
     <p:spTree>
       <p:nvGrpSpPr>
@@ -6485,7 +6532,14 @@
         <p:cNvGrpSpPr/>
         <p:nvPr/>
       </p:nvGrpSpPr>
-      <p:grpSpPr/>
+      <p:grpSpPr>
+        <a:xfrm>
+          <a:off x="0" y="0"/>
+          <a:ext cx="0" cy="0"/>
+          <a:chOff x="0" y="0"/>
+          <a:chExt cx="0" cy="0"/>
+        </a:xfrm>
+      </p:grpSpPr>
       <p:sp>
         <p:nvSpPr>
           <p:cNvPr id="2" name="Rectangle 1"/>
@@ -6527,6 +6581,7 @@
           <a:lstStyle/>
           <a:p>
             <a:pPr algn="ctr"/>
+            <a:endParaRPr/>
           </a:p>
         </p:txBody>
       </p:sp>
@@ -6547,7 +6602,7 @@
           <a:noFill/>
         </p:spPr>
         <p:txBody>
-          <a:bodyPr wrap="square" anchor="t" lIns="0" rIns="0" tIns="0" bIns="0">
+          <a:bodyPr wrap="square" lIns="0" tIns="0" rIns="0" bIns="0" anchor="t">
             <a:spAutoFit/>
           </a:bodyPr>
           <a:lstStyle/>
@@ -6582,7 +6637,7 @@
           <a:noFill/>
         </p:spPr>
         <p:txBody>
-          <a:bodyPr wrap="square" anchor="t" lIns="0" rIns="0" tIns="0" bIns="0">
+          <a:bodyPr wrap="square" lIns="0" tIns="0" rIns="0" bIns="0" anchor="t">
             <a:spAutoFit/>
           </a:bodyPr>
           <a:lstStyle/>
@@ -6641,6 +6696,7 @@
           <a:lstStyle/>
           <a:p>
             <a:pPr algn="ctr"/>
+            <a:endParaRPr/>
           </a:p>
         </p:txBody>
       </p:sp>
@@ -6661,7 +6717,7 @@
           <a:noFill/>
         </p:spPr>
         <p:txBody>
-          <a:bodyPr wrap="square" anchor="t" lIns="0" rIns="0" tIns="0" bIns="0">
+          <a:bodyPr wrap="square" lIns="0" tIns="0" rIns="0" bIns="0" anchor="t">
             <a:spAutoFit/>
           </a:bodyPr>
           <a:lstStyle/>
@@ -6696,7 +6752,7 @@
           <a:noFill/>
         </p:spPr>
         <p:txBody>
-          <a:bodyPr wrap="square" anchor="t" lIns="0" rIns="0" tIns="0" bIns="0">
+          <a:bodyPr wrap="square" lIns="0" tIns="0" rIns="0" bIns="0" anchor="t">
             <a:spAutoFit/>
           </a:bodyPr>
           <a:lstStyle/>
@@ -6731,7 +6787,7 @@
           <a:noFill/>
         </p:spPr>
         <p:txBody>
-          <a:bodyPr wrap="square" anchor="t" lIns="0" rIns="0" tIns="0" bIns="0">
+          <a:bodyPr wrap="square" lIns="0" tIns="0" rIns="0" bIns="0" anchor="t">
             <a:spAutoFit/>
           </a:bodyPr>
           <a:lstStyle/>
@@ -6794,6 +6850,7 @@
           <a:lstStyle/>
           <a:p>
             <a:pPr algn="ctr"/>
+            <a:endParaRPr/>
           </a:p>
         </p:txBody>
       </p:sp>
@@ -6834,7 +6891,7 @@
           </a:fontRef>
         </p:style>
         <p:txBody>
-          <a:bodyPr rtlCol="0" anchor="ctr" wrap="none" lIns="50800" rIns="50800" tIns="0" bIns="0"/>
+          <a:bodyPr wrap="none" lIns="50800" tIns="0" rIns="50800" bIns="0" rtlCol="0" anchor="ctr"/>
           <a:lstStyle/>
           <a:p>
             <a:pPr algn="ctr"/>
@@ -6867,7 +6924,7 @@
           <a:noFill/>
         </p:spPr>
         <p:txBody>
-          <a:bodyPr wrap="square" anchor="t" lIns="0" rIns="0" tIns="0" bIns="0">
+          <a:bodyPr wrap="square" lIns="0" tIns="0" rIns="0" bIns="0" anchor="t">
             <a:spAutoFit/>
           </a:bodyPr>
           <a:lstStyle/>
@@ -6902,7 +6959,7 @@
           <a:noFill/>
         </p:spPr>
         <p:txBody>
-          <a:bodyPr wrap="square" anchor="t" lIns="0" rIns="0" tIns="0" bIns="0">
+          <a:bodyPr wrap="square" lIns="0" tIns="0" rIns="0" bIns="0" anchor="t">
             <a:spAutoFit/>
           </a:bodyPr>
           <a:lstStyle/>
@@ -6965,6 +7022,7 @@
           <a:lstStyle/>
           <a:p>
             <a:pPr algn="ctr"/>
+            <a:endParaRPr/>
           </a:p>
         </p:txBody>
       </p:sp>
@@ -7005,7 +7063,7 @@
           </a:fontRef>
         </p:style>
         <p:txBody>
-          <a:bodyPr rtlCol="0" anchor="ctr" wrap="none" lIns="50800" rIns="50800" tIns="0" bIns="0"/>
+          <a:bodyPr wrap="none" lIns="50800" tIns="0" rIns="50800" bIns="0" rtlCol="0" anchor="ctr"/>
           <a:lstStyle/>
           <a:p>
             <a:pPr algn="ctr"/>
@@ -7038,7 +7096,7 @@
           <a:noFill/>
         </p:spPr>
         <p:txBody>
-          <a:bodyPr wrap="square" anchor="t" lIns="0" rIns="0" tIns="0" bIns="0">
+          <a:bodyPr wrap="square" lIns="0" tIns="0" rIns="0" bIns="0" anchor="t">
             <a:spAutoFit/>
           </a:bodyPr>
           <a:lstStyle/>
@@ -7073,7 +7131,7 @@
           <a:noFill/>
         </p:spPr>
         <p:txBody>
-          <a:bodyPr wrap="square" anchor="t" lIns="0" rIns="0" tIns="0" bIns="0">
+          <a:bodyPr wrap="square" lIns="0" tIns="0" rIns="0" bIns="0" anchor="t">
             <a:spAutoFit/>
           </a:bodyPr>
           <a:lstStyle/>
@@ -7136,6 +7194,7 @@
           <a:lstStyle/>
           <a:p>
             <a:pPr algn="ctr"/>
+            <a:endParaRPr/>
           </a:p>
         </p:txBody>
       </p:sp>
@@ -7176,7 +7235,7 @@
           </a:fontRef>
         </p:style>
         <p:txBody>
-          <a:bodyPr rtlCol="0" anchor="ctr" wrap="none" lIns="50800" rIns="50800" tIns="0" bIns="0"/>
+          <a:bodyPr wrap="none" lIns="50800" tIns="0" rIns="50800" bIns="0" rtlCol="0" anchor="ctr"/>
           <a:lstStyle/>
           <a:p>
             <a:pPr algn="ctr"/>
@@ -7209,7 +7268,7 @@
           <a:noFill/>
         </p:spPr>
         <p:txBody>
-          <a:bodyPr wrap="square" anchor="t" lIns="0" rIns="0" tIns="0" bIns="0">
+          <a:bodyPr wrap="square" lIns="0" tIns="0" rIns="0" bIns="0" anchor="t">
             <a:spAutoFit/>
           </a:bodyPr>
           <a:lstStyle/>
@@ -7244,7 +7303,7 @@
           <a:noFill/>
         </p:spPr>
         <p:txBody>
-          <a:bodyPr wrap="square" anchor="t" lIns="0" rIns="0" tIns="0" bIns="0">
+          <a:bodyPr wrap="square" lIns="0" tIns="0" rIns="0" bIns="0" anchor="t">
             <a:spAutoFit/>
           </a:bodyPr>
           <a:lstStyle/>
@@ -7307,6 +7366,7 @@
           <a:lstStyle/>
           <a:p>
             <a:pPr algn="ctr"/>
+            <a:endParaRPr/>
           </a:p>
         </p:txBody>
       </p:sp>
@@ -7347,7 +7407,7 @@
           </a:fontRef>
         </p:style>
         <p:txBody>
-          <a:bodyPr rtlCol="0" anchor="ctr" wrap="none" lIns="50800" rIns="50800" tIns="0" bIns="0"/>
+          <a:bodyPr wrap="none" lIns="50800" tIns="0" rIns="50800" bIns="0" rtlCol="0" anchor="ctr"/>
           <a:lstStyle/>
           <a:p>
             <a:pPr algn="ctr"/>
@@ -7380,7 +7440,7 @@
           <a:noFill/>
         </p:spPr>
         <p:txBody>
-          <a:bodyPr wrap="square" anchor="t" lIns="0" rIns="0" tIns="0" bIns="0">
+          <a:bodyPr wrap="square" lIns="0" tIns="0" rIns="0" bIns="0" anchor="t">
             <a:spAutoFit/>
           </a:bodyPr>
           <a:lstStyle/>
@@ -7415,7 +7475,7 @@
           <a:noFill/>
         </p:spPr>
         <p:txBody>
-          <a:bodyPr wrap="square" anchor="t" lIns="0" rIns="0" tIns="0" bIns="0">
+          <a:bodyPr wrap="square" lIns="0" tIns="0" rIns="0" bIns="0" anchor="t">
             <a:spAutoFit/>
           </a:bodyPr>
           <a:lstStyle/>
@@ -7442,7 +7502,7 @@
 </file>
 
 <file path=ppt/slides/slide14.xml><?xml version="1.0" encoding="utf-8"?>
-<p:sld xmlns:a="http://schemas.openxmlformats.org/drawingml/2006/main" xmlns:p="http://schemas.openxmlformats.org/presentationml/2006/main" xmlns:r="http://schemas.openxmlformats.org/officeDocument/2006/relationships">
+<p:sld xmlns:a="http://schemas.openxmlformats.org/drawingml/2006/main" xmlns:r="http://schemas.openxmlformats.org/officeDocument/2006/relationships" xmlns:p="http://schemas.openxmlformats.org/presentationml/2006/main">
   <p:cSld>
     <p:spTree>
       <p:nvGrpSpPr>
@@ -7450,7 +7510,14 @@
         <p:cNvGrpSpPr/>
         <p:nvPr/>
       </p:nvGrpSpPr>
-      <p:grpSpPr/>
+      <p:grpSpPr>
+        <a:xfrm>
+          <a:off x="0" y="0"/>
+          <a:ext cx="0" cy="0"/>
+          <a:chOff x="0" y="0"/>
+          <a:chExt cx="0" cy="0"/>
+        </a:xfrm>
+      </p:grpSpPr>
       <p:sp>
         <p:nvSpPr>
           <p:cNvPr id="2" name="Rectangle 1"/>
@@ -7492,6 +7559,7 @@
           <a:lstStyle/>
           <a:p>
             <a:pPr algn="ctr"/>
+            <a:endParaRPr/>
           </a:p>
         </p:txBody>
       </p:sp>
@@ -7512,7 +7580,7 @@
           <a:noFill/>
         </p:spPr>
         <p:txBody>
-          <a:bodyPr wrap="square" anchor="t" lIns="0" rIns="0" tIns="0" bIns="0">
+          <a:bodyPr wrap="square" lIns="0" tIns="0" rIns="0" bIns="0" anchor="t">
             <a:spAutoFit/>
           </a:bodyPr>
           <a:lstStyle/>
@@ -7547,7 +7615,7 @@
           <a:noFill/>
         </p:spPr>
         <p:txBody>
-          <a:bodyPr wrap="square" anchor="t" lIns="0" rIns="0" tIns="0" bIns="0">
+          <a:bodyPr wrap="square" lIns="0" tIns="0" rIns="0" bIns="0" anchor="t">
             <a:spAutoFit/>
           </a:bodyPr>
           <a:lstStyle/>
@@ -7606,6 +7674,7 @@
           <a:lstStyle/>
           <a:p>
             <a:pPr algn="ctr"/>
+            <a:endParaRPr/>
           </a:p>
         </p:txBody>
       </p:sp>
@@ -7626,7 +7695,7 @@
           <a:noFill/>
         </p:spPr>
         <p:txBody>
-          <a:bodyPr wrap="square" anchor="t" lIns="0" rIns="0" tIns="0" bIns="0">
+          <a:bodyPr wrap="square" lIns="0" tIns="0" rIns="0" bIns="0" anchor="t">
             <a:spAutoFit/>
           </a:bodyPr>
           <a:lstStyle/>
@@ -7661,7 +7730,7 @@
           <a:noFill/>
         </p:spPr>
         <p:txBody>
-          <a:bodyPr wrap="square" anchor="t" lIns="0" rIns="0" tIns="0" bIns="0">
+          <a:bodyPr wrap="square" lIns="0" tIns="0" rIns="0" bIns="0" anchor="t">
             <a:spAutoFit/>
           </a:bodyPr>
           <a:lstStyle/>
@@ -7696,7 +7765,7 @@
           <a:noFill/>
         </p:spPr>
         <p:txBody>
-          <a:bodyPr wrap="square" anchor="t" lIns="0" rIns="0" tIns="0" bIns="0">
+          <a:bodyPr wrap="square" lIns="0" tIns="0" rIns="0" bIns="0" anchor="t">
             <a:spAutoFit/>
           </a:bodyPr>
           <a:lstStyle/>
@@ -7759,6 +7828,7 @@
           <a:lstStyle/>
           <a:p>
             <a:pPr algn="ctr"/>
+            <a:endParaRPr/>
           </a:p>
         </p:txBody>
       </p:sp>
@@ -7779,7 +7849,7 @@
           <a:noFill/>
         </p:spPr>
         <p:txBody>
-          <a:bodyPr wrap="square" anchor="t" lIns="0" rIns="0" tIns="0" bIns="0">
+          <a:bodyPr wrap="square" lIns="0" tIns="0" rIns="0" bIns="0" anchor="t">
             <a:spAutoFit/>
           </a:bodyPr>
           <a:lstStyle/>
@@ -7814,7 +7884,7 @@
           <a:noFill/>
         </p:spPr>
         <p:txBody>
-          <a:bodyPr wrap="square" anchor="t" lIns="0" rIns="0" tIns="0" bIns="0">
+          <a:bodyPr wrap="square" lIns="0" tIns="0" rIns="0" bIns="0" anchor="t">
             <a:spAutoFit/>
           </a:bodyPr>
           <a:lstStyle/>
@@ -7877,6 +7947,7 @@
           <a:lstStyle/>
           <a:p>
             <a:pPr algn="ctr"/>
+            <a:endParaRPr/>
           </a:p>
         </p:txBody>
       </p:sp>
@@ -7897,7 +7968,7 @@
           <a:noFill/>
         </p:spPr>
         <p:txBody>
-          <a:bodyPr wrap="square" anchor="t" lIns="0" rIns="0" tIns="0" bIns="0">
+          <a:bodyPr wrap="square" lIns="0" tIns="0" rIns="0" bIns="0" anchor="t">
             <a:spAutoFit/>
           </a:bodyPr>
           <a:lstStyle/>
@@ -7932,7 +8003,7 @@
           <a:noFill/>
         </p:spPr>
         <p:txBody>
-          <a:bodyPr wrap="square" anchor="t" lIns="0" rIns="0" tIns="0" bIns="0">
+          <a:bodyPr wrap="square" lIns="0" tIns="0" rIns="0" bIns="0" anchor="t">
             <a:spAutoFit/>
           </a:bodyPr>
           <a:lstStyle/>
@@ -7995,6 +8066,7 @@
           <a:lstStyle/>
           <a:p>
             <a:pPr algn="ctr"/>
+            <a:endParaRPr/>
           </a:p>
         </p:txBody>
       </p:sp>
@@ -8015,7 +8087,7 @@
           <a:noFill/>
         </p:spPr>
         <p:txBody>
-          <a:bodyPr wrap="square" anchor="t" lIns="0" rIns="0" tIns="0" bIns="0">
+          <a:bodyPr wrap="square" lIns="0" tIns="0" rIns="0" bIns="0" anchor="t">
             <a:spAutoFit/>
           </a:bodyPr>
           <a:lstStyle/>
@@ -8050,7 +8122,7 @@
           <a:noFill/>
         </p:spPr>
         <p:txBody>
-          <a:bodyPr wrap="square" anchor="t" lIns="0" rIns="0" tIns="0" bIns="0">
+          <a:bodyPr wrap="square" lIns="0" tIns="0" rIns="0" bIns="0" anchor="t">
             <a:spAutoFit/>
           </a:bodyPr>
           <a:lstStyle/>
@@ -8113,6 +8185,7 @@
           <a:lstStyle/>
           <a:p>
             <a:pPr algn="ctr"/>
+            <a:endParaRPr/>
           </a:p>
         </p:txBody>
       </p:sp>
@@ -8133,7 +8206,7 @@
           <a:noFill/>
         </p:spPr>
         <p:txBody>
-          <a:bodyPr wrap="square" anchor="t" lIns="0" rIns="0" tIns="0" bIns="0">
+          <a:bodyPr wrap="square" lIns="0" tIns="0" rIns="0" bIns="0" anchor="t">
             <a:spAutoFit/>
           </a:bodyPr>
           <a:lstStyle/>
@@ -8168,7 +8241,7 @@
           <a:noFill/>
         </p:spPr>
         <p:txBody>
-          <a:bodyPr wrap="square" anchor="t" lIns="0" rIns="0" tIns="0" bIns="0">
+          <a:bodyPr wrap="square" lIns="0" tIns="0" rIns="0" bIns="0" anchor="t">
             <a:spAutoFit/>
           </a:bodyPr>
           <a:lstStyle/>
@@ -8231,6 +8304,7 @@
           <a:lstStyle/>
           <a:p>
             <a:pPr algn="ctr"/>
+            <a:endParaRPr/>
           </a:p>
         </p:txBody>
       </p:sp>
@@ -8251,7 +8325,7 @@
           <a:noFill/>
         </p:spPr>
         <p:txBody>
-          <a:bodyPr wrap="square" anchor="t" lIns="0" rIns="0" tIns="0" bIns="0">
+          <a:bodyPr wrap="square" lIns="0" tIns="0" rIns="0" bIns="0" anchor="t">
             <a:spAutoFit/>
           </a:bodyPr>
           <a:lstStyle/>
@@ -8286,7 +8360,7 @@
           <a:noFill/>
         </p:spPr>
         <p:txBody>
-          <a:bodyPr wrap="square" anchor="t" lIns="0" rIns="0" tIns="0" bIns="0">
+          <a:bodyPr wrap="square" lIns="0" tIns="0" rIns="0" bIns="0" anchor="t">
             <a:spAutoFit/>
           </a:bodyPr>
           <a:lstStyle/>
@@ -8349,6 +8423,7 @@
           <a:lstStyle/>
           <a:p>
             <a:pPr algn="ctr"/>
+            <a:endParaRPr/>
           </a:p>
         </p:txBody>
       </p:sp>
@@ -8369,7 +8444,7 @@
           <a:noFill/>
         </p:spPr>
         <p:txBody>
-          <a:bodyPr wrap="square" anchor="t" lIns="0" rIns="0" tIns="0" bIns="0">
+          <a:bodyPr wrap="square" lIns="0" tIns="0" rIns="0" bIns="0" anchor="t">
             <a:spAutoFit/>
           </a:bodyPr>
           <a:lstStyle/>
@@ -8404,7 +8479,7 @@
           <a:noFill/>
         </p:spPr>
         <p:txBody>
-          <a:bodyPr wrap="square" anchor="t" lIns="0" rIns="0" tIns="0" bIns="0">
+          <a:bodyPr wrap="square" lIns="0" tIns="0" rIns="0" bIns="0" anchor="t">
             <a:spAutoFit/>
           </a:bodyPr>
           <a:lstStyle/>
@@ -8431,7 +8506,7 @@
 </file>
 
 <file path=ppt/slides/slide15.xml><?xml version="1.0" encoding="utf-8"?>
-<p:sld xmlns:a="http://schemas.openxmlformats.org/drawingml/2006/main" xmlns:p="http://schemas.openxmlformats.org/presentationml/2006/main" xmlns:r="http://schemas.openxmlformats.org/officeDocument/2006/relationships">
+<p:sld xmlns:a="http://schemas.openxmlformats.org/drawingml/2006/main" xmlns:r="http://schemas.openxmlformats.org/officeDocument/2006/relationships" xmlns:p="http://schemas.openxmlformats.org/presentationml/2006/main">
   <p:cSld>
     <p:spTree>
       <p:nvGrpSpPr>
@@ -8439,7 +8514,14 @@
         <p:cNvGrpSpPr/>
         <p:nvPr/>
       </p:nvGrpSpPr>
-      <p:grpSpPr/>
+      <p:grpSpPr>
+        <a:xfrm>
+          <a:off x="0" y="0"/>
+          <a:ext cx="0" cy="0"/>
+          <a:chOff x="0" y="0"/>
+          <a:chExt cx="0" cy="0"/>
+        </a:xfrm>
+      </p:grpSpPr>
       <p:sp>
         <p:nvSpPr>
           <p:cNvPr id="2" name="Rectangle 1"/>
@@ -8481,6 +8563,7 @@
           <a:lstStyle/>
           <a:p>
             <a:pPr algn="ctr"/>
+            <a:endParaRPr/>
           </a:p>
         </p:txBody>
       </p:sp>
@@ -8501,7 +8584,7 @@
           <a:noFill/>
         </p:spPr>
         <p:txBody>
-          <a:bodyPr wrap="square" anchor="t" lIns="0" rIns="0" tIns="0" bIns="0">
+          <a:bodyPr wrap="square" lIns="0" tIns="0" rIns="0" bIns="0" anchor="t">
             <a:spAutoFit/>
           </a:bodyPr>
           <a:lstStyle/>
@@ -8536,7 +8619,7 @@
           <a:noFill/>
         </p:spPr>
         <p:txBody>
-          <a:bodyPr wrap="square" anchor="t" lIns="0" rIns="0" tIns="0" bIns="0">
+          <a:bodyPr wrap="square" lIns="0" tIns="0" rIns="0" bIns="0" anchor="t">
             <a:spAutoFit/>
           </a:bodyPr>
           <a:lstStyle/>
@@ -8595,6 +8678,7 @@
           <a:lstStyle/>
           <a:p>
             <a:pPr algn="ctr"/>
+            <a:endParaRPr/>
           </a:p>
         </p:txBody>
       </p:sp>
@@ -8615,7 +8699,7 @@
           <a:noFill/>
         </p:spPr>
         <p:txBody>
-          <a:bodyPr wrap="square" anchor="t" lIns="0" rIns="0" tIns="0" bIns="0">
+          <a:bodyPr wrap="square" lIns="0" tIns="0" rIns="0" bIns="0" anchor="t">
             <a:spAutoFit/>
           </a:bodyPr>
           <a:lstStyle/>
@@ -8650,7 +8734,7 @@
           <a:noFill/>
         </p:spPr>
         <p:txBody>
-          <a:bodyPr wrap="square" anchor="t" lIns="0" rIns="0" tIns="0" bIns="0">
+          <a:bodyPr wrap="square" lIns="0" tIns="0" rIns="0" bIns="0" anchor="t">
             <a:spAutoFit/>
           </a:bodyPr>
           <a:lstStyle/>
@@ -8676,7 +8760,7 @@
         </p:nvSpPr>
         <p:spPr>
           <a:xfrm>
-            <a:off x="8503920" y="6510528"/>
+            <a:off x="8503920" y="6446520"/>
             <a:ext cx="3383280" cy="256032"/>
           </a:xfrm>
           <a:prstGeom prst="rect">
@@ -8685,7 +8769,7 @@
           <a:noFill/>
         </p:spPr>
         <p:txBody>
-          <a:bodyPr wrap="square" anchor="t" lIns="0" rIns="0" tIns="0" bIns="0">
+          <a:bodyPr wrap="square" lIns="0" tIns="0" rIns="0" bIns="0" anchor="t">
             <a:spAutoFit/>
           </a:bodyPr>
           <a:lstStyle/>
@@ -8748,6 +8832,7 @@
           <a:lstStyle/>
           <a:p>
             <a:pPr algn="ctr"/>
+            <a:endParaRPr/>
           </a:p>
         </p:txBody>
       </p:sp>
@@ -8788,7 +8873,7 @@
           </a:fontRef>
         </p:style>
         <p:txBody>
-          <a:bodyPr rtlCol="0" anchor="ctr" wrap="none" lIns="50800" rIns="50800" tIns="0" bIns="0"/>
+          <a:bodyPr wrap="none" lIns="50800" tIns="0" rIns="50800" bIns="0" rtlCol="0" anchor="ctr"/>
           <a:lstStyle/>
           <a:p>
             <a:pPr algn="ctr"/>
@@ -8821,7 +8906,7 @@
           <a:noFill/>
         </p:spPr>
         <p:txBody>
-          <a:bodyPr wrap="square" anchor="t" lIns="0" rIns="0" tIns="0" bIns="0">
+          <a:bodyPr wrap="square" lIns="0" tIns="0" rIns="0" bIns="0" anchor="t">
             <a:spAutoFit/>
           </a:bodyPr>
           <a:lstStyle/>
@@ -8856,7 +8941,7 @@
           <a:noFill/>
         </p:spPr>
         <p:txBody>
-          <a:bodyPr wrap="square" anchor="t" lIns="0" rIns="0" tIns="0" bIns="0">
+          <a:bodyPr wrap="square" lIns="0" tIns="0" rIns="0" bIns="0" anchor="t">
             <a:spAutoFit/>
           </a:bodyPr>
           <a:lstStyle/>
@@ -8891,7 +8976,7 @@
           <a:noFill/>
         </p:spPr>
         <p:txBody>
-          <a:bodyPr wrap="square" anchor="t" lIns="0" rIns="0" tIns="0" bIns="0">
+          <a:bodyPr wrap="square" lIns="0" tIns="0" rIns="0" bIns="0" anchor="t">
             <a:spAutoFit/>
           </a:bodyPr>
           <a:lstStyle/>
@@ -8954,6 +9039,7 @@
           <a:lstStyle/>
           <a:p>
             <a:pPr algn="ctr"/>
+            <a:endParaRPr/>
           </a:p>
         </p:txBody>
       </p:sp>
@@ -8994,7 +9080,7 @@
           </a:fontRef>
         </p:style>
         <p:txBody>
-          <a:bodyPr rtlCol="0" anchor="ctr" wrap="none" lIns="50800" rIns="50800" tIns="0" bIns="0"/>
+          <a:bodyPr wrap="none" lIns="50800" tIns="0" rIns="50800" bIns="0" rtlCol="0" anchor="ctr"/>
           <a:lstStyle/>
           <a:p>
             <a:pPr algn="ctr"/>
@@ -9027,7 +9113,7 @@
           <a:noFill/>
         </p:spPr>
         <p:txBody>
-          <a:bodyPr wrap="square" anchor="t" lIns="0" rIns="0" tIns="0" bIns="0">
+          <a:bodyPr wrap="square" lIns="0" tIns="0" rIns="0" bIns="0" anchor="t">
             <a:spAutoFit/>
           </a:bodyPr>
           <a:lstStyle/>
@@ -9062,7 +9148,7 @@
           <a:noFill/>
         </p:spPr>
         <p:txBody>
-          <a:bodyPr wrap="square" anchor="t" lIns="0" rIns="0" tIns="0" bIns="0">
+          <a:bodyPr wrap="square" lIns="0" tIns="0" rIns="0" bIns="0" anchor="t">
             <a:spAutoFit/>
           </a:bodyPr>
           <a:lstStyle/>
@@ -9097,7 +9183,7 @@
           <a:noFill/>
         </p:spPr>
         <p:txBody>
-          <a:bodyPr wrap="square" anchor="t" lIns="0" rIns="0" tIns="0" bIns="0">
+          <a:bodyPr wrap="square" lIns="0" tIns="0" rIns="0" bIns="0" anchor="t">
             <a:spAutoFit/>
           </a:bodyPr>
           <a:lstStyle/>
@@ -9160,6 +9246,7 @@
           <a:lstStyle/>
           <a:p>
             <a:pPr algn="ctr"/>
+            <a:endParaRPr/>
           </a:p>
         </p:txBody>
       </p:sp>
@@ -9200,7 +9287,7 @@
           </a:fontRef>
         </p:style>
         <p:txBody>
-          <a:bodyPr rtlCol="0" anchor="ctr" wrap="none" lIns="50800" rIns="50800" tIns="0" bIns="0"/>
+          <a:bodyPr wrap="none" lIns="50800" tIns="0" rIns="50800" bIns="0" rtlCol="0" anchor="ctr"/>
           <a:lstStyle/>
           <a:p>
             <a:pPr algn="ctr"/>
@@ -9233,7 +9320,7 @@
           <a:noFill/>
         </p:spPr>
         <p:txBody>
-          <a:bodyPr wrap="square" anchor="t" lIns="0" rIns="0" tIns="0" bIns="0">
+          <a:bodyPr wrap="square" lIns="0" tIns="0" rIns="0" bIns="0" anchor="t">
             <a:spAutoFit/>
           </a:bodyPr>
           <a:lstStyle/>
@@ -9268,7 +9355,7 @@
           <a:noFill/>
         </p:spPr>
         <p:txBody>
-          <a:bodyPr wrap="square" anchor="t" lIns="0" rIns="0" tIns="0" bIns="0">
+          <a:bodyPr wrap="square" lIns="0" tIns="0" rIns="0" bIns="0" anchor="t">
             <a:spAutoFit/>
           </a:bodyPr>
           <a:lstStyle/>
@@ -9303,7 +9390,7 @@
           <a:noFill/>
         </p:spPr>
         <p:txBody>
-          <a:bodyPr wrap="square" anchor="t" lIns="0" rIns="0" tIns="0" bIns="0">
+          <a:bodyPr wrap="square" lIns="0" tIns="0" rIns="0" bIns="0" anchor="t">
             <a:spAutoFit/>
           </a:bodyPr>
           <a:lstStyle/>
@@ -9366,6 +9453,7 @@
           <a:lstStyle/>
           <a:p>
             <a:pPr algn="ctr"/>
+            <a:endParaRPr/>
           </a:p>
         </p:txBody>
       </p:sp>
@@ -9406,7 +9494,7 @@
           </a:fontRef>
         </p:style>
         <p:txBody>
-          <a:bodyPr rtlCol="0" anchor="ctr" wrap="none" lIns="50800" rIns="50800" tIns="0" bIns="0"/>
+          <a:bodyPr wrap="none" lIns="50800" tIns="0" rIns="50800" bIns="0" rtlCol="0" anchor="ctr"/>
           <a:lstStyle/>
           <a:p>
             <a:pPr algn="ctr"/>
@@ -9439,7 +9527,7 @@
           <a:noFill/>
         </p:spPr>
         <p:txBody>
-          <a:bodyPr wrap="square" anchor="t" lIns="0" rIns="0" tIns="0" bIns="0">
+          <a:bodyPr wrap="square" lIns="0" tIns="0" rIns="0" bIns="0" anchor="t">
             <a:spAutoFit/>
           </a:bodyPr>
           <a:lstStyle/>
@@ -9474,7 +9562,7 @@
           <a:noFill/>
         </p:spPr>
         <p:txBody>
-          <a:bodyPr wrap="square" anchor="t" lIns="0" rIns="0" tIns="0" bIns="0">
+          <a:bodyPr wrap="square" lIns="0" tIns="0" rIns="0" bIns="0" anchor="t">
             <a:spAutoFit/>
           </a:bodyPr>
           <a:lstStyle/>
@@ -9509,7 +9597,7 @@
           <a:noFill/>
         </p:spPr>
         <p:txBody>
-          <a:bodyPr wrap="square" anchor="t" lIns="0" rIns="0" tIns="0" bIns="0">
+          <a:bodyPr wrap="square" lIns="0" tIns="0" rIns="0" bIns="0" anchor="t">
             <a:spAutoFit/>
           </a:bodyPr>
           <a:lstStyle/>
@@ -9572,6 +9660,7 @@
           <a:lstStyle/>
           <a:p>
             <a:pPr algn="ctr"/>
+            <a:endParaRPr/>
           </a:p>
         </p:txBody>
       </p:sp>
@@ -9616,6 +9705,7 @@
           <a:lstStyle/>
           <a:p>
             <a:pPr algn="ctr"/>
+            <a:endParaRPr/>
           </a:p>
         </p:txBody>
       </p:sp>
@@ -9636,7 +9726,7 @@
           <a:noFill/>
         </p:spPr>
         <p:txBody>
-          <a:bodyPr wrap="square" anchor="t" lIns="0" rIns="0" tIns="0" bIns="0">
+          <a:bodyPr wrap="square" lIns="0" tIns="0" rIns="0" bIns="0" anchor="t">
             <a:spAutoFit/>
           </a:bodyPr>
           <a:lstStyle/>
@@ -9650,6 +9740,91 @@
                 <a:latin typeface="Calibri"/>
               </a:rPr>
               <a:t>Support I'm seeking: clinical advisors (allergy/immunology), pharmacy database access, and patients willing to test — conversations open with FARE and Beyond Celiac.</a:t>
+            </a:r>
+          </a:p>
+        </p:txBody>
+      </p:sp>
+      <p:sp>
+        <p:nvSpPr>
+          <p:cNvPr id="32" name="TextBox 31"/>
+          <p:cNvSpPr txBox="1"/>
+          <p:nvPr/>
+        </p:nvSpPr>
+        <p:spPr>
+          <a:xfrm>
+            <a:off x="320040" y="6071671"/>
+            <a:ext cx="11521440" cy="146194"/>
+          </a:xfrm>
+          <a:prstGeom prst="rect">
+            <a:avLst/>
+          </a:prstGeom>
+          <a:noFill/>
+        </p:spPr>
+        <p:txBody>
+          <a:bodyPr wrap="square" lIns="0" tIns="0" rIns="0" bIns="0" anchor="ctr">
+            <a:spAutoFit/>
+          </a:bodyPr>
+          <a:lstStyle/>
+          <a:p>
+            <a:pPr algn="l"/>
+            <a:r>
+              <a:rPr sz="950" i="1" dirty="0">
+                <a:solidFill>
+                  <a:srgbClr val="A9B7CC"/>
+                </a:solidFill>
+                <a:latin typeface="Calibri"/>
+              </a:rPr>
+              <a:t>This problem is recognized beyond me — by patient-advocacy organizations (</a:t>
+            </a:r>
+            <a:r>
+              <a:rPr sz="950" i="1" dirty="0">
+                <a:solidFill>
+                  <a:schemeClr val="bg1"/>
+                </a:solidFill>
+                <a:latin typeface="Calibri"/>
+                <a:hlinkClick r:id="rId2">
+                  <a:extLst>
+                    <a:ext uri="{A12FA001-AC4F-418D-AE19-62706E023703}">
+                      <ahyp:hlinkClr xmlns:ahyp="http://schemas.microsoft.com/office/drawing/2018/hyperlinkcolor" val="tx"/>
+                    </a:ext>
+                  </a:extLst>
+                </a:hlinkClick>
+              </a:rPr>
+              <a:t>Beyond Celiac</a:t>
+            </a:r>
+            <a:r>
+              <a:rPr sz="950" i="1" dirty="0">
+                <a:solidFill>
+                  <a:srgbClr val="A9B7CC"/>
+                </a:solidFill>
+                <a:latin typeface="Calibri"/>
+              </a:rPr>
+              <a:t>) and proposed federal legislation (</a:t>
+            </a:r>
+            <a:r>
+              <a:rPr sz="950" i="1" dirty="0">
+                <a:solidFill>
+                  <a:schemeClr val="bg1"/>
+                </a:solidFill>
+                <a:latin typeface="Calibri"/>
+                <a:hlinkClick r:id="rId3">
+                  <a:extLst>
+                    <a:ext uri="{A12FA001-AC4F-418D-AE19-62706E023703}">
+                      <ahyp:hlinkClr xmlns:ahyp="http://schemas.microsoft.com/office/drawing/2018/hyperlinkcolor" val="tx"/>
+                    </a:ext>
+                  </a:extLst>
+                </a:hlinkClick>
+              </a:rPr>
+              <a:t>ADINA Act</a:t>
+            </a:r>
+            <a:r>
+              <a:rPr sz="950" i="1" dirty="0">
+                <a:solidFill>
+                  <a:schemeClr val="bg1"/>
+                </a:solidFill>
+                <a:latin typeface="Calibri"/>
+              </a:rPr>
+              <a:t>).</a:t>
             </a:r>
           </a:p>
         </p:txBody>
@@ -9663,7 +9838,7 @@
 </file>
 
 <file path=ppt/slides/slide16.xml><?xml version="1.0" encoding="utf-8"?>
-<p:sld xmlns:a="http://schemas.openxmlformats.org/drawingml/2006/main" xmlns:p="http://schemas.openxmlformats.org/presentationml/2006/main" xmlns:r="http://schemas.openxmlformats.org/officeDocument/2006/relationships">
+<p:sld xmlns:a="http://schemas.openxmlformats.org/drawingml/2006/main" xmlns:r="http://schemas.openxmlformats.org/officeDocument/2006/relationships" xmlns:p="http://schemas.openxmlformats.org/presentationml/2006/main">
   <p:cSld>
     <p:spTree>
       <p:nvGrpSpPr>
@@ -9671,7 +9846,14 @@
         <p:cNvGrpSpPr/>
         <p:nvPr/>
       </p:nvGrpSpPr>
-      <p:grpSpPr/>
+      <p:grpSpPr>
+        <a:xfrm>
+          <a:off x="0" y="0"/>
+          <a:ext cx="0" cy="0"/>
+          <a:chOff x="0" y="0"/>
+          <a:chExt cx="0" cy="0"/>
+        </a:xfrm>
+      </p:grpSpPr>
       <p:sp>
         <p:nvSpPr>
           <p:cNvPr id="2" name="Rectangle 1"/>
@@ -9713,6 +9895,7 @@
           <a:lstStyle/>
           <a:p>
             <a:pPr algn="ctr"/>
+            <a:endParaRPr/>
           </a:p>
         </p:txBody>
       </p:sp>
@@ -9733,7 +9916,7 @@
           <a:noFill/>
         </p:spPr>
         <p:txBody>
-          <a:bodyPr wrap="square" anchor="t" lIns="0" rIns="0" tIns="0" bIns="0">
+          <a:bodyPr wrap="square" lIns="0" tIns="0" rIns="0" bIns="0" anchor="t">
             <a:spAutoFit/>
           </a:bodyPr>
           <a:lstStyle/>
@@ -9768,7 +9951,7 @@
           <a:noFill/>
         </p:spPr>
         <p:txBody>
-          <a:bodyPr wrap="square" anchor="t" lIns="0" rIns="0" tIns="0" bIns="0">
+          <a:bodyPr wrap="square" lIns="0" tIns="0" rIns="0" bIns="0" anchor="t">
             <a:spAutoFit/>
           </a:bodyPr>
           <a:lstStyle/>
@@ -9803,7 +9986,7 @@
           <a:noFill/>
         </p:spPr>
         <p:txBody>
-          <a:bodyPr wrap="square" anchor="t" lIns="0" rIns="0" tIns="0" bIns="0">
+          <a:bodyPr wrap="square" lIns="0" tIns="0" rIns="0" bIns="0" anchor="t">
             <a:spAutoFit/>
           </a:bodyPr>
           <a:lstStyle/>
@@ -9838,7 +10021,7 @@
           <a:noFill/>
         </p:spPr>
         <p:txBody>
-          <a:bodyPr wrap="square" anchor="t" lIns="0" rIns="0" tIns="0" bIns="0">
+          <a:bodyPr wrap="square" lIns="0" tIns="0" rIns="0" bIns="0" anchor="t">
             <a:spAutoFit/>
           </a:bodyPr>
           <a:lstStyle/>
@@ -9873,7 +10056,7 @@
           <a:noFill/>
         </p:spPr>
         <p:txBody>
-          <a:bodyPr wrap="square" anchor="t" lIns="0" rIns="0" tIns="0" bIns="0">
+          <a:bodyPr wrap="square" lIns="0" tIns="0" rIns="0" bIns="0" anchor="t">
             <a:spAutoFit/>
           </a:bodyPr>
           <a:lstStyle/>
@@ -9908,7 +10091,7 @@
           <a:noFill/>
         </p:spPr>
         <p:txBody>
-          <a:bodyPr wrap="square" anchor="t" lIns="0" rIns="0" tIns="0" bIns="0">
+          <a:bodyPr wrap="square" lIns="0" tIns="0" rIns="0" bIns="0" anchor="t">
             <a:spAutoFit/>
           </a:bodyPr>
           <a:lstStyle/>
@@ -9923,6 +10106,1127 @@
               </a:rPr>
               <a:t>Questions &amp; collaboration welcome.</a:t>
             </a:r>
+          </a:p>
+        </p:txBody>
+      </p:sp>
+    </p:spTree>
+  </p:cSld>
+  <p:clrMapOvr>
+    <a:masterClrMapping/>
+  </p:clrMapOvr>
+</p:sld>
+</file>
+
+<file path=ppt/slides/slide17.xml><?xml version="1.0" encoding="utf-8"?>
+<p:sld xmlns:a="http://schemas.openxmlformats.org/drawingml/2006/main" xmlns:r="http://schemas.openxmlformats.org/officeDocument/2006/relationships" xmlns:p="http://schemas.openxmlformats.org/presentationml/2006/main">
+  <p:cSld>
+    <p:spTree>
+      <p:nvGrpSpPr>
+        <p:cNvPr id="1" name=""/>
+        <p:cNvGrpSpPr/>
+        <p:nvPr/>
+      </p:nvGrpSpPr>
+      <p:grpSpPr>
+        <a:xfrm>
+          <a:off x="0" y="0"/>
+          <a:ext cx="0" cy="0"/>
+          <a:chOff x="0" y="0"/>
+          <a:chExt cx="0" cy="0"/>
+        </a:xfrm>
+      </p:grpSpPr>
+      <p:sp>
+        <p:nvSpPr>
+          <p:cNvPr id="5" name="Rectangle 4"/>
+          <p:cNvSpPr/>
+          <p:nvPr/>
+        </p:nvSpPr>
+        <p:spPr>
+          <a:xfrm>
+            <a:off x="76352" y="672084"/>
+            <a:ext cx="12191695" cy="6172200"/>
+          </a:xfrm>
+          <a:prstGeom prst="rect">
+            <a:avLst/>
+          </a:prstGeom>
+          <a:solidFill>
+            <a:srgbClr val="15243E"/>
+          </a:solidFill>
+          <a:ln>
+            <a:noFill/>
+          </a:ln>
+          <a:effectLst/>
+        </p:spPr>
+        <p:style>
+          <a:lnRef idx="1">
+            <a:schemeClr val="accent1"/>
+          </a:lnRef>
+          <a:fillRef idx="3">
+            <a:schemeClr val="accent1"/>
+          </a:fillRef>
+          <a:effectRef idx="2">
+            <a:schemeClr val="accent1"/>
+          </a:effectRef>
+          <a:fontRef idx="minor">
+            <a:schemeClr val="lt1"/>
+          </a:fontRef>
+        </p:style>
+        <p:txBody>
+          <a:bodyPr rtlCol="0" anchor="ctr"/>
+          <a:lstStyle/>
+          <a:p>
+            <a:pPr algn="ctr"/>
+            <a:endParaRPr/>
+          </a:p>
+        </p:txBody>
+      </p:sp>
+      <p:sp>
+        <p:nvSpPr>
+          <p:cNvPr id="2" name="Rectangle 1"/>
+          <p:cNvSpPr/>
+          <p:nvPr/>
+        </p:nvSpPr>
+        <p:spPr>
+          <a:xfrm>
+            <a:off x="0" y="0"/>
+            <a:ext cx="12191695" cy="685800"/>
+          </a:xfrm>
+          <a:prstGeom prst="rect">
+            <a:avLst/>
+          </a:prstGeom>
+          <a:solidFill>
+            <a:srgbClr val="1E3052"/>
+          </a:solidFill>
+          <a:ln>
+            <a:noFill/>
+          </a:ln>
+          <a:effectLst/>
+        </p:spPr>
+        <p:style>
+          <a:lnRef idx="1">
+            <a:schemeClr val="accent1"/>
+          </a:lnRef>
+          <a:fillRef idx="3">
+            <a:schemeClr val="accent1"/>
+          </a:fillRef>
+          <a:effectRef idx="2">
+            <a:schemeClr val="accent1"/>
+          </a:effectRef>
+          <a:fontRef idx="minor">
+            <a:schemeClr val="lt1"/>
+          </a:fontRef>
+        </p:style>
+        <p:txBody>
+          <a:bodyPr rtlCol="0" anchor="ctr"/>
+          <a:lstStyle/>
+          <a:p>
+            <a:pPr algn="ctr"/>
+            <a:endParaRPr/>
+          </a:p>
+        </p:txBody>
+      </p:sp>
+      <p:sp>
+        <p:nvSpPr>
+          <p:cNvPr id="4" name="TextBox 3"/>
+          <p:cNvSpPr txBox="1"/>
+          <p:nvPr/>
+        </p:nvSpPr>
+        <p:spPr>
+          <a:xfrm>
+            <a:off x="9144000" y="219456"/>
+            <a:ext cx="2743200" cy="320040"/>
+          </a:xfrm>
+          <a:prstGeom prst="rect">
+            <a:avLst/>
+          </a:prstGeom>
+          <a:noFill/>
+        </p:spPr>
+        <p:txBody>
+          <a:bodyPr wrap="square" lIns="0" tIns="0" rIns="0" bIns="0" anchor="t">
+            <a:spAutoFit/>
+          </a:bodyPr>
+          <a:lstStyle/>
+          <a:p>
+            <a:pPr algn="r"/>
+            <a:r>
+              <a:rPr sz="900" b="1" i="0">
+                <a:solidFill>
+                  <a:srgbClr val="FFFFFF"/>
+                </a:solidFill>
+                <a:latin typeface="Calibri"/>
+              </a:rPr>
+              <a:t>SANJEEVINI AUSHAD</a:t>
+            </a:r>
+          </a:p>
+        </p:txBody>
+      </p:sp>
+      <p:sp>
+        <p:nvSpPr>
+          <p:cNvPr id="7" name="TextBox 6"/>
+          <p:cNvSpPr txBox="1"/>
+          <p:nvPr/>
+        </p:nvSpPr>
+        <p:spPr>
+          <a:xfrm>
+            <a:off x="320040" y="6510528"/>
+            <a:ext cx="5486400" cy="256032"/>
+          </a:xfrm>
+          <a:prstGeom prst="rect">
+            <a:avLst/>
+          </a:prstGeom>
+          <a:noFill/>
+        </p:spPr>
+        <p:txBody>
+          <a:bodyPr wrap="square" lIns="0" tIns="0" rIns="0" bIns="0" anchor="t">
+            <a:spAutoFit/>
+          </a:bodyPr>
+          <a:lstStyle/>
+          <a:p>
+            <a:pPr algn="l"/>
+            <a:r>
+              <a:rPr sz="850" b="0" i="0">
+                <a:solidFill>
+                  <a:srgbClr val="A9B7CC"/>
+                </a:solidFill>
+                <a:latin typeface="Calibri"/>
+              </a:rPr>
+              <a:t>Ushasree Jakilinki  ·  UofM MADS</a:t>
+            </a:r>
+          </a:p>
+        </p:txBody>
+      </p:sp>
+      <p:sp>
+        <p:nvSpPr>
+          <p:cNvPr id="8" name="TextBox 7"/>
+          <p:cNvSpPr txBox="1"/>
+          <p:nvPr/>
+        </p:nvSpPr>
+        <p:spPr>
+          <a:xfrm>
+            <a:off x="8503920" y="6510528"/>
+            <a:ext cx="3383280" cy="256032"/>
+          </a:xfrm>
+          <a:prstGeom prst="rect">
+            <a:avLst/>
+          </a:prstGeom>
+          <a:noFill/>
+        </p:spPr>
+        <p:txBody>
+          <a:bodyPr wrap="square" lIns="0" tIns="0" rIns="0" bIns="0" anchor="t">
+            <a:spAutoFit/>
+          </a:bodyPr>
+          <a:lstStyle/>
+          <a:p>
+            <a:pPr algn="r"/>
+            <a:r>
+              <a:rPr sz="850" b="0" i="0">
+                <a:solidFill>
+                  <a:srgbClr val="A9B7CC"/>
+                </a:solidFill>
+                <a:latin typeface="Calibri"/>
+              </a:rPr>
+              <a:t>Sanjeevini Aushad · 17</a:t>
+            </a:r>
+          </a:p>
+        </p:txBody>
+      </p:sp>
+      <p:sp>
+        <p:nvSpPr>
+          <p:cNvPr id="9" name="TextBox 8"/>
+          <p:cNvSpPr txBox="1"/>
+          <p:nvPr/>
+        </p:nvSpPr>
+        <p:spPr>
+          <a:xfrm>
+            <a:off x="320040" y="155448"/>
+            <a:ext cx="8778240" cy="502920"/>
+          </a:xfrm>
+          <a:prstGeom prst="rect">
+            <a:avLst/>
+          </a:prstGeom>
+          <a:noFill/>
+        </p:spPr>
+        <p:txBody>
+          <a:bodyPr wrap="square" lIns="0" tIns="0" rIns="0" bIns="0" anchor="t">
+            <a:spAutoFit/>
+          </a:bodyPr>
+          <a:lstStyle/>
+          <a:p>
+            <a:r>
+              <a:rPr sz="1700" b="1">
+                <a:solidFill>
+                  <a:srgbClr val="FFFFFF"/>
+                </a:solidFill>
+                <a:latin typeface="Calibri"/>
+              </a:rPr>
+              <a:t>The Evidence Base — Research &amp; Prior Work</a:t>
+            </a:r>
+          </a:p>
+        </p:txBody>
+      </p:sp>
+      <p:sp>
+        <p:nvSpPr>
+          <p:cNvPr id="10" name="TextBox 9"/>
+          <p:cNvSpPr txBox="1"/>
+          <p:nvPr/>
+        </p:nvSpPr>
+        <p:spPr>
+          <a:xfrm>
+            <a:off x="320040" y="868680"/>
+            <a:ext cx="11521440" cy="292608"/>
+          </a:xfrm>
+          <a:prstGeom prst="rect">
+            <a:avLst/>
+          </a:prstGeom>
+          <a:noFill/>
+        </p:spPr>
+        <p:txBody>
+          <a:bodyPr wrap="square" lIns="0" tIns="0" rIns="0" bIns="0" anchor="t">
+            <a:spAutoFit/>
+          </a:bodyPr>
+          <a:lstStyle/>
+          <a:p>
+            <a:r>
+              <a:rPr sz="1050" i="1">
+                <a:solidFill>
+                  <a:srgbClr val="A9B7CC"/>
+                </a:solidFill>
+                <a:latin typeface="Calibri"/>
+              </a:rPr>
+              <a:t>I’m not the only one who found this — the peer-reviewed literature and public record agree.</a:t>
+            </a:r>
+          </a:p>
+        </p:txBody>
+      </p:sp>
+      <p:sp>
+        <p:nvSpPr>
+          <p:cNvPr id="11" name="TextBox 10"/>
+          <p:cNvSpPr txBox="1"/>
+          <p:nvPr/>
+        </p:nvSpPr>
+        <p:spPr>
+          <a:xfrm>
+            <a:off x="502920" y="1371600"/>
+            <a:ext cx="5440680" cy="320040"/>
+          </a:xfrm>
+          <a:prstGeom prst="rect">
+            <a:avLst/>
+          </a:prstGeom>
+          <a:noFill/>
+        </p:spPr>
+        <p:txBody>
+          <a:bodyPr wrap="square" lIns="0" tIns="0" rIns="0" bIns="0" anchor="t">
+            <a:spAutoFit/>
+          </a:bodyPr>
+          <a:lstStyle/>
+          <a:p>
+            <a:r>
+              <a:rPr sz="1300" b="1">
+                <a:solidFill>
+                  <a:srgbClr val="E9A23B"/>
+                </a:solidFill>
+                <a:latin typeface="Calibri"/>
+              </a:rPr>
+              <a:t>Peer-reviewed &amp; clinical research</a:t>
+            </a:r>
+          </a:p>
+        </p:txBody>
+      </p:sp>
+      <p:sp>
+        <p:nvSpPr>
+          <p:cNvPr id="12" name="TextBox 11"/>
+          <p:cNvSpPr txBox="1"/>
+          <p:nvPr/>
+        </p:nvSpPr>
+        <p:spPr>
+          <a:xfrm>
+            <a:off x="6263640" y="1371600"/>
+            <a:ext cx="5440680" cy="320040"/>
+          </a:xfrm>
+          <a:prstGeom prst="rect">
+            <a:avLst/>
+          </a:prstGeom>
+          <a:noFill/>
+        </p:spPr>
+        <p:txBody>
+          <a:bodyPr wrap="square" lIns="0" tIns="0" rIns="0" bIns="0" anchor="t">
+            <a:spAutoFit/>
+          </a:bodyPr>
+          <a:lstStyle/>
+          <a:p>
+            <a:r>
+              <a:rPr sz="1300" b="1">
+                <a:solidFill>
+                  <a:srgbClr val="E9A23B"/>
+                </a:solidFill>
+                <a:latin typeface="Calibri"/>
+              </a:rPr>
+              <a:t>Data, policy &amp; public sources</a:t>
+            </a:r>
+          </a:p>
+        </p:txBody>
+      </p:sp>
+      <p:sp>
+        <p:nvSpPr>
+          <p:cNvPr id="13" name="TextBox 12"/>
+          <p:cNvSpPr txBox="1"/>
+          <p:nvPr/>
+        </p:nvSpPr>
+        <p:spPr>
+          <a:xfrm>
+            <a:off x="502920" y="1847088"/>
+            <a:ext cx="5440680" cy="138499"/>
+          </a:xfrm>
+          <a:prstGeom prst="rect">
+            <a:avLst/>
+          </a:prstGeom>
+          <a:noFill/>
+        </p:spPr>
+        <p:txBody>
+          <a:bodyPr wrap="square" lIns="0" tIns="0" rIns="0" bIns="0" anchor="t">
+            <a:spAutoFit/>
+          </a:bodyPr>
+          <a:lstStyle/>
+          <a:p>
+            <a:r>
+              <a:rPr sz="900" dirty="0">
+                <a:solidFill>
+                  <a:schemeClr val="bg1"/>
+                </a:solidFill>
+                <a:latin typeface="Calibri"/>
+                <a:hlinkClick r:id="rId2">
+                  <a:extLst>
+                    <a:ext uri="{A12FA001-AC4F-418D-AE19-62706E023703}">
+                      <ahyp:hlinkClr xmlns:ahyp="http://schemas.microsoft.com/office/drawing/2018/hyperlinkcolor" val="tx"/>
+                    </a:ext>
+                  </a:extLst>
+                </a:hlinkClick>
+              </a:rPr>
+              <a:t>•  “Inactive” ingredients in oral medications — Sci </a:t>
+            </a:r>
+            <a:r>
+              <a:rPr sz="900" dirty="0" err="1">
+                <a:solidFill>
+                  <a:schemeClr val="bg1"/>
+                </a:solidFill>
+                <a:latin typeface="Calibri"/>
+                <a:hlinkClick r:id="rId2">
+                  <a:extLst>
+                    <a:ext uri="{A12FA001-AC4F-418D-AE19-62706E023703}">
+                      <ahyp:hlinkClr xmlns:ahyp="http://schemas.microsoft.com/office/drawing/2018/hyperlinkcolor" val="tx"/>
+                    </a:ext>
+                  </a:extLst>
+                </a:hlinkClick>
+              </a:rPr>
+              <a:t>Transl</a:t>
+            </a:r>
+            <a:r>
+              <a:rPr sz="900" dirty="0">
+                <a:solidFill>
+                  <a:schemeClr val="bg1"/>
+                </a:solidFill>
+                <a:latin typeface="Calibri"/>
+                <a:hlinkClick r:id="rId2">
+                  <a:extLst>
+                    <a:ext uri="{A12FA001-AC4F-418D-AE19-62706E023703}">
+                      <ahyp:hlinkClr xmlns:ahyp="http://schemas.microsoft.com/office/drawing/2018/hyperlinkcolor" val="tx"/>
+                    </a:ext>
+                  </a:extLst>
+                </a:hlinkClick>
+              </a:rPr>
+              <a:t> Med (PMC)</a:t>
+            </a:r>
+            <a:endParaRPr sz="900" dirty="0">
+              <a:solidFill>
+                <a:schemeClr val="bg1"/>
+              </a:solidFill>
+              <a:latin typeface="Calibri"/>
+            </a:endParaRPr>
+          </a:p>
+        </p:txBody>
+      </p:sp>
+      <p:sp>
+        <p:nvSpPr>
+          <p:cNvPr id="14" name="TextBox 13"/>
+          <p:cNvSpPr txBox="1"/>
+          <p:nvPr/>
+        </p:nvSpPr>
+        <p:spPr>
+          <a:xfrm>
+            <a:off x="502920" y="2395728"/>
+            <a:ext cx="5440680" cy="138499"/>
+          </a:xfrm>
+          <a:prstGeom prst="rect">
+            <a:avLst/>
+          </a:prstGeom>
+          <a:noFill/>
+        </p:spPr>
+        <p:txBody>
+          <a:bodyPr wrap="square" lIns="0" tIns="0" rIns="0" bIns="0" anchor="t">
+            <a:spAutoFit/>
+          </a:bodyPr>
+          <a:lstStyle/>
+          <a:p>
+            <a:r>
+              <a:rPr sz="900" dirty="0">
+                <a:solidFill>
+                  <a:schemeClr val="bg1"/>
+                </a:solidFill>
+                <a:latin typeface="Calibri"/>
+                <a:hlinkClick r:id="rId3">
+                  <a:extLst>
+                    <a:ext uri="{A12FA001-AC4F-418D-AE19-62706E023703}">
+                      <ahyp:hlinkClr xmlns:ahyp="http://schemas.microsoft.com/office/drawing/2018/hyperlinkcolor" val="tx"/>
+                    </a:ext>
+                  </a:extLst>
+                </a:hlinkClick>
+              </a:rPr>
+              <a:t>•  Risks of dairy-derived excipients in medications, lactose-intolerant &amp; cow-milk-allergic patients — PMC</a:t>
+            </a:r>
+            <a:endParaRPr sz="900" dirty="0">
+              <a:solidFill>
+                <a:schemeClr val="bg1"/>
+              </a:solidFill>
+              <a:latin typeface="Calibri"/>
+            </a:endParaRPr>
+          </a:p>
+        </p:txBody>
+      </p:sp>
+      <p:sp>
+        <p:nvSpPr>
+          <p:cNvPr id="15" name="TextBox 14"/>
+          <p:cNvSpPr txBox="1"/>
+          <p:nvPr/>
+        </p:nvSpPr>
+        <p:spPr>
+          <a:xfrm>
+            <a:off x="502920" y="2944368"/>
+            <a:ext cx="5440680" cy="138499"/>
+          </a:xfrm>
+          <a:prstGeom prst="rect">
+            <a:avLst/>
+          </a:prstGeom>
+          <a:noFill/>
+        </p:spPr>
+        <p:txBody>
+          <a:bodyPr wrap="square" lIns="0" tIns="0" rIns="0" bIns="0" anchor="t">
+            <a:spAutoFit/>
+          </a:bodyPr>
+          <a:lstStyle/>
+          <a:p>
+            <a:r>
+              <a:rPr sz="900" dirty="0">
+                <a:solidFill>
+                  <a:schemeClr val="bg1"/>
+                </a:solidFill>
+                <a:latin typeface="Calibri"/>
+                <a:hlinkClick r:id="rId3">
+                  <a:extLst>
+                    <a:ext uri="{A12FA001-AC4F-418D-AE19-62706E023703}">
+                      <ahyp:hlinkClr xmlns:ahyp="http://schemas.microsoft.com/office/drawing/2018/hyperlinkcolor" val="tx"/>
+                    </a:ext>
+                  </a:extLst>
+                </a:hlinkClick>
+              </a:rPr>
+              <a:t>•  Presence of gluten- &amp; soy-derived excipients in medicinal products; allergen safety &amp; labeling — PMC</a:t>
+            </a:r>
+            <a:endParaRPr sz="900" dirty="0">
+              <a:solidFill>
+                <a:schemeClr val="bg1"/>
+              </a:solidFill>
+              <a:latin typeface="Calibri"/>
+            </a:endParaRPr>
+          </a:p>
+        </p:txBody>
+      </p:sp>
+      <p:sp>
+        <p:nvSpPr>
+          <p:cNvPr id="16" name="TextBox 15"/>
+          <p:cNvSpPr txBox="1"/>
+          <p:nvPr/>
+        </p:nvSpPr>
+        <p:spPr>
+          <a:xfrm>
+            <a:off x="502920" y="3493008"/>
+            <a:ext cx="5440680" cy="138499"/>
+          </a:xfrm>
+          <a:prstGeom prst="rect">
+            <a:avLst/>
+          </a:prstGeom>
+          <a:noFill/>
+        </p:spPr>
+        <p:txBody>
+          <a:bodyPr wrap="square" lIns="0" tIns="0" rIns="0" bIns="0" anchor="t">
+            <a:spAutoFit/>
+          </a:bodyPr>
+          <a:lstStyle/>
+          <a:p>
+            <a:r>
+              <a:rPr sz="900" dirty="0">
+                <a:solidFill>
+                  <a:schemeClr val="bg1"/>
+                </a:solidFill>
+                <a:latin typeface="Calibri"/>
+              </a:rPr>
+              <a:t>•  </a:t>
+            </a:r>
+            <a:r>
+              <a:rPr sz="900" dirty="0">
+                <a:solidFill>
+                  <a:schemeClr val="bg1"/>
+                </a:solidFill>
+                <a:latin typeface="Calibri"/>
+                <a:hlinkClick r:id="rId4">
+                  <a:extLst>
+                    <a:ext uri="{A12FA001-AC4F-418D-AE19-62706E023703}">
+                      <ahyp:hlinkClr xmlns:ahyp="http://schemas.microsoft.com/office/drawing/2018/hyperlinkcolor" val="tx"/>
+                    </a:ext>
+                  </a:extLst>
+                </a:hlinkClick>
+              </a:rPr>
+              <a:t>Alimentary Pharmacology &amp; Therapeutics (2008)</a:t>
+            </a:r>
+          </a:p>
+        </p:txBody>
+      </p:sp>
+      <p:sp>
+        <p:nvSpPr>
+          <p:cNvPr id="17" name="TextBox 16"/>
+          <p:cNvSpPr txBox="1"/>
+          <p:nvPr/>
+        </p:nvSpPr>
+        <p:spPr>
+          <a:xfrm>
+            <a:off x="502920" y="4041648"/>
+            <a:ext cx="5440680" cy="138499"/>
+          </a:xfrm>
+          <a:prstGeom prst="rect">
+            <a:avLst/>
+          </a:prstGeom>
+          <a:noFill/>
+        </p:spPr>
+        <p:txBody>
+          <a:bodyPr wrap="square" lIns="0" tIns="0" rIns="0" bIns="0" anchor="t">
+            <a:spAutoFit/>
+          </a:bodyPr>
+          <a:lstStyle/>
+          <a:p>
+            <a:r>
+              <a:rPr sz="900" dirty="0">
+                <a:solidFill>
+                  <a:schemeClr val="bg1"/>
+                </a:solidFill>
+                <a:latin typeface="Calibri"/>
+              </a:rPr>
+              <a:t>•  </a:t>
+            </a:r>
+            <a:r>
+              <a:rPr sz="900" dirty="0">
+                <a:solidFill>
+                  <a:schemeClr val="bg1"/>
+                </a:solidFill>
+                <a:latin typeface="Calibri"/>
+                <a:hlinkClick r:id="rId5">
+                  <a:extLst>
+                    <a:ext uri="{A12FA001-AC4F-418D-AE19-62706E023703}">
+                      <ahyp:hlinkClr xmlns:ahyp="http://schemas.microsoft.com/office/drawing/2018/hyperlinkcolor" val="tx"/>
+                    </a:ext>
+                  </a:extLst>
+                </a:hlinkClick>
+              </a:rPr>
+              <a:t>Journal of Allergy &amp; Clinical Immunology (2014)</a:t>
+            </a:r>
+            <a:r>
+              <a:rPr sz="900" dirty="0">
+                <a:solidFill>
+                  <a:schemeClr val="bg1"/>
+                </a:solidFill>
+                <a:latin typeface="Calibri"/>
+                <a:hlinkClick r:id="rId6">
+                  <a:extLst>
+                    <a:ext uri="{A12FA001-AC4F-418D-AE19-62706E023703}">
+                      <ahyp:hlinkClr xmlns:ahyp="http://schemas.microsoft.com/office/drawing/2018/hyperlinkcolor" val="tx"/>
+                    </a:ext>
+                  </a:extLst>
+                </a:hlinkClick>
+              </a:rPr>
+              <a:t>   ·  PubMed</a:t>
+            </a:r>
+          </a:p>
+        </p:txBody>
+      </p:sp>
+      <p:sp>
+        <p:nvSpPr>
+          <p:cNvPr id="18" name="TextBox 17"/>
+          <p:cNvSpPr txBox="1"/>
+          <p:nvPr/>
+        </p:nvSpPr>
+        <p:spPr>
+          <a:xfrm>
+            <a:off x="502920" y="4590288"/>
+            <a:ext cx="5440680" cy="138499"/>
+          </a:xfrm>
+          <a:prstGeom prst="rect">
+            <a:avLst/>
+          </a:prstGeom>
+          <a:noFill/>
+        </p:spPr>
+        <p:txBody>
+          <a:bodyPr wrap="square" lIns="0" tIns="0" rIns="0" bIns="0" anchor="t">
+            <a:spAutoFit/>
+          </a:bodyPr>
+          <a:lstStyle/>
+          <a:p>
+            <a:r>
+              <a:rPr sz="900" dirty="0">
+                <a:solidFill>
+                  <a:schemeClr val="bg1"/>
+                </a:solidFill>
+                <a:latin typeface="Calibri"/>
+              </a:rPr>
+              <a:t>•  </a:t>
+            </a:r>
+            <a:r>
+              <a:rPr sz="900" dirty="0">
+                <a:solidFill>
+                  <a:schemeClr val="bg1"/>
+                </a:solidFill>
+                <a:latin typeface="Calibri"/>
+                <a:hlinkClick r:id="rId7">
+                  <a:extLst>
+                    <a:ext uri="{A12FA001-AC4F-418D-AE19-62706E023703}">
+                      <ahyp:hlinkClr xmlns:ahyp="http://schemas.microsoft.com/office/drawing/2018/hyperlinkcolor" val="tx"/>
+                    </a:ext>
+                  </a:extLst>
+                </a:hlinkClick>
+              </a:rPr>
+              <a:t>“When allergies have no name” — idiopathic anaphylaxis &amp; co-factors (PMC, 2024)</a:t>
+            </a:r>
+          </a:p>
+        </p:txBody>
+      </p:sp>
+      <p:sp>
+        <p:nvSpPr>
+          <p:cNvPr id="19" name="TextBox 18"/>
+          <p:cNvSpPr txBox="1"/>
+          <p:nvPr/>
+        </p:nvSpPr>
+        <p:spPr>
+          <a:xfrm>
+            <a:off x="502920" y="5138927"/>
+            <a:ext cx="5440680" cy="138499"/>
+          </a:xfrm>
+          <a:prstGeom prst="rect">
+            <a:avLst/>
+          </a:prstGeom>
+          <a:noFill/>
+        </p:spPr>
+        <p:txBody>
+          <a:bodyPr wrap="square" lIns="0" tIns="0" rIns="0" bIns="0" anchor="t">
+            <a:spAutoFit/>
+          </a:bodyPr>
+          <a:lstStyle/>
+          <a:p>
+            <a:r>
+              <a:rPr sz="900" dirty="0">
+                <a:solidFill>
+                  <a:schemeClr val="bg1"/>
+                </a:solidFill>
+                <a:latin typeface="Calibri"/>
+              </a:rPr>
+              <a:t>•  </a:t>
+            </a:r>
+            <a:r>
+              <a:rPr sz="900" dirty="0">
+                <a:solidFill>
+                  <a:schemeClr val="bg1"/>
+                </a:solidFill>
+                <a:latin typeface="Calibri"/>
+                <a:hlinkClick r:id="rId8">
+                  <a:extLst>
+                    <a:ext uri="{A12FA001-AC4F-418D-AE19-62706E023703}">
+                      <ahyp:hlinkClr xmlns:ahyp="http://schemas.microsoft.com/office/drawing/2018/hyperlinkcolor" val="tx"/>
+                    </a:ext>
+                  </a:extLst>
+                </a:hlinkClick>
+              </a:rPr>
+              <a:t>Egg-based Vaccines — Pediatrics in Review (2006)</a:t>
+            </a:r>
+          </a:p>
+        </p:txBody>
+      </p:sp>
+      <p:sp>
+        <p:nvSpPr>
+          <p:cNvPr id="20" name="TextBox 19"/>
+          <p:cNvSpPr txBox="1"/>
+          <p:nvPr/>
+        </p:nvSpPr>
+        <p:spPr>
+          <a:xfrm>
+            <a:off x="6263640" y="1847088"/>
+            <a:ext cx="5440680" cy="138499"/>
+          </a:xfrm>
+          <a:prstGeom prst="rect">
+            <a:avLst/>
+          </a:prstGeom>
+          <a:noFill/>
+        </p:spPr>
+        <p:txBody>
+          <a:bodyPr wrap="square" lIns="0" tIns="0" rIns="0" bIns="0" anchor="t">
+            <a:spAutoFit/>
+          </a:bodyPr>
+          <a:lstStyle/>
+          <a:p>
+            <a:r>
+              <a:rPr sz="900" dirty="0">
+                <a:solidFill>
+                  <a:schemeClr val="bg1"/>
+                </a:solidFill>
+                <a:latin typeface="Calibri"/>
+              </a:rPr>
+              <a:t>•  </a:t>
+            </a:r>
+            <a:r>
+              <a:rPr sz="900" dirty="0">
+                <a:solidFill>
+                  <a:schemeClr val="bg1"/>
+                </a:solidFill>
+                <a:latin typeface="Calibri"/>
+                <a:hlinkClick r:id="rId9">
+                  <a:extLst>
+                    <a:ext uri="{A12FA001-AC4F-418D-AE19-62706E023703}">
+                      <ahyp:hlinkClr xmlns:ahyp="http://schemas.microsoft.com/office/drawing/2018/hyperlinkcolor" val="tx"/>
+                    </a:ext>
+                  </a:extLst>
+                </a:hlinkClick>
+              </a:rPr>
+              <a:t>MIT News (2019) — Reactions to inactive ingredients in drugs</a:t>
+            </a:r>
+          </a:p>
+        </p:txBody>
+      </p:sp>
+      <p:sp>
+        <p:nvSpPr>
+          <p:cNvPr id="21" name="TextBox 20"/>
+          <p:cNvSpPr txBox="1"/>
+          <p:nvPr/>
+        </p:nvSpPr>
+        <p:spPr>
+          <a:xfrm>
+            <a:off x="6263640" y="2395728"/>
+            <a:ext cx="5440680" cy="138499"/>
+          </a:xfrm>
+          <a:prstGeom prst="rect">
+            <a:avLst/>
+          </a:prstGeom>
+          <a:noFill/>
+        </p:spPr>
+        <p:txBody>
+          <a:bodyPr wrap="square" lIns="0" tIns="0" rIns="0" bIns="0" anchor="t">
+            <a:spAutoFit/>
+          </a:bodyPr>
+          <a:lstStyle/>
+          <a:p>
+            <a:r>
+              <a:rPr sz="900" dirty="0">
+                <a:solidFill>
+                  <a:schemeClr val="bg1"/>
+                </a:solidFill>
+                <a:latin typeface="Calibri"/>
+              </a:rPr>
+              <a:t>•  </a:t>
+            </a:r>
+            <a:r>
+              <a:rPr sz="900" dirty="0">
+                <a:solidFill>
+                  <a:schemeClr val="bg1"/>
+                </a:solidFill>
+                <a:latin typeface="Calibri"/>
+                <a:hlinkClick r:id="rId10">
+                  <a:extLst>
+                    <a:ext uri="{A12FA001-AC4F-418D-AE19-62706E023703}">
+                      <ahyp:hlinkClr xmlns:ahyp="http://schemas.microsoft.com/office/drawing/2018/hyperlinkcolor" val="tx"/>
+                    </a:ext>
+                  </a:extLst>
+                </a:hlinkClick>
+              </a:rPr>
+              <a:t>Celiac Disease Foundation — Gluten in Medicine, Vitamins &amp; Supplements</a:t>
+            </a:r>
+          </a:p>
+        </p:txBody>
+      </p:sp>
+      <p:sp>
+        <p:nvSpPr>
+          <p:cNvPr id="22" name="TextBox 21"/>
+          <p:cNvSpPr txBox="1"/>
+          <p:nvPr/>
+        </p:nvSpPr>
+        <p:spPr>
+          <a:xfrm>
+            <a:off x="6263640" y="2944368"/>
+            <a:ext cx="5440680" cy="138499"/>
+          </a:xfrm>
+          <a:prstGeom prst="rect">
+            <a:avLst/>
+          </a:prstGeom>
+          <a:noFill/>
+        </p:spPr>
+        <p:txBody>
+          <a:bodyPr wrap="square" lIns="0" tIns="0" rIns="0" bIns="0" anchor="t">
+            <a:spAutoFit/>
+          </a:bodyPr>
+          <a:lstStyle/>
+          <a:p>
+            <a:r>
+              <a:rPr sz="900" dirty="0">
+                <a:solidFill>
+                  <a:schemeClr val="bg1"/>
+                </a:solidFill>
+                <a:latin typeface="Calibri"/>
+              </a:rPr>
+              <a:t>•  </a:t>
+            </a:r>
+            <a:r>
+              <a:rPr sz="900" dirty="0">
+                <a:solidFill>
+                  <a:schemeClr val="bg1"/>
+                </a:solidFill>
+                <a:latin typeface="Calibri"/>
+                <a:hlinkClick r:id="rId11">
+                  <a:extLst>
+                    <a:ext uri="{A12FA001-AC4F-418D-AE19-62706E023703}">
+                      <ahyp:hlinkClr xmlns:ahyp="http://schemas.microsoft.com/office/drawing/2018/hyperlinkcolor" val="tx"/>
+                    </a:ext>
+                  </a:extLst>
+                </a:hlinkClick>
+              </a:rPr>
+              <a:t>Beyond Celiac — Gluten in Medication</a:t>
+            </a:r>
+          </a:p>
+        </p:txBody>
+      </p:sp>
+      <p:sp>
+        <p:nvSpPr>
+          <p:cNvPr id="23" name="TextBox 22"/>
+          <p:cNvSpPr txBox="1"/>
+          <p:nvPr/>
+        </p:nvSpPr>
+        <p:spPr>
+          <a:xfrm>
+            <a:off x="6263640" y="3493008"/>
+            <a:ext cx="5440680" cy="138499"/>
+          </a:xfrm>
+          <a:prstGeom prst="rect">
+            <a:avLst/>
+          </a:prstGeom>
+          <a:noFill/>
+        </p:spPr>
+        <p:txBody>
+          <a:bodyPr wrap="square" lIns="0" tIns="0" rIns="0" bIns="0" anchor="t">
+            <a:spAutoFit/>
+          </a:bodyPr>
+          <a:lstStyle/>
+          <a:p>
+            <a:r>
+              <a:rPr sz="900" dirty="0">
+                <a:solidFill>
+                  <a:schemeClr val="bg1"/>
+                </a:solidFill>
+                <a:latin typeface="Calibri"/>
+              </a:rPr>
+              <a:t>•  </a:t>
+            </a:r>
+            <a:r>
+              <a:rPr sz="900" dirty="0">
+                <a:solidFill>
+                  <a:schemeClr val="bg1"/>
+                </a:solidFill>
+                <a:latin typeface="Calibri"/>
+                <a:hlinkClick r:id="rId12">
+                  <a:extLst>
+                    <a:ext uri="{A12FA001-AC4F-418D-AE19-62706E023703}">
+                      <ahyp:hlinkClr xmlns:ahyp="http://schemas.microsoft.com/office/drawing/2018/hyperlinkcolor" val="tx"/>
+                    </a:ext>
+                  </a:extLst>
+                </a:hlinkClick>
+              </a:rPr>
+              <a:t>CDC — How Flu Vaccines Are Made</a:t>
+            </a:r>
+          </a:p>
+        </p:txBody>
+      </p:sp>
+      <p:sp>
+        <p:nvSpPr>
+          <p:cNvPr id="24" name="TextBox 23"/>
+          <p:cNvSpPr txBox="1"/>
+          <p:nvPr/>
+        </p:nvSpPr>
+        <p:spPr>
+          <a:xfrm>
+            <a:off x="6263640" y="4041648"/>
+            <a:ext cx="5440680" cy="138499"/>
+          </a:xfrm>
+          <a:prstGeom prst="rect">
+            <a:avLst/>
+          </a:prstGeom>
+          <a:noFill/>
+        </p:spPr>
+        <p:txBody>
+          <a:bodyPr wrap="square" lIns="0" tIns="0" rIns="0" bIns="0" anchor="t">
+            <a:spAutoFit/>
+          </a:bodyPr>
+          <a:lstStyle/>
+          <a:p>
+            <a:r>
+              <a:rPr sz="900" dirty="0">
+                <a:solidFill>
+                  <a:schemeClr val="bg1"/>
+                </a:solidFill>
+                <a:latin typeface="Calibri"/>
+              </a:rPr>
+              <a:t>•  </a:t>
+            </a:r>
+            <a:r>
+              <a:rPr sz="900" dirty="0">
+                <a:solidFill>
+                  <a:schemeClr val="bg1"/>
+                </a:solidFill>
+                <a:latin typeface="Calibri"/>
+                <a:hlinkClick r:id="rId13">
+                  <a:extLst>
+                    <a:ext uri="{A12FA001-AC4F-418D-AE19-62706E023703}">
+                      <ahyp:hlinkClr xmlns:ahyp="http://schemas.microsoft.com/office/drawing/2018/hyperlinkcolor" val="tx"/>
+                    </a:ext>
+                  </a:extLst>
+                </a:hlinkClick>
+              </a:rPr>
+              <a:t>ADINA Act — proposed federal allergen-labeling law</a:t>
+            </a:r>
+          </a:p>
+        </p:txBody>
+      </p:sp>
+      <p:sp>
+        <p:nvSpPr>
+          <p:cNvPr id="25" name="TextBox 24"/>
+          <p:cNvSpPr txBox="1"/>
+          <p:nvPr/>
+        </p:nvSpPr>
+        <p:spPr>
+          <a:xfrm>
+            <a:off x="6263640" y="4590288"/>
+            <a:ext cx="5440680" cy="138499"/>
+          </a:xfrm>
+          <a:prstGeom prst="rect">
+            <a:avLst/>
+          </a:prstGeom>
+          <a:noFill/>
+        </p:spPr>
+        <p:txBody>
+          <a:bodyPr wrap="square" lIns="0" tIns="0" rIns="0" bIns="0" anchor="t">
+            <a:spAutoFit/>
+          </a:bodyPr>
+          <a:lstStyle/>
+          <a:p>
+            <a:r>
+              <a:rPr sz="900" dirty="0">
+                <a:solidFill>
+                  <a:srgbClr val="0000FF"/>
+                </a:solidFill>
+                <a:latin typeface="Calibri"/>
+                <a:hlinkClick r:id="rId14">
+                  <a:extLst>
+                    <a:ext uri="{A12FA001-AC4F-418D-AE19-62706E023703}">
+                      <ahyp:hlinkClr xmlns:ahyp="http://schemas.microsoft.com/office/drawing/2018/hyperlinkcolor" val="tx"/>
+                    </a:ext>
+                  </a:extLst>
+                </a:hlinkClick>
+              </a:rPr>
+              <a:t>•  </a:t>
+            </a:r>
+            <a:r>
+              <a:rPr sz="900" dirty="0">
+                <a:solidFill>
+                  <a:schemeClr val="bg1"/>
+                </a:solidFill>
+                <a:latin typeface="Calibri"/>
+                <a:hlinkClick r:id="rId14">
+                  <a:extLst>
+                    <a:ext uri="{A12FA001-AC4F-418D-AE19-62706E023703}">
+                      <ahyp:hlinkClr xmlns:ahyp="http://schemas.microsoft.com/office/drawing/2018/hyperlinkcolor" val="tx"/>
+                    </a:ext>
+                  </a:extLst>
+                </a:hlinkClick>
+              </a:rPr>
+              <a:t>ADINA Act — Minnesota girl’s allergy scare (FOX 9 coverage)</a:t>
+            </a:r>
+            <a:endParaRPr sz="900" dirty="0">
+              <a:solidFill>
+                <a:schemeClr val="bg1"/>
+              </a:solidFill>
+              <a:latin typeface="Calibri"/>
+            </a:endParaRPr>
+          </a:p>
+        </p:txBody>
+      </p:sp>
+      <p:sp>
+        <p:nvSpPr>
+          <p:cNvPr id="26" name="TextBox 25"/>
+          <p:cNvSpPr txBox="1"/>
+          <p:nvPr/>
+        </p:nvSpPr>
+        <p:spPr>
+          <a:xfrm>
+            <a:off x="6263640" y="5138927"/>
+            <a:ext cx="5440680" cy="138499"/>
+          </a:xfrm>
+          <a:prstGeom prst="rect">
+            <a:avLst/>
+          </a:prstGeom>
+          <a:noFill/>
+        </p:spPr>
+        <p:txBody>
+          <a:bodyPr wrap="square" lIns="0" tIns="0" rIns="0" bIns="0" anchor="t">
+            <a:spAutoFit/>
+          </a:bodyPr>
+          <a:lstStyle/>
+          <a:p>
+            <a:r>
+              <a:rPr sz="900" dirty="0">
+                <a:solidFill>
+                  <a:srgbClr val="0000FF"/>
+                </a:solidFill>
+                <a:latin typeface="Calibri"/>
+                <a:hlinkClick r:id="rId15">
+                  <a:extLst>
+                    <a:ext uri="{A12FA001-AC4F-418D-AE19-62706E023703}">
+                      <ahyp:hlinkClr xmlns:ahyp="http://schemas.microsoft.com/office/drawing/2018/hyperlinkcolor" val="tx"/>
+                    </a:ext>
+                  </a:extLst>
+                </a:hlinkClick>
+              </a:rPr>
+              <a:t>•  </a:t>
+            </a:r>
+            <a:r>
+              <a:rPr sz="900" dirty="0">
+                <a:solidFill>
+                  <a:schemeClr val="bg1"/>
+                </a:solidFill>
+                <a:latin typeface="Calibri"/>
+                <a:hlinkClick r:id="rId15">
+                  <a:extLst>
+                    <a:ext uri="{A12FA001-AC4F-418D-AE19-62706E023703}">
+                      <ahyp:hlinkClr xmlns:ahyp="http://schemas.microsoft.com/office/drawing/2018/hyperlinkcolor" val="tx"/>
+                    </a:ext>
+                  </a:extLst>
+                </a:hlinkClick>
+              </a:rPr>
+              <a:t>Hidden Allergens Found in Common Medications — EMJ</a:t>
+            </a:r>
+            <a:endParaRPr sz="900" dirty="0">
+              <a:solidFill>
+                <a:schemeClr val="bg1"/>
+              </a:solidFill>
+              <a:latin typeface="Calibri"/>
+            </a:endParaRPr>
           </a:p>
         </p:txBody>
       </p:sp>
@@ -9935,7 +11239,7 @@
 </file>
 
 <file path=ppt/slides/slide2.xml><?xml version="1.0" encoding="utf-8"?>
-<p:sld xmlns:a="http://schemas.openxmlformats.org/drawingml/2006/main" xmlns:p="http://schemas.openxmlformats.org/presentationml/2006/main" xmlns:r="http://schemas.openxmlformats.org/officeDocument/2006/relationships">
+<p:sld xmlns:a="http://schemas.openxmlformats.org/drawingml/2006/main" xmlns:r="http://schemas.openxmlformats.org/officeDocument/2006/relationships" xmlns:p="http://schemas.openxmlformats.org/presentationml/2006/main">
   <p:cSld>
     <p:spTree>
       <p:nvGrpSpPr>
@@ -9943,7 +11247,14 @@
         <p:cNvGrpSpPr/>
         <p:nvPr/>
       </p:nvGrpSpPr>
-      <p:grpSpPr/>
+      <p:grpSpPr>
+        <a:xfrm>
+          <a:off x="0" y="0"/>
+          <a:ext cx="0" cy="0"/>
+          <a:chOff x="0" y="0"/>
+          <a:chExt cx="0" cy="0"/>
+        </a:xfrm>
+      </p:grpSpPr>
       <p:sp>
         <p:nvSpPr>
           <p:cNvPr id="2" name="Rectangle 1"/>
@@ -9985,6 +11296,7 @@
           <a:lstStyle/>
           <a:p>
             <a:pPr algn="ctr"/>
+            <a:endParaRPr/>
           </a:p>
         </p:txBody>
       </p:sp>
@@ -10005,7 +11317,7 @@
           <a:noFill/>
         </p:spPr>
         <p:txBody>
-          <a:bodyPr wrap="square" anchor="t" lIns="0" rIns="0" tIns="0" bIns="0">
+          <a:bodyPr wrap="square" lIns="0" tIns="0" rIns="0" bIns="0" anchor="t">
             <a:spAutoFit/>
           </a:bodyPr>
           <a:lstStyle/>
@@ -10040,7 +11352,7 @@
           <a:noFill/>
         </p:spPr>
         <p:txBody>
-          <a:bodyPr wrap="square" anchor="t" lIns="0" rIns="0" tIns="0" bIns="0">
+          <a:bodyPr wrap="square" lIns="0" tIns="0" rIns="0" bIns="0" anchor="t">
             <a:spAutoFit/>
           </a:bodyPr>
           <a:lstStyle/>
@@ -10099,6 +11411,7 @@
           <a:lstStyle/>
           <a:p>
             <a:pPr algn="ctr"/>
+            <a:endParaRPr/>
           </a:p>
         </p:txBody>
       </p:sp>
@@ -10119,7 +11432,7 @@
           <a:noFill/>
         </p:spPr>
         <p:txBody>
-          <a:bodyPr wrap="square" anchor="t" lIns="0" rIns="0" tIns="0" bIns="0">
+          <a:bodyPr wrap="square" lIns="0" tIns="0" rIns="0" bIns="0" anchor="t">
             <a:spAutoFit/>
           </a:bodyPr>
           <a:lstStyle/>
@@ -10154,7 +11467,7 @@
           <a:noFill/>
         </p:spPr>
         <p:txBody>
-          <a:bodyPr wrap="square" anchor="t" lIns="0" rIns="0" tIns="0" bIns="0">
+          <a:bodyPr wrap="square" lIns="0" tIns="0" rIns="0" bIns="0" anchor="t">
             <a:spAutoFit/>
           </a:bodyPr>
           <a:lstStyle/>
@@ -10189,7 +11502,7 @@
           <a:noFill/>
         </p:spPr>
         <p:txBody>
-          <a:bodyPr wrap="square" anchor="t" lIns="0" rIns="0" tIns="0" bIns="0">
+          <a:bodyPr wrap="square" lIns="0" tIns="0" rIns="0" bIns="0" anchor="t">
             <a:spAutoFit/>
           </a:bodyPr>
           <a:lstStyle/>
@@ -10224,7 +11537,7 @@
           <a:noFill/>
         </p:spPr>
         <p:txBody>
-          <a:bodyPr wrap="square" lIns="0" rIns="0" tIns="0" bIns="0">
+          <a:bodyPr wrap="square" lIns="0" tIns="0" rIns="0" bIns="0">
             <a:spAutoFit/>
           </a:bodyPr>
           <a:lstStyle/>
@@ -10355,6 +11668,7 @@
           <a:lstStyle/>
           <a:p>
             <a:pPr algn="ctr"/>
+            <a:endParaRPr/>
           </a:p>
         </p:txBody>
       </p:sp>
@@ -10399,6 +11713,7 @@
           <a:lstStyle/>
           <a:p>
             <a:pPr algn="ctr"/>
+            <a:endParaRPr/>
           </a:p>
         </p:txBody>
       </p:sp>
@@ -10419,7 +11734,7 @@
           <a:noFill/>
         </p:spPr>
         <p:txBody>
-          <a:bodyPr wrap="square" anchor="t" lIns="0" rIns="0" tIns="0" bIns="0">
+          <a:bodyPr wrap="square" lIns="0" tIns="0" rIns="0" bIns="0" anchor="t">
             <a:spAutoFit/>
           </a:bodyPr>
           <a:lstStyle/>
@@ -10454,7 +11769,7 @@
           <a:noFill/>
         </p:spPr>
         <p:txBody>
-          <a:bodyPr wrap="square" anchor="t" lIns="0" rIns="0" tIns="0" bIns="0">
+          <a:bodyPr wrap="square" lIns="0" tIns="0" rIns="0" bIns="0" anchor="t">
             <a:spAutoFit/>
           </a:bodyPr>
           <a:lstStyle/>
@@ -10517,6 +11832,7 @@
           <a:lstStyle/>
           <a:p>
             <a:pPr algn="ctr"/>
+            <a:endParaRPr/>
           </a:p>
         </p:txBody>
       </p:sp>
@@ -10537,7 +11853,7 @@
           <a:noFill/>
         </p:spPr>
         <p:txBody>
-          <a:bodyPr wrap="square" anchor="t" lIns="0" rIns="0" tIns="0" bIns="0">
+          <a:bodyPr wrap="square" lIns="0" tIns="0" rIns="0" bIns="0" anchor="t">
             <a:spAutoFit/>
           </a:bodyPr>
           <a:lstStyle/>
@@ -10572,7 +11888,7 @@
           <a:noFill/>
         </p:spPr>
         <p:txBody>
-          <a:bodyPr wrap="square" anchor="t" lIns="0" rIns="0" tIns="0" bIns="0">
+          <a:bodyPr wrap="square" lIns="0" tIns="0" rIns="0" bIns="0" anchor="t">
             <a:spAutoFit/>
           </a:bodyPr>
           <a:lstStyle/>
@@ -10635,6 +11951,7 @@
           <a:lstStyle/>
           <a:p>
             <a:pPr algn="ctr"/>
+            <a:endParaRPr/>
           </a:p>
         </p:txBody>
       </p:sp>
@@ -10655,7 +11972,7 @@
           <a:noFill/>
         </p:spPr>
         <p:txBody>
-          <a:bodyPr wrap="square" anchor="t" lIns="0" rIns="0" tIns="0" bIns="0">
+          <a:bodyPr wrap="square" lIns="0" tIns="0" rIns="0" bIns="0" anchor="t">
             <a:spAutoFit/>
           </a:bodyPr>
           <a:lstStyle/>
@@ -10690,7 +12007,7 @@
           <a:noFill/>
         </p:spPr>
         <p:txBody>
-          <a:bodyPr wrap="square" anchor="t" lIns="0" rIns="0" tIns="0" bIns="0">
+          <a:bodyPr wrap="square" lIns="0" tIns="0" rIns="0" bIns="0" anchor="t">
             <a:spAutoFit/>
           </a:bodyPr>
           <a:lstStyle/>
@@ -10717,7 +12034,7 @@
 </file>
 
 <file path=ppt/slides/slide3.xml><?xml version="1.0" encoding="utf-8"?>
-<p:sld xmlns:a="http://schemas.openxmlformats.org/drawingml/2006/main" xmlns:p="http://schemas.openxmlformats.org/presentationml/2006/main" xmlns:r="http://schemas.openxmlformats.org/officeDocument/2006/relationships">
+<p:sld xmlns:a="http://schemas.openxmlformats.org/drawingml/2006/main" xmlns:r="http://schemas.openxmlformats.org/officeDocument/2006/relationships" xmlns:p="http://schemas.openxmlformats.org/presentationml/2006/main">
   <p:cSld>
     <p:spTree>
       <p:nvGrpSpPr>
@@ -10725,7 +12042,14 @@
         <p:cNvGrpSpPr/>
         <p:nvPr/>
       </p:nvGrpSpPr>
-      <p:grpSpPr/>
+      <p:grpSpPr>
+        <a:xfrm>
+          <a:off x="0" y="0"/>
+          <a:ext cx="0" cy="0"/>
+          <a:chOff x="0" y="0"/>
+          <a:chExt cx="0" cy="0"/>
+        </a:xfrm>
+      </p:grpSpPr>
       <p:sp>
         <p:nvSpPr>
           <p:cNvPr id="2" name="Rectangle 1"/>
@@ -10767,6 +12091,7 @@
           <a:lstStyle/>
           <a:p>
             <a:pPr algn="ctr"/>
+            <a:endParaRPr/>
           </a:p>
         </p:txBody>
       </p:sp>
@@ -10787,7 +12112,7 @@
           <a:noFill/>
         </p:spPr>
         <p:txBody>
-          <a:bodyPr wrap="square" anchor="t" lIns="0" rIns="0" tIns="0" bIns="0">
+          <a:bodyPr wrap="square" lIns="0" tIns="0" rIns="0" bIns="0" anchor="t">
             <a:spAutoFit/>
           </a:bodyPr>
           <a:lstStyle/>
@@ -10822,7 +12147,7 @@
           <a:noFill/>
         </p:spPr>
         <p:txBody>
-          <a:bodyPr wrap="square" anchor="t" lIns="0" rIns="0" tIns="0" bIns="0">
+          <a:bodyPr wrap="square" lIns="0" tIns="0" rIns="0" bIns="0" anchor="t">
             <a:spAutoFit/>
           </a:bodyPr>
           <a:lstStyle/>
@@ -10881,6 +12206,7 @@
           <a:lstStyle/>
           <a:p>
             <a:pPr algn="ctr"/>
+            <a:endParaRPr/>
           </a:p>
         </p:txBody>
       </p:sp>
@@ -10901,7 +12227,7 @@
           <a:noFill/>
         </p:spPr>
         <p:txBody>
-          <a:bodyPr wrap="square" anchor="t" lIns="0" rIns="0" tIns="0" bIns="0">
+          <a:bodyPr wrap="square" lIns="0" tIns="0" rIns="0" bIns="0" anchor="t">
             <a:spAutoFit/>
           </a:bodyPr>
           <a:lstStyle/>
@@ -10936,7 +12262,7 @@
           <a:noFill/>
         </p:spPr>
         <p:txBody>
-          <a:bodyPr wrap="square" anchor="t" lIns="0" rIns="0" tIns="0" bIns="0">
+          <a:bodyPr wrap="square" lIns="0" tIns="0" rIns="0" bIns="0" anchor="t">
             <a:spAutoFit/>
           </a:bodyPr>
           <a:lstStyle/>
@@ -10971,7 +12297,7 @@
           <a:noFill/>
         </p:spPr>
         <p:txBody>
-          <a:bodyPr wrap="square" anchor="t" lIns="0" rIns="0" tIns="0" bIns="0">
+          <a:bodyPr wrap="square" lIns="0" tIns="0" rIns="0" bIns="0" anchor="t">
             <a:spAutoFit/>
           </a:bodyPr>
           <a:lstStyle/>
@@ -11006,7 +12332,7 @@
           <a:noFill/>
         </p:spPr>
         <p:txBody>
-          <a:bodyPr wrap="square" lIns="0" rIns="0" tIns="0" bIns="0">
+          <a:bodyPr wrap="square" lIns="0" tIns="0" rIns="0" bIns="0">
             <a:spAutoFit/>
           </a:bodyPr>
           <a:lstStyle/>
@@ -11137,6 +12463,7 @@
           <a:lstStyle/>
           <a:p>
             <a:pPr algn="ctr"/>
+            <a:endParaRPr/>
           </a:p>
         </p:txBody>
       </p:sp>
@@ -11157,7 +12484,7 @@
           <a:noFill/>
         </p:spPr>
         <p:txBody>
-          <a:bodyPr wrap="square" anchor="t" lIns="0" rIns="0" tIns="0" bIns="0">
+          <a:bodyPr wrap="square" lIns="0" tIns="0" rIns="0" bIns="0" anchor="t">
             <a:spAutoFit/>
           </a:bodyPr>
           <a:lstStyle/>
@@ -11212,7 +12539,7 @@
           </a:fontRef>
         </p:style>
         <p:txBody>
-          <a:bodyPr rtlCol="0" anchor="ctr" wrap="none" lIns="50800" rIns="50800" tIns="0" bIns="0"/>
+          <a:bodyPr wrap="none" lIns="50800" tIns="0" rIns="50800" bIns="0" rtlCol="0" anchor="ctr"/>
           <a:lstStyle/>
           <a:p>
             <a:pPr algn="ctr"/>
@@ -11265,7 +12592,7 @@
           </a:fontRef>
         </p:style>
         <p:txBody>
-          <a:bodyPr rtlCol="0" anchor="ctr" wrap="none" lIns="50800" rIns="50800" tIns="0" bIns="0"/>
+          <a:bodyPr wrap="none" lIns="50800" tIns="0" rIns="50800" bIns="0" rtlCol="0" anchor="ctr"/>
           <a:lstStyle/>
           <a:p>
             <a:pPr algn="ctr"/>
@@ -11318,7 +12645,7 @@
           </a:fontRef>
         </p:style>
         <p:txBody>
-          <a:bodyPr rtlCol="0" anchor="ctr" wrap="none" lIns="50800" rIns="50800" tIns="0" bIns="0"/>
+          <a:bodyPr wrap="none" lIns="50800" tIns="0" rIns="50800" bIns="0" rtlCol="0" anchor="ctr"/>
           <a:lstStyle/>
           <a:p>
             <a:pPr algn="ctr"/>
@@ -11371,7 +12698,7 @@
           </a:fontRef>
         </p:style>
         <p:txBody>
-          <a:bodyPr rtlCol="0" anchor="ctr" wrap="none" lIns="50800" rIns="50800" tIns="0" bIns="0"/>
+          <a:bodyPr wrap="none" lIns="50800" tIns="0" rIns="50800" bIns="0" rtlCol="0" anchor="ctr"/>
           <a:lstStyle/>
           <a:p>
             <a:pPr algn="ctr"/>
@@ -11424,7 +12751,7 @@
           </a:fontRef>
         </p:style>
         <p:txBody>
-          <a:bodyPr rtlCol="0" anchor="ctr" wrap="none" lIns="50800" rIns="50800" tIns="0" bIns="0"/>
+          <a:bodyPr wrap="none" lIns="50800" tIns="0" rIns="50800" bIns="0" rtlCol="0" anchor="ctr"/>
           <a:lstStyle/>
           <a:p>
             <a:pPr algn="ctr"/>
@@ -11477,7 +12804,7 @@
           </a:fontRef>
         </p:style>
         <p:txBody>
-          <a:bodyPr rtlCol="0" anchor="ctr" wrap="none" lIns="50800" rIns="50800" tIns="0" bIns="0"/>
+          <a:bodyPr wrap="none" lIns="50800" tIns="0" rIns="50800" bIns="0" rtlCol="0" anchor="ctr"/>
           <a:lstStyle/>
           <a:p>
             <a:pPr algn="ctr"/>
@@ -11530,7 +12857,7 @@
           </a:fontRef>
         </p:style>
         <p:txBody>
-          <a:bodyPr rtlCol="0" anchor="ctr" wrap="none" lIns="50800" rIns="50800" tIns="0" bIns="0"/>
+          <a:bodyPr wrap="none" lIns="50800" tIns="0" rIns="50800" bIns="0" rtlCol="0" anchor="ctr"/>
           <a:lstStyle/>
           <a:p>
             <a:pPr algn="ctr"/>
@@ -11583,7 +12910,7 @@
           </a:fontRef>
         </p:style>
         <p:txBody>
-          <a:bodyPr rtlCol="0" anchor="ctr" wrap="none" lIns="50800" rIns="50800" tIns="0" bIns="0"/>
+          <a:bodyPr wrap="none" lIns="50800" tIns="0" rIns="50800" bIns="0" rtlCol="0" anchor="ctr"/>
           <a:lstStyle/>
           <a:p>
             <a:pPr algn="ctr"/>
@@ -11636,7 +12963,7 @@
           </a:fontRef>
         </p:style>
         <p:txBody>
-          <a:bodyPr rtlCol="0" anchor="ctr" wrap="none" lIns="50800" rIns="50800" tIns="0" bIns="0"/>
+          <a:bodyPr wrap="none" lIns="50800" tIns="0" rIns="50800" bIns="0" rtlCol="0" anchor="ctr"/>
           <a:lstStyle/>
           <a:p>
             <a:pPr algn="ctr"/>
@@ -11689,7 +13016,7 @@
           </a:fontRef>
         </p:style>
         <p:txBody>
-          <a:bodyPr rtlCol="0" anchor="ctr" wrap="none" lIns="50800" rIns="50800" tIns="0" bIns="0"/>
+          <a:bodyPr wrap="none" lIns="50800" tIns="0" rIns="50800" bIns="0" rtlCol="0" anchor="ctr"/>
           <a:lstStyle/>
           <a:p>
             <a:pPr algn="ctr"/>
@@ -11742,7 +13069,7 @@
           </a:fontRef>
         </p:style>
         <p:txBody>
-          <a:bodyPr rtlCol="0" anchor="ctr" wrap="none" lIns="50800" rIns="50800" tIns="0" bIns="0"/>
+          <a:bodyPr wrap="none" lIns="50800" tIns="0" rIns="50800" bIns="0" rtlCol="0" anchor="ctr"/>
           <a:lstStyle/>
           <a:p>
             <a:pPr algn="ctr"/>
@@ -11795,7 +13122,7 @@
           </a:fontRef>
         </p:style>
         <p:txBody>
-          <a:bodyPr rtlCol="0" anchor="ctr" wrap="none" lIns="50800" rIns="50800" tIns="0" bIns="0"/>
+          <a:bodyPr wrap="none" lIns="50800" tIns="0" rIns="50800" bIns="0" rtlCol="0" anchor="ctr"/>
           <a:lstStyle/>
           <a:p>
             <a:pPr algn="ctr"/>
@@ -11828,7 +13155,7 @@
           <a:noFill/>
         </p:spPr>
         <p:txBody>
-          <a:bodyPr wrap="square" anchor="t" lIns="0" rIns="0" tIns="0" bIns="0">
+          <a:bodyPr wrap="square" lIns="0" tIns="0" rIns="0" bIns="0" anchor="t">
             <a:spAutoFit/>
           </a:bodyPr>
           <a:lstStyle/>
@@ -11855,7 +13182,7 @@
 </file>
 
 <file path=ppt/slides/slide4.xml><?xml version="1.0" encoding="utf-8"?>
-<p:sld xmlns:a="http://schemas.openxmlformats.org/drawingml/2006/main" xmlns:p="http://schemas.openxmlformats.org/presentationml/2006/main" xmlns:r="http://schemas.openxmlformats.org/officeDocument/2006/relationships">
+<p:sld xmlns:a="http://schemas.openxmlformats.org/drawingml/2006/main" xmlns:r="http://schemas.openxmlformats.org/officeDocument/2006/relationships" xmlns:p="http://schemas.openxmlformats.org/presentationml/2006/main">
   <p:cSld>
     <p:spTree>
       <p:nvGrpSpPr>
@@ -11863,7 +13190,14 @@
         <p:cNvGrpSpPr/>
         <p:nvPr/>
       </p:nvGrpSpPr>
-      <p:grpSpPr/>
+      <p:grpSpPr>
+        <a:xfrm>
+          <a:off x="0" y="0"/>
+          <a:ext cx="0" cy="0"/>
+          <a:chOff x="0" y="0"/>
+          <a:chExt cx="0" cy="0"/>
+        </a:xfrm>
+      </p:grpSpPr>
       <p:sp>
         <p:nvSpPr>
           <p:cNvPr id="2" name="Rectangle 1"/>
@@ -11905,6 +13239,7 @@
           <a:lstStyle/>
           <a:p>
             <a:pPr algn="ctr"/>
+            <a:endParaRPr/>
           </a:p>
         </p:txBody>
       </p:sp>
@@ -11925,7 +13260,7 @@
           <a:noFill/>
         </p:spPr>
         <p:txBody>
-          <a:bodyPr wrap="square" anchor="t" lIns="0" rIns="0" tIns="0" bIns="0">
+          <a:bodyPr wrap="square" lIns="0" tIns="0" rIns="0" bIns="0" anchor="t">
             <a:spAutoFit/>
           </a:bodyPr>
           <a:lstStyle/>
@@ -11960,7 +13295,7 @@
           <a:noFill/>
         </p:spPr>
         <p:txBody>
-          <a:bodyPr wrap="square" anchor="t" lIns="0" rIns="0" tIns="0" bIns="0">
+          <a:bodyPr wrap="square" lIns="0" tIns="0" rIns="0" bIns="0" anchor="t">
             <a:spAutoFit/>
           </a:bodyPr>
           <a:lstStyle/>
@@ -11986,7 +13321,7 @@
         </p:nvSpPr>
         <p:spPr>
           <a:xfrm>
-            <a:off x="0" y="685800"/>
+            <a:off x="0" y="704143"/>
             <a:ext cx="12191695" cy="6172200"/>
           </a:xfrm>
           <a:prstGeom prst="rect">
@@ -12019,6 +13354,7 @@
           <a:lstStyle/>
           <a:p>
             <a:pPr algn="ctr"/>
+            <a:endParaRPr/>
           </a:p>
         </p:txBody>
       </p:sp>
@@ -12031,28 +13367,96 @@
         <p:spPr>
           <a:xfrm>
             <a:off x="320040" y="868680"/>
-            <a:ext cx="11521440" cy="274320"/>
-          </a:xfrm>
-          <a:prstGeom prst="rect">
-            <a:avLst/>
-          </a:prstGeom>
-          <a:noFill/>
-        </p:spPr>
-        <p:txBody>
-          <a:bodyPr wrap="square" anchor="t" lIns="0" rIns="0" tIns="0" bIns="0">
+            <a:ext cx="11521440" cy="161583"/>
+          </a:xfrm>
+          <a:prstGeom prst="rect">
+            <a:avLst/>
+          </a:prstGeom>
+          <a:noFill/>
+        </p:spPr>
+        <p:txBody>
+          <a:bodyPr wrap="square" lIns="0" tIns="0" rIns="0" bIns="0" anchor="t">
             <a:spAutoFit/>
           </a:bodyPr>
           <a:lstStyle/>
           <a:p>
             <a:pPr algn="l"/>
             <a:r>
-              <a:rPr sz="1050" b="0" i="1">
+              <a:rPr lang="en-US" sz="1050" b="0" i="1" dirty="0">
                 <a:solidFill>
                   <a:srgbClr val="A9B7CC"/>
                 </a:solidFill>
                 <a:latin typeface="Calibri"/>
               </a:rPr>
-              <a:t>From my initial data collection (openFDA drug labels) and published research.</a:t>
+              <a:t>From </a:t>
+            </a:r>
+            <a:r>
+              <a:rPr sz="1050" b="0" i="1" dirty="0">
+                <a:solidFill>
+                  <a:srgbClr val="A9B7CC"/>
+                </a:solidFill>
+                <a:latin typeface="Calibri"/>
+              </a:rPr>
+              <a:t>published research</a:t>
+            </a:r>
+            <a:r>
+              <a:rPr lang="en-US" sz="1050" b="0" i="1" dirty="0">
+                <a:solidFill>
+                  <a:srgbClr val="A9B7CC"/>
+                </a:solidFill>
+                <a:latin typeface="Calibri"/>
+              </a:rPr>
+              <a:t> in </a:t>
+            </a:r>
+            <a:r>
+              <a:rPr lang="en-US" sz="1050" b="0" i="1" dirty="0">
+                <a:solidFill>
+                  <a:schemeClr val="bg1"/>
+                </a:solidFill>
+                <a:latin typeface="Calibri"/>
+                <a:hlinkClick r:id="rId2">
+                  <a:extLst>
+                    <a:ext uri="{A12FA001-AC4F-418D-AE19-62706E023703}">
+                      <ahyp:hlinkClr xmlns:ahyp="http://schemas.microsoft.com/office/drawing/2018/hyperlinkcolor" val="tx"/>
+                    </a:ext>
+                  </a:extLst>
+                </a:hlinkClick>
+              </a:rPr>
+              <a:t>2020</a:t>
+            </a:r>
+            <a:r>
+              <a:rPr lang="en-US" sz="1050" b="0" i="1" dirty="0">
+                <a:solidFill>
+                  <a:schemeClr val="bg1"/>
+                </a:solidFill>
+                <a:latin typeface="Calibri"/>
+              </a:rPr>
+              <a:t> and </a:t>
+            </a:r>
+            <a:r>
+              <a:rPr lang="en-US" sz="1050" b="0" i="1" dirty="0">
+                <a:solidFill>
+                  <a:schemeClr val="bg1"/>
+                </a:solidFill>
+                <a:latin typeface="Calibri"/>
+                <a:hlinkClick r:id="rId3">
+                  <a:extLst>
+                    <a:ext uri="{A12FA001-AC4F-418D-AE19-62706E023703}">
+                      <ahyp:hlinkClr xmlns:ahyp="http://schemas.microsoft.com/office/drawing/2018/hyperlinkcolor" val="tx"/>
+                    </a:ext>
+                  </a:extLst>
+                </a:hlinkClick>
+              </a:rPr>
+              <a:t>2025</a:t>
+            </a:r>
+            <a:r>
+              <a:rPr sz="1050" b="0" i="1" dirty="0">
+                <a:solidFill>
+                  <a:srgbClr val="A9B7CC"/>
+                </a:solidFill>
+                <a:latin typeface="Calibri"/>
+              </a:rPr>
+              <a:t>.</a:t>
             </a:r>
           </a:p>
         </p:txBody>
@@ -12074,7 +13478,7 @@
           <a:noFill/>
         </p:spPr>
         <p:txBody>
-          <a:bodyPr wrap="square" anchor="t" lIns="0" rIns="0" tIns="0" bIns="0">
+          <a:bodyPr wrap="square" lIns="0" tIns="0" rIns="0" bIns="0" anchor="t">
             <a:spAutoFit/>
           </a:bodyPr>
           <a:lstStyle/>
@@ -12109,7 +13513,7 @@
           <a:noFill/>
         </p:spPr>
         <p:txBody>
-          <a:bodyPr wrap="square" anchor="t" lIns="0" rIns="0" tIns="0" bIns="0">
+          <a:bodyPr wrap="square" lIns="0" tIns="0" rIns="0" bIns="0" anchor="t">
             <a:spAutoFit/>
           </a:bodyPr>
           <a:lstStyle/>
@@ -12172,6 +13576,7 @@
           <a:lstStyle/>
           <a:p>
             <a:pPr algn="ctr"/>
+            <a:endParaRPr/>
           </a:p>
         </p:txBody>
       </p:sp>
@@ -12192,7 +13597,7 @@
           <a:noFill/>
         </p:spPr>
         <p:txBody>
-          <a:bodyPr wrap="square" anchor="t" lIns="0" rIns="0" tIns="0" bIns="0">
+          <a:bodyPr wrap="square" lIns="0" tIns="0" rIns="0" bIns="0" anchor="t">
             <a:spAutoFit/>
           </a:bodyPr>
           <a:lstStyle/>
@@ -12227,7 +13632,7 @@
           <a:noFill/>
         </p:spPr>
         <p:txBody>
-          <a:bodyPr wrap="square" anchor="t" lIns="0" rIns="0" tIns="0" bIns="0">
+          <a:bodyPr wrap="square" lIns="0" tIns="0" rIns="0" bIns="0" anchor="t">
             <a:spAutoFit/>
           </a:bodyPr>
           <a:lstStyle/>
@@ -12290,6 +13695,7 @@
           <a:lstStyle/>
           <a:p>
             <a:pPr algn="ctr"/>
+            <a:endParaRPr/>
           </a:p>
         </p:txBody>
       </p:sp>
@@ -12310,7 +13716,7 @@
           <a:noFill/>
         </p:spPr>
         <p:txBody>
-          <a:bodyPr wrap="square" anchor="t" lIns="0" rIns="0" tIns="0" bIns="0">
+          <a:bodyPr wrap="square" lIns="0" tIns="0" rIns="0" bIns="0" anchor="t">
             <a:spAutoFit/>
           </a:bodyPr>
           <a:lstStyle/>
@@ -12345,7 +13751,7 @@
           <a:noFill/>
         </p:spPr>
         <p:txBody>
-          <a:bodyPr wrap="square" anchor="t" lIns="0" rIns="0" tIns="0" bIns="0">
+          <a:bodyPr wrap="square" lIns="0" tIns="0" rIns="0" bIns="0" anchor="t">
             <a:spAutoFit/>
           </a:bodyPr>
           <a:lstStyle/>
@@ -12408,6 +13814,7 @@
           <a:lstStyle/>
           <a:p>
             <a:pPr algn="ctr"/>
+            <a:endParaRPr/>
           </a:p>
         </p:txBody>
       </p:sp>
@@ -12428,7 +13835,7 @@
           <a:noFill/>
         </p:spPr>
         <p:txBody>
-          <a:bodyPr wrap="square" anchor="t" lIns="0" rIns="0" tIns="0" bIns="0">
+          <a:bodyPr wrap="square" lIns="0" tIns="0" rIns="0" bIns="0" anchor="t">
             <a:spAutoFit/>
           </a:bodyPr>
           <a:lstStyle/>
@@ -12463,7 +13870,7 @@
           <a:noFill/>
         </p:spPr>
         <p:txBody>
-          <a:bodyPr wrap="square" anchor="t" lIns="0" rIns="0" tIns="0" bIns="0">
+          <a:bodyPr wrap="square" lIns="0" tIns="0" rIns="0" bIns="0" anchor="t">
             <a:spAutoFit/>
           </a:bodyPr>
           <a:lstStyle/>
@@ -12526,6 +13933,7 @@
           <a:lstStyle/>
           <a:p>
             <a:pPr algn="ctr"/>
+            <a:endParaRPr/>
           </a:p>
         </p:txBody>
       </p:sp>
@@ -12546,7 +13954,7 @@
           <a:noFill/>
         </p:spPr>
         <p:txBody>
-          <a:bodyPr wrap="square" anchor="t" lIns="0" rIns="0" tIns="0" bIns="0">
+          <a:bodyPr wrap="square" lIns="0" tIns="0" rIns="0" bIns="0" anchor="t">
             <a:spAutoFit/>
           </a:bodyPr>
           <a:lstStyle/>
@@ -12581,7 +13989,7 @@
           <a:noFill/>
         </p:spPr>
         <p:txBody>
-          <a:bodyPr wrap="square" anchor="t" lIns="0" rIns="0" tIns="0" bIns="0">
+          <a:bodyPr wrap="square" lIns="0" tIns="0" rIns="0" bIns="0" anchor="t">
             <a:spAutoFit/>
           </a:bodyPr>
           <a:lstStyle/>
@@ -12644,6 +14052,7 @@
           <a:lstStyle/>
           <a:p>
             <a:pPr algn="ctr"/>
+            <a:endParaRPr/>
           </a:p>
         </p:txBody>
       </p:sp>
@@ -12664,7 +14073,7 @@
           <a:noFill/>
         </p:spPr>
         <p:txBody>
-          <a:bodyPr wrap="square" anchor="t" lIns="0" rIns="0" tIns="0" bIns="0">
+          <a:bodyPr wrap="square" lIns="0" tIns="0" rIns="0" bIns="0" anchor="t">
             <a:spAutoFit/>
           </a:bodyPr>
           <a:lstStyle/>
@@ -12699,7 +14108,7 @@
           <a:noFill/>
         </p:spPr>
         <p:txBody>
-          <a:bodyPr wrap="square" anchor="t" lIns="0" rIns="0" tIns="0" bIns="0">
+          <a:bodyPr wrap="square" lIns="0" tIns="0" rIns="0" bIns="0" anchor="t">
             <a:spAutoFit/>
           </a:bodyPr>
           <a:lstStyle/>
@@ -12762,6 +14171,7 @@
           <a:lstStyle/>
           <a:p>
             <a:pPr algn="ctr"/>
+            <a:endParaRPr/>
           </a:p>
         </p:txBody>
       </p:sp>
@@ -12782,7 +14192,7 @@
           <a:noFill/>
         </p:spPr>
         <p:txBody>
-          <a:bodyPr wrap="square" anchor="t" lIns="0" rIns="0" tIns="0" bIns="0">
+          <a:bodyPr wrap="square" lIns="0" tIns="0" rIns="0" bIns="0" anchor="t">
             <a:spAutoFit/>
           </a:bodyPr>
           <a:lstStyle/>
@@ -12817,7 +14227,7 @@
           <a:noFill/>
         </p:spPr>
         <p:txBody>
-          <a:bodyPr wrap="square" anchor="t" lIns="0" rIns="0" tIns="0" bIns="0">
+          <a:bodyPr wrap="square" lIns="0" tIns="0" rIns="0" bIns="0" anchor="t">
             <a:spAutoFit/>
           </a:bodyPr>
           <a:lstStyle/>
@@ -12880,6 +14290,7 @@
           <a:lstStyle/>
           <a:p>
             <a:pPr algn="ctr"/>
+            <a:endParaRPr/>
           </a:p>
         </p:txBody>
       </p:sp>
@@ -12900,7 +14311,7 @@
           <a:noFill/>
         </p:spPr>
         <p:txBody>
-          <a:bodyPr wrap="square" anchor="t" lIns="0" rIns="0" tIns="0" bIns="0">
+          <a:bodyPr wrap="square" lIns="0" tIns="0" rIns="0" bIns="0" anchor="t">
             <a:spAutoFit/>
           </a:bodyPr>
           <a:lstStyle/>
@@ -12935,7 +14346,7 @@
           <a:noFill/>
         </p:spPr>
         <p:txBody>
-          <a:bodyPr wrap="square" anchor="t" lIns="0" rIns="0" tIns="0" bIns="0">
+          <a:bodyPr wrap="square" lIns="0" tIns="0" rIns="0" bIns="0" anchor="t">
             <a:spAutoFit/>
           </a:bodyPr>
           <a:lstStyle/>
@@ -12998,6 +14409,7 @@
           <a:lstStyle/>
           <a:p>
             <a:pPr algn="ctr"/>
+            <a:endParaRPr/>
           </a:p>
         </p:txBody>
       </p:sp>
@@ -13018,7 +14430,7 @@
           <a:noFill/>
         </p:spPr>
         <p:txBody>
-          <a:bodyPr wrap="square" anchor="t" lIns="0" rIns="0" tIns="0" bIns="0">
+          <a:bodyPr wrap="square" lIns="0" tIns="0" rIns="0" bIns="0" anchor="t">
             <a:spAutoFit/>
           </a:bodyPr>
           <a:lstStyle/>
@@ -13053,7 +14465,7 @@
           <a:noFill/>
         </p:spPr>
         <p:txBody>
-          <a:bodyPr wrap="square" anchor="t" lIns="0" rIns="0" tIns="0" bIns="0">
+          <a:bodyPr wrap="square" lIns="0" tIns="0" rIns="0" bIns="0" anchor="t">
             <a:spAutoFit/>
           </a:bodyPr>
           <a:lstStyle/>
@@ -13116,6 +14528,7 @@
           <a:lstStyle/>
           <a:p>
             <a:pPr algn="ctr"/>
+            <a:endParaRPr/>
           </a:p>
         </p:txBody>
       </p:sp>
@@ -13160,6 +14573,7 @@
           <a:lstStyle/>
           <a:p>
             <a:pPr algn="ctr"/>
+            <a:endParaRPr/>
           </a:p>
         </p:txBody>
       </p:sp>
@@ -13180,7 +14594,7 @@
           <a:noFill/>
         </p:spPr>
         <p:txBody>
-          <a:bodyPr wrap="square" anchor="t" lIns="0" rIns="0" tIns="0" bIns="0">
+          <a:bodyPr wrap="square" lIns="0" tIns="0" rIns="0" bIns="0" anchor="t">
             <a:spAutoFit/>
           </a:bodyPr>
           <a:lstStyle/>
@@ -13194,6 +14608,91 @@
                 <a:latin typeface="Calibri"/>
               </a:rPr>
               <a:t>The exposure is not rare — it is routine. And it is under-recognized by patients and providers alike, because no standardized measure of allergen prevalence in medications exists. That measurement gap is where this project begins.</a:t>
+            </a:r>
+          </a:p>
+        </p:txBody>
+      </p:sp>
+      <p:sp>
+        <p:nvSpPr>
+          <p:cNvPr id="36" name="TextBox 35"/>
+          <p:cNvSpPr txBox="1"/>
+          <p:nvPr/>
+        </p:nvSpPr>
+        <p:spPr>
+          <a:xfrm>
+            <a:off x="320040" y="6007663"/>
+            <a:ext cx="11521440" cy="146194"/>
+          </a:xfrm>
+          <a:prstGeom prst="rect">
+            <a:avLst/>
+          </a:prstGeom>
+          <a:noFill/>
+        </p:spPr>
+        <p:txBody>
+          <a:bodyPr wrap="square" lIns="0" tIns="0" rIns="0" bIns="0" anchor="ctr">
+            <a:spAutoFit/>
+          </a:bodyPr>
+          <a:lstStyle/>
+          <a:p>
+            <a:pPr algn="l"/>
+            <a:r>
+              <a:rPr sz="950" i="1" dirty="0">
+                <a:solidFill>
+                  <a:srgbClr val="A9B7CC"/>
+                </a:solidFill>
+                <a:latin typeface="Calibri"/>
+              </a:rPr>
+              <a:t>External corroboration — I am not the only data point:  </a:t>
+            </a:r>
+            <a:r>
+              <a:rPr sz="950" i="1" dirty="0">
+                <a:solidFill>
+                  <a:schemeClr val="bg1"/>
+                </a:solidFill>
+                <a:latin typeface="Calibri"/>
+                <a:hlinkClick r:id="rId4">
+                  <a:extLst>
+                    <a:ext uri="{A12FA001-AC4F-418D-AE19-62706E023703}">
+                      <ahyp:hlinkClr xmlns:ahyp="http://schemas.microsoft.com/office/drawing/2018/hyperlinkcolor" val="tx"/>
+                    </a:ext>
+                  </a:extLst>
+                </a:hlinkClick>
+              </a:rPr>
+              <a:t>ADINA Act</a:t>
+            </a:r>
+            <a:r>
+              <a:rPr sz="950" i="1" dirty="0">
+                <a:solidFill>
+                  <a:schemeClr val="bg1"/>
+                </a:solidFill>
+                <a:latin typeface="Calibri"/>
+              </a:rPr>
+              <a:t>  </a:t>
+            </a:r>
+            <a:r>
+              <a:rPr sz="950" i="1" dirty="0">
+                <a:solidFill>
+                  <a:srgbClr val="A9B7CC"/>
+                </a:solidFill>
+                <a:latin typeface="Calibri"/>
+              </a:rPr>
+              <a:t>(proposed federal allergen-labeling law)   ·   </a:t>
+            </a:r>
+            <a:r>
+              <a:rPr sz="950" i="1" dirty="0">
+                <a:solidFill>
+                  <a:schemeClr val="bg1"/>
+                </a:solidFill>
+                <a:latin typeface="Calibri"/>
+                <a:hlinkClick r:id="rId5">
+                  <a:extLst>
+                    <a:ext uri="{A12FA001-AC4F-418D-AE19-62706E023703}">
+                      <ahyp:hlinkClr xmlns:ahyp="http://schemas.microsoft.com/office/drawing/2018/hyperlinkcolor" val="tx"/>
+                    </a:ext>
+                  </a:extLst>
+                </a:hlinkClick>
+              </a:rPr>
+              <a:t>Beyond Celiac — Gluten in Medication</a:t>
             </a:r>
           </a:p>
         </p:txBody>
@@ -13207,7 +14706,7 @@
 </file>
 
 <file path=ppt/slides/slide5.xml><?xml version="1.0" encoding="utf-8"?>
-<p:sld xmlns:a="http://schemas.openxmlformats.org/drawingml/2006/main" xmlns:p="http://schemas.openxmlformats.org/presentationml/2006/main" xmlns:r="http://schemas.openxmlformats.org/officeDocument/2006/relationships">
+<p:sld xmlns:a="http://schemas.openxmlformats.org/drawingml/2006/main" xmlns:r="http://schemas.openxmlformats.org/officeDocument/2006/relationships" xmlns:p="http://schemas.openxmlformats.org/presentationml/2006/main">
   <p:cSld>
     <p:spTree>
       <p:nvGrpSpPr>
@@ -13215,7 +14714,14 @@
         <p:cNvGrpSpPr/>
         <p:nvPr/>
       </p:nvGrpSpPr>
-      <p:grpSpPr/>
+      <p:grpSpPr>
+        <a:xfrm>
+          <a:off x="0" y="0"/>
+          <a:ext cx="0" cy="0"/>
+          <a:chOff x="0" y="0"/>
+          <a:chExt cx="0" cy="0"/>
+        </a:xfrm>
+      </p:grpSpPr>
       <p:sp>
         <p:nvSpPr>
           <p:cNvPr id="2" name="Rectangle 1"/>
@@ -13257,6 +14763,7 @@
           <a:lstStyle/>
           <a:p>
             <a:pPr algn="ctr"/>
+            <a:endParaRPr/>
           </a:p>
         </p:txBody>
       </p:sp>
@@ -13277,7 +14784,7 @@
           <a:noFill/>
         </p:spPr>
         <p:txBody>
-          <a:bodyPr wrap="square" anchor="t" lIns="0" rIns="0" tIns="0" bIns="0">
+          <a:bodyPr wrap="square" lIns="0" tIns="0" rIns="0" bIns="0" anchor="t">
             <a:spAutoFit/>
           </a:bodyPr>
           <a:lstStyle/>
@@ -13312,7 +14819,7 @@
           <a:noFill/>
         </p:spPr>
         <p:txBody>
-          <a:bodyPr wrap="square" anchor="t" lIns="0" rIns="0" tIns="0" bIns="0">
+          <a:bodyPr wrap="square" lIns="0" tIns="0" rIns="0" bIns="0" anchor="t">
             <a:spAutoFit/>
           </a:bodyPr>
           <a:lstStyle/>
@@ -13371,6 +14878,7 @@
           <a:lstStyle/>
           <a:p>
             <a:pPr algn="ctr"/>
+            <a:endParaRPr/>
           </a:p>
         </p:txBody>
       </p:sp>
@@ -13391,7 +14899,7 @@
           <a:noFill/>
         </p:spPr>
         <p:txBody>
-          <a:bodyPr wrap="square" anchor="t" lIns="0" rIns="0" tIns="0" bIns="0">
+          <a:bodyPr wrap="square" lIns="0" tIns="0" rIns="0" bIns="0" anchor="t">
             <a:spAutoFit/>
           </a:bodyPr>
           <a:lstStyle/>
@@ -13426,7 +14934,7 @@
           <a:noFill/>
         </p:spPr>
         <p:txBody>
-          <a:bodyPr wrap="square" anchor="t" lIns="0" rIns="0" tIns="0" bIns="0">
+          <a:bodyPr wrap="square" lIns="0" tIns="0" rIns="0" bIns="0" anchor="t">
             <a:spAutoFit/>
           </a:bodyPr>
           <a:lstStyle/>
@@ -13461,7 +14969,7 @@
           <a:noFill/>
         </p:spPr>
         <p:txBody>
-          <a:bodyPr wrap="square" anchor="t" lIns="0" rIns="0" tIns="0" bIns="0">
+          <a:bodyPr wrap="square" lIns="0" tIns="0" rIns="0" bIns="0" anchor="t">
             <a:spAutoFit/>
           </a:bodyPr>
           <a:lstStyle/>
@@ -13524,6 +15032,7 @@
           <a:lstStyle/>
           <a:p>
             <a:pPr algn="ctr"/>
+            <a:endParaRPr/>
           </a:p>
         </p:txBody>
       </p:sp>
@@ -13564,7 +15073,7 @@
           </a:fontRef>
         </p:style>
         <p:txBody>
-          <a:bodyPr rtlCol="0" anchor="ctr" wrap="none" lIns="50800" rIns="50800" tIns="0" bIns="0"/>
+          <a:bodyPr wrap="none" lIns="50800" tIns="0" rIns="50800" bIns="0" rtlCol="0" anchor="ctr"/>
           <a:lstStyle/>
           <a:p>
             <a:pPr algn="ctr"/>
@@ -13597,7 +15106,7 @@
           <a:noFill/>
         </p:spPr>
         <p:txBody>
-          <a:bodyPr wrap="square" anchor="t" lIns="0" rIns="0" tIns="0" bIns="0">
+          <a:bodyPr wrap="square" lIns="0" tIns="0" rIns="0" bIns="0" anchor="t">
             <a:spAutoFit/>
           </a:bodyPr>
           <a:lstStyle/>
@@ -13660,6 +15169,7 @@
           <a:lstStyle/>
           <a:p>
             <a:pPr algn="ctr"/>
+            <a:endParaRPr/>
           </a:p>
         </p:txBody>
       </p:sp>
@@ -13700,7 +15210,7 @@
           </a:fontRef>
         </p:style>
         <p:txBody>
-          <a:bodyPr rtlCol="0" anchor="ctr" wrap="none" lIns="50800" rIns="50800" tIns="0" bIns="0"/>
+          <a:bodyPr wrap="none" lIns="50800" tIns="0" rIns="50800" bIns="0" rtlCol="0" anchor="ctr"/>
           <a:lstStyle/>
           <a:p>
             <a:pPr algn="ctr"/>
@@ -13733,7 +15243,7 @@
           <a:noFill/>
         </p:spPr>
         <p:txBody>
-          <a:bodyPr wrap="square" anchor="t" lIns="0" rIns="0" tIns="0" bIns="0">
+          <a:bodyPr wrap="square" lIns="0" tIns="0" rIns="0" bIns="0" anchor="t">
             <a:spAutoFit/>
           </a:bodyPr>
           <a:lstStyle/>
@@ -13796,6 +15306,7 @@
           <a:lstStyle/>
           <a:p>
             <a:pPr algn="ctr"/>
+            <a:endParaRPr/>
           </a:p>
         </p:txBody>
       </p:sp>
@@ -13836,7 +15347,7 @@
           </a:fontRef>
         </p:style>
         <p:txBody>
-          <a:bodyPr rtlCol="0" anchor="ctr" wrap="none" lIns="50800" rIns="50800" tIns="0" bIns="0"/>
+          <a:bodyPr wrap="none" lIns="50800" tIns="0" rIns="50800" bIns="0" rtlCol="0" anchor="ctr"/>
           <a:lstStyle/>
           <a:p>
             <a:pPr algn="ctr"/>
@@ -13869,7 +15380,7 @@
           <a:noFill/>
         </p:spPr>
         <p:txBody>
-          <a:bodyPr wrap="square" anchor="t" lIns="0" rIns="0" tIns="0" bIns="0">
+          <a:bodyPr wrap="square" lIns="0" tIns="0" rIns="0" bIns="0" anchor="t">
             <a:spAutoFit/>
           </a:bodyPr>
           <a:lstStyle/>
@@ -13932,6 +15443,7 @@
           <a:lstStyle/>
           <a:p>
             <a:pPr algn="ctr"/>
+            <a:endParaRPr/>
           </a:p>
         </p:txBody>
       </p:sp>
@@ -13972,7 +15484,7 @@
           </a:fontRef>
         </p:style>
         <p:txBody>
-          <a:bodyPr rtlCol="0" anchor="ctr" wrap="none" lIns="50800" rIns="50800" tIns="0" bIns="0"/>
+          <a:bodyPr wrap="none" lIns="50800" tIns="0" rIns="50800" bIns="0" rtlCol="0" anchor="ctr"/>
           <a:lstStyle/>
           <a:p>
             <a:pPr algn="ctr"/>
@@ -14005,7 +15517,7 @@
           <a:noFill/>
         </p:spPr>
         <p:txBody>
-          <a:bodyPr wrap="square" anchor="t" lIns="0" rIns="0" tIns="0" bIns="0">
+          <a:bodyPr wrap="square" lIns="0" tIns="0" rIns="0" bIns="0" anchor="t">
             <a:spAutoFit/>
           </a:bodyPr>
           <a:lstStyle/>
@@ -14040,7 +15552,7 @@
           <a:noFill/>
         </p:spPr>
         <p:txBody>
-          <a:bodyPr wrap="square" anchor="t" lIns="0" rIns="0" tIns="0" bIns="0">
+          <a:bodyPr wrap="square" lIns="0" tIns="0" rIns="0" bIns="0" anchor="t">
             <a:spAutoFit/>
           </a:bodyPr>
           <a:lstStyle/>
@@ -14067,7 +15579,7 @@
 </file>
 
 <file path=ppt/slides/slide6.xml><?xml version="1.0" encoding="utf-8"?>
-<p:sld xmlns:a="http://schemas.openxmlformats.org/drawingml/2006/main" xmlns:p="http://schemas.openxmlformats.org/presentationml/2006/main" xmlns:r="http://schemas.openxmlformats.org/officeDocument/2006/relationships">
+<p:sld xmlns:a="http://schemas.openxmlformats.org/drawingml/2006/main" xmlns:r="http://schemas.openxmlformats.org/officeDocument/2006/relationships" xmlns:p="http://schemas.openxmlformats.org/presentationml/2006/main">
   <p:cSld>
     <p:spTree>
       <p:nvGrpSpPr>
@@ -14075,7 +15587,14 @@
         <p:cNvGrpSpPr/>
         <p:nvPr/>
       </p:nvGrpSpPr>
-      <p:grpSpPr/>
+      <p:grpSpPr>
+        <a:xfrm>
+          <a:off x="0" y="0"/>
+          <a:ext cx="0" cy="0"/>
+          <a:chOff x="0" y="0"/>
+          <a:chExt cx="0" cy="0"/>
+        </a:xfrm>
+      </p:grpSpPr>
       <p:sp>
         <p:nvSpPr>
           <p:cNvPr id="2" name="Rectangle 1"/>
@@ -14117,6 +15636,7 @@
           <a:lstStyle/>
           <a:p>
             <a:pPr algn="ctr"/>
+            <a:endParaRPr/>
           </a:p>
         </p:txBody>
       </p:sp>
@@ -14137,7 +15657,7 @@
           <a:noFill/>
         </p:spPr>
         <p:txBody>
-          <a:bodyPr wrap="square" anchor="t" lIns="0" rIns="0" tIns="0" bIns="0">
+          <a:bodyPr wrap="square" lIns="0" tIns="0" rIns="0" bIns="0" anchor="t">
             <a:spAutoFit/>
           </a:bodyPr>
           <a:lstStyle/>
@@ -14172,7 +15692,7 @@
           <a:noFill/>
         </p:spPr>
         <p:txBody>
-          <a:bodyPr wrap="square" anchor="t" lIns="0" rIns="0" tIns="0" bIns="0">
+          <a:bodyPr wrap="square" lIns="0" tIns="0" rIns="0" bIns="0" anchor="t">
             <a:spAutoFit/>
           </a:bodyPr>
           <a:lstStyle/>
@@ -14231,6 +15751,7 @@
           <a:lstStyle/>
           <a:p>
             <a:pPr algn="ctr"/>
+            <a:endParaRPr/>
           </a:p>
         </p:txBody>
       </p:sp>
@@ -14251,7 +15772,7 @@
           <a:noFill/>
         </p:spPr>
         <p:txBody>
-          <a:bodyPr wrap="square" anchor="t" lIns="0" rIns="0" tIns="0" bIns="0">
+          <a:bodyPr wrap="square" lIns="0" tIns="0" rIns="0" bIns="0" anchor="t">
             <a:spAutoFit/>
           </a:bodyPr>
           <a:lstStyle/>
@@ -14286,7 +15807,7 @@
           <a:noFill/>
         </p:spPr>
         <p:txBody>
-          <a:bodyPr wrap="square" anchor="t" lIns="0" rIns="0" tIns="0" bIns="0">
+          <a:bodyPr wrap="square" lIns="0" tIns="0" rIns="0" bIns="0" anchor="t">
             <a:spAutoFit/>
           </a:bodyPr>
           <a:lstStyle/>
@@ -14321,7 +15842,7 @@
           <a:noFill/>
         </p:spPr>
         <p:txBody>
-          <a:bodyPr wrap="square" anchor="t" lIns="0" rIns="0" tIns="0" bIns="0">
+          <a:bodyPr wrap="square" lIns="0" tIns="0" rIns="0" bIns="0" anchor="t">
             <a:spAutoFit/>
           </a:bodyPr>
           <a:lstStyle/>
@@ -14384,6 +15905,7 @@
           <a:lstStyle/>
           <a:p>
             <a:pPr algn="ctr"/>
+            <a:endParaRPr/>
           </a:p>
         </p:txBody>
       </p:sp>
@@ -14404,7 +15926,7 @@
           <a:noFill/>
         </p:spPr>
         <p:txBody>
-          <a:bodyPr wrap="square" anchor="t" lIns="0" rIns="0" tIns="0" bIns="0">
+          <a:bodyPr wrap="square" lIns="0" tIns="0" rIns="0" bIns="0" anchor="t">
             <a:spAutoFit/>
           </a:bodyPr>
           <a:lstStyle/>
@@ -14439,7 +15961,7 @@
           <a:noFill/>
         </p:spPr>
         <p:txBody>
-          <a:bodyPr wrap="square" anchor="t" lIns="0" rIns="0" tIns="0" bIns="0">
+          <a:bodyPr wrap="square" lIns="0" tIns="0" rIns="0" bIns="0" anchor="t">
             <a:spAutoFit/>
           </a:bodyPr>
           <a:lstStyle/>
@@ -14502,6 +16024,7 @@
           <a:lstStyle/>
           <a:p>
             <a:pPr algn="ctr"/>
+            <a:endParaRPr/>
           </a:p>
         </p:txBody>
       </p:sp>
@@ -14522,7 +16045,7 @@
           <a:noFill/>
         </p:spPr>
         <p:txBody>
-          <a:bodyPr wrap="square" anchor="t" lIns="0" rIns="0" tIns="0" bIns="0">
+          <a:bodyPr wrap="square" lIns="0" tIns="0" rIns="0" bIns="0" anchor="t">
             <a:spAutoFit/>
           </a:bodyPr>
           <a:lstStyle/>
@@ -14557,7 +16080,7 @@
           <a:noFill/>
         </p:spPr>
         <p:txBody>
-          <a:bodyPr wrap="square" anchor="t" lIns="0" rIns="0" tIns="0" bIns="0">
+          <a:bodyPr wrap="square" lIns="0" tIns="0" rIns="0" bIns="0" anchor="t">
             <a:spAutoFit/>
           </a:bodyPr>
           <a:lstStyle/>
@@ -14620,6 +16143,7 @@
           <a:lstStyle/>
           <a:p>
             <a:pPr algn="ctr"/>
+            <a:endParaRPr/>
           </a:p>
         </p:txBody>
       </p:sp>
@@ -14640,7 +16164,7 @@
           <a:noFill/>
         </p:spPr>
         <p:txBody>
-          <a:bodyPr wrap="square" anchor="t" lIns="0" rIns="0" tIns="0" bIns="0">
+          <a:bodyPr wrap="square" lIns="0" tIns="0" rIns="0" bIns="0" anchor="t">
             <a:spAutoFit/>
           </a:bodyPr>
           <a:lstStyle/>
@@ -14675,7 +16199,7 @@
           <a:noFill/>
         </p:spPr>
         <p:txBody>
-          <a:bodyPr wrap="square" anchor="t" lIns="0" rIns="0" tIns="0" bIns="0">
+          <a:bodyPr wrap="square" lIns="0" tIns="0" rIns="0" bIns="0" anchor="t">
             <a:spAutoFit/>
           </a:bodyPr>
           <a:lstStyle/>
@@ -14738,6 +16262,7 @@
           <a:lstStyle/>
           <a:p>
             <a:pPr algn="ctr"/>
+            <a:endParaRPr/>
           </a:p>
         </p:txBody>
       </p:sp>
@@ -14758,7 +16283,7 @@
           <a:noFill/>
         </p:spPr>
         <p:txBody>
-          <a:bodyPr wrap="square" anchor="t" lIns="0" rIns="0" tIns="0" bIns="0">
+          <a:bodyPr wrap="square" lIns="0" tIns="0" rIns="0" bIns="0" anchor="t">
             <a:spAutoFit/>
           </a:bodyPr>
           <a:lstStyle/>
@@ -14793,7 +16318,7 @@
           <a:noFill/>
         </p:spPr>
         <p:txBody>
-          <a:bodyPr wrap="square" anchor="t" lIns="0" rIns="0" tIns="0" bIns="0">
+          <a:bodyPr wrap="square" lIns="0" tIns="0" rIns="0" bIns="0" anchor="t">
             <a:spAutoFit/>
           </a:bodyPr>
           <a:lstStyle/>
@@ -14856,6 +16381,7 @@
           <a:lstStyle/>
           <a:p>
             <a:pPr algn="ctr"/>
+            <a:endParaRPr/>
           </a:p>
         </p:txBody>
       </p:sp>
@@ -14900,6 +16426,7 @@
           <a:lstStyle/>
           <a:p>
             <a:pPr algn="ctr"/>
+            <a:endParaRPr/>
           </a:p>
         </p:txBody>
       </p:sp>
@@ -14920,7 +16447,7 @@
           <a:noFill/>
         </p:spPr>
         <p:txBody>
-          <a:bodyPr wrap="square" anchor="t" lIns="0" rIns="0" tIns="0" bIns="0">
+          <a:bodyPr wrap="square" lIns="0" tIns="0" rIns="0" bIns="0" anchor="t">
             <a:spAutoFit/>
           </a:bodyPr>
           <a:lstStyle/>
@@ -14955,7 +16482,7 @@
           <a:noFill/>
         </p:spPr>
         <p:txBody>
-          <a:bodyPr wrap="square" anchor="t" lIns="0" rIns="0" tIns="0" bIns="0">
+          <a:bodyPr wrap="square" lIns="0" tIns="0" rIns="0" bIns="0" anchor="t">
             <a:spAutoFit/>
           </a:bodyPr>
           <a:lstStyle/>
@@ -14982,7 +16509,7 @@
 </file>
 
 <file path=ppt/slides/slide7.xml><?xml version="1.0" encoding="utf-8"?>
-<p:sld xmlns:a="http://schemas.openxmlformats.org/drawingml/2006/main" xmlns:p="http://schemas.openxmlformats.org/presentationml/2006/main" xmlns:r="http://schemas.openxmlformats.org/officeDocument/2006/relationships">
+<p:sld xmlns:a="http://schemas.openxmlformats.org/drawingml/2006/main" xmlns:r="http://schemas.openxmlformats.org/officeDocument/2006/relationships" xmlns:p="http://schemas.openxmlformats.org/presentationml/2006/main">
   <p:cSld>
     <p:spTree>
       <p:nvGrpSpPr>
@@ -14990,7 +16517,14 @@
         <p:cNvGrpSpPr/>
         <p:nvPr/>
       </p:nvGrpSpPr>
-      <p:grpSpPr/>
+      <p:grpSpPr>
+        <a:xfrm>
+          <a:off x="0" y="0"/>
+          <a:ext cx="0" cy="0"/>
+          <a:chOff x="0" y="0"/>
+          <a:chExt cx="0" cy="0"/>
+        </a:xfrm>
+      </p:grpSpPr>
       <p:sp>
         <p:nvSpPr>
           <p:cNvPr id="2" name="Rectangle 1"/>
@@ -15032,6 +16566,7 @@
           <a:lstStyle/>
           <a:p>
             <a:pPr algn="ctr"/>
+            <a:endParaRPr/>
           </a:p>
         </p:txBody>
       </p:sp>
@@ -15052,7 +16587,7 @@
           <a:noFill/>
         </p:spPr>
         <p:txBody>
-          <a:bodyPr wrap="square" anchor="t" lIns="0" rIns="0" tIns="0" bIns="0">
+          <a:bodyPr wrap="square" lIns="0" tIns="0" rIns="0" bIns="0" anchor="t">
             <a:spAutoFit/>
           </a:bodyPr>
           <a:lstStyle/>
@@ -15087,7 +16622,7 @@
           <a:noFill/>
         </p:spPr>
         <p:txBody>
-          <a:bodyPr wrap="square" anchor="t" lIns="0" rIns="0" tIns="0" bIns="0">
+          <a:bodyPr wrap="square" lIns="0" tIns="0" rIns="0" bIns="0" anchor="t">
             <a:spAutoFit/>
           </a:bodyPr>
           <a:lstStyle/>
@@ -15146,6 +16681,7 @@
           <a:lstStyle/>
           <a:p>
             <a:pPr algn="ctr"/>
+            <a:endParaRPr/>
           </a:p>
         </p:txBody>
       </p:sp>
@@ -15166,7 +16702,7 @@
           <a:noFill/>
         </p:spPr>
         <p:txBody>
-          <a:bodyPr wrap="square" anchor="t" lIns="0" rIns="0" tIns="0" bIns="0">
+          <a:bodyPr wrap="square" lIns="0" tIns="0" rIns="0" bIns="0" anchor="t">
             <a:spAutoFit/>
           </a:bodyPr>
           <a:lstStyle/>
@@ -15201,7 +16737,7 @@
           <a:noFill/>
         </p:spPr>
         <p:txBody>
-          <a:bodyPr wrap="square" anchor="t" lIns="0" rIns="0" tIns="0" bIns="0">
+          <a:bodyPr wrap="square" lIns="0" tIns="0" rIns="0" bIns="0" anchor="t">
             <a:spAutoFit/>
           </a:bodyPr>
           <a:lstStyle/>
@@ -15236,7 +16772,7 @@
           <a:noFill/>
         </p:spPr>
         <p:txBody>
-          <a:bodyPr wrap="square" anchor="t" lIns="0" rIns="0" tIns="0" bIns="0">
+          <a:bodyPr wrap="square" lIns="0" tIns="0" rIns="0" bIns="0" anchor="t">
             <a:spAutoFit/>
           </a:bodyPr>
           <a:lstStyle/>
@@ -15299,6 +16835,7 @@
           <a:lstStyle/>
           <a:p>
             <a:pPr algn="ctr"/>
+            <a:endParaRPr/>
           </a:p>
         </p:txBody>
       </p:sp>
@@ -15339,7 +16876,7 @@
           </a:fontRef>
         </p:style>
         <p:txBody>
-          <a:bodyPr rtlCol="0" anchor="ctr" lIns="0" rIns="0" tIns="0" bIns="0"/>
+          <a:bodyPr lIns="0" tIns="0" rIns="0" bIns="0" rtlCol="0" anchor="ctr"/>
           <a:lstStyle/>
           <a:p>
             <a:pPr algn="ctr"/>
@@ -15372,7 +16909,7 @@
           <a:noFill/>
         </p:spPr>
         <p:txBody>
-          <a:bodyPr wrap="square" anchor="t" lIns="0" rIns="0" tIns="0" bIns="0">
+          <a:bodyPr wrap="square" lIns="0" tIns="0" rIns="0" bIns="0" anchor="t">
             <a:spAutoFit/>
           </a:bodyPr>
           <a:lstStyle/>
@@ -15407,7 +16944,7 @@
           <a:noFill/>
         </p:spPr>
         <p:txBody>
-          <a:bodyPr wrap="square" anchor="t" lIns="0" rIns="0" tIns="0" bIns="0">
+          <a:bodyPr wrap="square" lIns="0" tIns="0" rIns="0" bIns="0" anchor="t">
             <a:spAutoFit/>
           </a:bodyPr>
           <a:lstStyle/>
@@ -15442,7 +16979,7 @@
           <a:noFill/>
         </p:spPr>
         <p:txBody>
-          <a:bodyPr wrap="square" anchor="t" lIns="0" rIns="0" tIns="0" bIns="0">
+          <a:bodyPr wrap="square" lIns="0" tIns="0" rIns="0" bIns="0" anchor="t">
             <a:spAutoFit/>
           </a:bodyPr>
           <a:lstStyle/>
@@ -15505,6 +17042,7 @@
           <a:lstStyle/>
           <a:p>
             <a:pPr algn="ctr"/>
+            <a:endParaRPr/>
           </a:p>
         </p:txBody>
       </p:sp>
@@ -15545,7 +17083,7 @@
           </a:fontRef>
         </p:style>
         <p:txBody>
-          <a:bodyPr rtlCol="0" anchor="ctr" lIns="0" rIns="0" tIns="0" bIns="0"/>
+          <a:bodyPr lIns="0" tIns="0" rIns="0" bIns="0" rtlCol="0" anchor="ctr"/>
           <a:lstStyle/>
           <a:p>
             <a:pPr algn="ctr"/>
@@ -15578,7 +17116,7 @@
           <a:noFill/>
         </p:spPr>
         <p:txBody>
-          <a:bodyPr wrap="square" anchor="t" lIns="0" rIns="0" tIns="0" bIns="0">
+          <a:bodyPr wrap="square" lIns="0" tIns="0" rIns="0" bIns="0" anchor="t">
             <a:spAutoFit/>
           </a:bodyPr>
           <a:lstStyle/>
@@ -15613,7 +17151,7 @@
           <a:noFill/>
         </p:spPr>
         <p:txBody>
-          <a:bodyPr wrap="square" anchor="t" lIns="0" rIns="0" tIns="0" bIns="0">
+          <a:bodyPr wrap="square" lIns="0" tIns="0" rIns="0" bIns="0" anchor="t">
             <a:spAutoFit/>
           </a:bodyPr>
           <a:lstStyle/>
@@ -15648,7 +17186,7 @@
           <a:noFill/>
         </p:spPr>
         <p:txBody>
-          <a:bodyPr wrap="square" anchor="t" lIns="0" rIns="0" tIns="0" bIns="0">
+          <a:bodyPr wrap="square" lIns="0" tIns="0" rIns="0" bIns="0" anchor="t">
             <a:spAutoFit/>
           </a:bodyPr>
           <a:lstStyle/>
@@ -15711,6 +17249,7 @@
           <a:lstStyle/>
           <a:p>
             <a:pPr algn="ctr"/>
+            <a:endParaRPr/>
           </a:p>
         </p:txBody>
       </p:sp>
@@ -15751,7 +17290,7 @@
           </a:fontRef>
         </p:style>
         <p:txBody>
-          <a:bodyPr rtlCol="0" anchor="ctr" lIns="0" rIns="0" tIns="0" bIns="0"/>
+          <a:bodyPr lIns="0" tIns="0" rIns="0" bIns="0" rtlCol="0" anchor="ctr"/>
           <a:lstStyle/>
           <a:p>
             <a:pPr algn="ctr"/>
@@ -15784,7 +17323,7 @@
           <a:noFill/>
         </p:spPr>
         <p:txBody>
-          <a:bodyPr wrap="square" anchor="t" lIns="0" rIns="0" tIns="0" bIns="0">
+          <a:bodyPr wrap="square" lIns="0" tIns="0" rIns="0" bIns="0" anchor="t">
             <a:spAutoFit/>
           </a:bodyPr>
           <a:lstStyle/>
@@ -15819,7 +17358,7 @@
           <a:noFill/>
         </p:spPr>
         <p:txBody>
-          <a:bodyPr wrap="square" anchor="t" lIns="0" rIns="0" tIns="0" bIns="0">
+          <a:bodyPr wrap="square" lIns="0" tIns="0" rIns="0" bIns="0" anchor="t">
             <a:spAutoFit/>
           </a:bodyPr>
           <a:lstStyle/>
@@ -15854,7 +17393,7 @@
           <a:noFill/>
         </p:spPr>
         <p:txBody>
-          <a:bodyPr wrap="square" anchor="t" lIns="0" rIns="0" tIns="0" bIns="0">
+          <a:bodyPr wrap="square" lIns="0" tIns="0" rIns="0" bIns="0" anchor="t">
             <a:spAutoFit/>
           </a:bodyPr>
           <a:lstStyle/>
@@ -15889,7 +17428,7 @@
           <a:noFill/>
         </p:spPr>
         <p:txBody>
-          <a:bodyPr wrap="square" anchor="t" lIns="0" rIns="0" tIns="0" bIns="0">
+          <a:bodyPr wrap="square" lIns="0" tIns="0" rIns="0" bIns="0" anchor="t">
             <a:spAutoFit/>
           </a:bodyPr>
           <a:lstStyle/>
@@ -15924,7 +17463,7 @@
           <a:noFill/>
         </p:spPr>
         <p:txBody>
-          <a:bodyPr wrap="square" anchor="t" lIns="0" rIns="0" tIns="0" bIns="0">
+          <a:bodyPr wrap="square" lIns="0" tIns="0" rIns="0" bIns="0" anchor="t">
             <a:spAutoFit/>
           </a:bodyPr>
           <a:lstStyle/>
@@ -15959,7 +17498,7 @@
           <a:noFill/>
         </p:spPr>
         <p:txBody>
-          <a:bodyPr wrap="square" anchor="t" lIns="0" rIns="0" tIns="0" bIns="0">
+          <a:bodyPr wrap="square" lIns="0" tIns="0" rIns="0" bIns="0" anchor="t">
             <a:spAutoFit/>
           </a:bodyPr>
           <a:lstStyle/>
@@ -15986,7 +17525,7 @@
 </file>
 
 <file path=ppt/slides/slide8.xml><?xml version="1.0" encoding="utf-8"?>
-<p:sld xmlns:a="http://schemas.openxmlformats.org/drawingml/2006/main" xmlns:p="http://schemas.openxmlformats.org/presentationml/2006/main" xmlns:r="http://schemas.openxmlformats.org/officeDocument/2006/relationships">
+<p:sld xmlns:a="http://schemas.openxmlformats.org/drawingml/2006/main" xmlns:r="http://schemas.openxmlformats.org/officeDocument/2006/relationships" xmlns:p="http://schemas.openxmlformats.org/presentationml/2006/main">
   <p:cSld>
     <p:spTree>
       <p:nvGrpSpPr>
@@ -15994,7 +17533,14 @@
         <p:cNvGrpSpPr/>
         <p:nvPr/>
       </p:nvGrpSpPr>
-      <p:grpSpPr/>
+      <p:grpSpPr>
+        <a:xfrm>
+          <a:off x="0" y="0"/>
+          <a:ext cx="0" cy="0"/>
+          <a:chOff x="0" y="0"/>
+          <a:chExt cx="0" cy="0"/>
+        </a:xfrm>
+      </p:grpSpPr>
       <p:sp>
         <p:nvSpPr>
           <p:cNvPr id="2" name="Rectangle 1"/>
@@ -16036,6 +17582,7 @@
           <a:lstStyle/>
           <a:p>
             <a:pPr algn="ctr"/>
+            <a:endParaRPr/>
           </a:p>
         </p:txBody>
       </p:sp>
@@ -16056,7 +17603,7 @@
           <a:noFill/>
         </p:spPr>
         <p:txBody>
-          <a:bodyPr wrap="square" anchor="t" lIns="0" rIns="0" tIns="0" bIns="0">
+          <a:bodyPr wrap="square" lIns="0" tIns="0" rIns="0" bIns="0" anchor="t">
             <a:spAutoFit/>
           </a:bodyPr>
           <a:lstStyle/>
@@ -16091,7 +17638,7 @@
           <a:noFill/>
         </p:spPr>
         <p:txBody>
-          <a:bodyPr wrap="square" anchor="t" lIns="0" rIns="0" tIns="0" bIns="0">
+          <a:bodyPr wrap="square" lIns="0" tIns="0" rIns="0" bIns="0" anchor="t">
             <a:spAutoFit/>
           </a:bodyPr>
           <a:lstStyle/>
@@ -16150,6 +17697,7 @@
           <a:lstStyle/>
           <a:p>
             <a:pPr algn="ctr"/>
+            <a:endParaRPr/>
           </a:p>
         </p:txBody>
       </p:sp>
@@ -16170,7 +17718,7 @@
           <a:noFill/>
         </p:spPr>
         <p:txBody>
-          <a:bodyPr wrap="square" anchor="t" lIns="0" rIns="0" tIns="0" bIns="0">
+          <a:bodyPr wrap="square" lIns="0" tIns="0" rIns="0" bIns="0" anchor="t">
             <a:spAutoFit/>
           </a:bodyPr>
           <a:lstStyle/>
@@ -16205,7 +17753,7 @@
           <a:noFill/>
         </p:spPr>
         <p:txBody>
-          <a:bodyPr wrap="square" anchor="t" lIns="0" rIns="0" tIns="0" bIns="0">
+          <a:bodyPr wrap="square" lIns="0" tIns="0" rIns="0" bIns="0" anchor="t">
             <a:spAutoFit/>
           </a:bodyPr>
           <a:lstStyle/>
@@ -16240,7 +17788,7 @@
           <a:noFill/>
         </p:spPr>
         <p:txBody>
-          <a:bodyPr wrap="square" anchor="t" lIns="0" rIns="0" tIns="0" bIns="0">
+          <a:bodyPr wrap="square" lIns="0" tIns="0" rIns="0" bIns="0" anchor="t">
             <a:spAutoFit/>
           </a:bodyPr>
           <a:lstStyle/>
@@ -16275,7 +17823,7 @@
           <a:noFill/>
         </p:spPr>
         <p:txBody>
-          <a:bodyPr wrap="square" lIns="0" rIns="0" tIns="0" bIns="0">
+          <a:bodyPr wrap="square" lIns="0" tIns="0" rIns="0" bIns="0">
             <a:spAutoFit/>
           </a:bodyPr>
           <a:lstStyle/>
@@ -16390,6 +17938,7 @@
           <a:lstStyle/>
           <a:p>
             <a:pPr algn="ctr"/>
+            <a:endParaRPr/>
           </a:p>
         </p:txBody>
       </p:sp>
@@ -16430,7 +17979,7 @@
           </a:fontRef>
         </p:style>
         <p:txBody>
-          <a:bodyPr rtlCol="0" anchor="ctr" wrap="none" lIns="50800" rIns="50800" tIns="0" bIns="0"/>
+          <a:bodyPr wrap="none" lIns="50800" tIns="0" rIns="50800" bIns="0" rtlCol="0" anchor="ctr"/>
           <a:lstStyle/>
           <a:p>
             <a:pPr algn="ctr"/>
@@ -16463,7 +18012,7 @@
           <a:noFill/>
         </p:spPr>
         <p:txBody>
-          <a:bodyPr wrap="square" anchor="t" lIns="0" rIns="0" tIns="0" bIns="0">
+          <a:bodyPr wrap="square" lIns="0" tIns="0" rIns="0" bIns="0" anchor="t">
             <a:spAutoFit/>
           </a:bodyPr>
           <a:lstStyle/>
@@ -16498,7 +18047,7 @@
           <a:noFill/>
         </p:spPr>
         <p:txBody>
-          <a:bodyPr wrap="square" anchor="t" lIns="0" rIns="0" tIns="0" bIns="0">
+          <a:bodyPr wrap="square" lIns="0" tIns="0" rIns="0" bIns="0" anchor="t">
             <a:spAutoFit/>
           </a:bodyPr>
           <a:lstStyle/>
@@ -16525,7 +18074,7 @@
 </file>
 
 <file path=ppt/slides/slide9.xml><?xml version="1.0" encoding="utf-8"?>
-<p:sld xmlns:a="http://schemas.openxmlformats.org/drawingml/2006/main" xmlns:p="http://schemas.openxmlformats.org/presentationml/2006/main" xmlns:r="http://schemas.openxmlformats.org/officeDocument/2006/relationships">
+<p:sld xmlns:a="http://schemas.openxmlformats.org/drawingml/2006/main" xmlns:r="http://schemas.openxmlformats.org/officeDocument/2006/relationships" xmlns:p="http://schemas.openxmlformats.org/presentationml/2006/main">
   <p:cSld>
     <p:spTree>
       <p:nvGrpSpPr>
@@ -16533,7 +18082,14 @@
         <p:cNvGrpSpPr/>
         <p:nvPr/>
       </p:nvGrpSpPr>
-      <p:grpSpPr/>
+      <p:grpSpPr>
+        <a:xfrm>
+          <a:off x="0" y="0"/>
+          <a:ext cx="0" cy="0"/>
+          <a:chOff x="0" y="0"/>
+          <a:chExt cx="0" cy="0"/>
+        </a:xfrm>
+      </p:grpSpPr>
       <p:sp>
         <p:nvSpPr>
           <p:cNvPr id="2" name="Rectangle 1"/>
@@ -16575,6 +18131,7 @@
           <a:lstStyle/>
           <a:p>
             <a:pPr algn="ctr"/>
+            <a:endParaRPr/>
           </a:p>
         </p:txBody>
       </p:sp>
@@ -16595,7 +18152,7 @@
           <a:noFill/>
         </p:spPr>
         <p:txBody>
-          <a:bodyPr wrap="square" anchor="t" lIns="0" rIns="0" tIns="0" bIns="0">
+          <a:bodyPr wrap="square" lIns="0" tIns="0" rIns="0" bIns="0" anchor="t">
             <a:spAutoFit/>
           </a:bodyPr>
           <a:lstStyle/>
@@ -16630,7 +18187,7 @@
           <a:noFill/>
         </p:spPr>
         <p:txBody>
-          <a:bodyPr wrap="square" anchor="t" lIns="0" rIns="0" tIns="0" bIns="0">
+          <a:bodyPr wrap="square" lIns="0" tIns="0" rIns="0" bIns="0" anchor="t">
             <a:spAutoFit/>
           </a:bodyPr>
           <a:lstStyle/>
@@ -16689,6 +18246,7 @@
           <a:lstStyle/>
           <a:p>
             <a:pPr algn="ctr"/>
+            <a:endParaRPr/>
           </a:p>
         </p:txBody>
       </p:sp>
@@ -16709,7 +18267,7 @@
           <a:noFill/>
         </p:spPr>
         <p:txBody>
-          <a:bodyPr wrap="square" anchor="t" lIns="0" rIns="0" tIns="0" bIns="0">
+          <a:bodyPr wrap="square" lIns="0" tIns="0" rIns="0" bIns="0" anchor="t">
             <a:spAutoFit/>
           </a:bodyPr>
           <a:lstStyle/>
@@ -16744,7 +18302,7 @@
           <a:noFill/>
         </p:spPr>
         <p:txBody>
-          <a:bodyPr wrap="square" anchor="t" lIns="0" rIns="0" tIns="0" bIns="0">
+          <a:bodyPr wrap="square" lIns="0" tIns="0" rIns="0" bIns="0" anchor="t">
             <a:spAutoFit/>
           </a:bodyPr>
           <a:lstStyle/>
@@ -16779,7 +18337,7 @@
           <a:noFill/>
         </p:spPr>
         <p:txBody>
-          <a:bodyPr wrap="square" anchor="t" lIns="0" rIns="0" tIns="0" bIns="0">
+          <a:bodyPr wrap="square" lIns="0" tIns="0" rIns="0" bIns="0" anchor="t">
             <a:spAutoFit/>
           </a:bodyPr>
           <a:lstStyle/>
@@ -16842,6 +18400,7 @@
           <a:lstStyle/>
           <a:p>
             <a:pPr algn="ctr"/>
+            <a:endParaRPr/>
           </a:p>
         </p:txBody>
       </p:sp>
@@ -16862,7 +18421,7 @@
           <a:noFill/>
         </p:spPr>
         <p:txBody>
-          <a:bodyPr wrap="square" anchor="t" lIns="0" rIns="0" tIns="0" bIns="0">
+          <a:bodyPr wrap="square" lIns="0" tIns="0" rIns="0" bIns="0" anchor="t">
             <a:spAutoFit/>
           </a:bodyPr>
           <a:lstStyle/>
@@ -16897,7 +18456,7 @@
           <a:noFill/>
         </p:spPr>
         <p:txBody>
-          <a:bodyPr wrap="square" anchor="t" lIns="0" rIns="0" tIns="0" bIns="0">
+          <a:bodyPr wrap="square" lIns="0" tIns="0" rIns="0" bIns="0" anchor="t">
             <a:spAutoFit/>
           </a:bodyPr>
           <a:lstStyle/>
@@ -16932,7 +18491,7 @@
           <a:noFill/>
         </p:spPr>
         <p:txBody>
-          <a:bodyPr wrap="square" anchor="t" lIns="0" rIns="0" tIns="0" bIns="0">
+          <a:bodyPr wrap="square" lIns="0" tIns="0" rIns="0" bIns="0" anchor="t">
             <a:spAutoFit/>
           </a:bodyPr>
           <a:lstStyle/>
@@ -16995,6 +18554,7 @@
           <a:lstStyle/>
           <a:p>
             <a:pPr algn="ctr"/>
+            <a:endParaRPr/>
           </a:p>
         </p:txBody>
       </p:sp>
@@ -17015,7 +18575,7 @@
           <a:noFill/>
         </p:spPr>
         <p:txBody>
-          <a:bodyPr wrap="square" anchor="t" lIns="0" rIns="0" tIns="0" bIns="0">
+          <a:bodyPr wrap="square" lIns="0" tIns="0" rIns="0" bIns="0" anchor="t">
             <a:spAutoFit/>
           </a:bodyPr>
           <a:lstStyle/>
@@ -17050,7 +18610,7 @@
           <a:noFill/>
         </p:spPr>
         <p:txBody>
-          <a:bodyPr wrap="square" anchor="t" lIns="0" rIns="0" tIns="0" bIns="0">
+          <a:bodyPr wrap="square" lIns="0" tIns="0" rIns="0" bIns="0" anchor="t">
             <a:spAutoFit/>
           </a:bodyPr>
           <a:lstStyle/>
@@ -17085,7 +18645,7 @@
           <a:noFill/>
         </p:spPr>
         <p:txBody>
-          <a:bodyPr wrap="square" anchor="t" lIns="0" rIns="0" tIns="0" bIns="0">
+          <a:bodyPr wrap="square" lIns="0" tIns="0" rIns="0" bIns="0" anchor="t">
             <a:spAutoFit/>
           </a:bodyPr>
           <a:lstStyle/>
@@ -17148,6 +18708,7 @@
           <a:lstStyle/>
           <a:p>
             <a:pPr algn="ctr"/>
+            <a:endParaRPr/>
           </a:p>
         </p:txBody>
       </p:sp>
@@ -17168,7 +18729,7 @@
           <a:noFill/>
         </p:spPr>
         <p:txBody>
-          <a:bodyPr wrap="square" anchor="t" lIns="0" rIns="0" tIns="0" bIns="0">
+          <a:bodyPr wrap="square" lIns="0" tIns="0" rIns="0" bIns="0" anchor="t">
             <a:spAutoFit/>
           </a:bodyPr>
           <a:lstStyle/>
@@ -17203,7 +18764,7 @@
           <a:noFill/>
         </p:spPr>
         <p:txBody>
-          <a:bodyPr wrap="square" anchor="t" lIns="0" rIns="0" tIns="0" bIns="0">
+          <a:bodyPr wrap="square" lIns="0" tIns="0" rIns="0" bIns="0" anchor="t">
             <a:spAutoFit/>
           </a:bodyPr>
           <a:lstStyle/>
@@ -17238,7 +18799,7 @@
           <a:noFill/>
         </p:spPr>
         <p:txBody>
-          <a:bodyPr wrap="square" anchor="t" lIns="0" rIns="0" tIns="0" bIns="0">
+          <a:bodyPr wrap="square" lIns="0" tIns="0" rIns="0" bIns="0" anchor="t">
             <a:spAutoFit/>
           </a:bodyPr>
           <a:lstStyle/>
@@ -17301,6 +18862,7 @@
           <a:lstStyle/>
           <a:p>
             <a:pPr algn="ctr"/>
+            <a:endParaRPr/>
           </a:p>
         </p:txBody>
       </p:sp>
@@ -17321,7 +18883,7 @@
           <a:noFill/>
         </p:spPr>
         <p:txBody>
-          <a:bodyPr wrap="square" anchor="t" lIns="0" rIns="0" tIns="0" bIns="0">
+          <a:bodyPr wrap="square" lIns="0" tIns="0" rIns="0" bIns="0" anchor="t">
             <a:spAutoFit/>
           </a:bodyPr>
           <a:lstStyle/>
@@ -17356,7 +18918,7 @@
           <a:noFill/>
         </p:spPr>
         <p:txBody>
-          <a:bodyPr wrap="square" anchor="t" lIns="0" rIns="0" tIns="0" bIns="0">
+          <a:bodyPr wrap="square" lIns="0" tIns="0" rIns="0" bIns="0" anchor="t">
             <a:spAutoFit/>
           </a:bodyPr>
           <a:lstStyle/>
@@ -17391,7 +18953,7 @@
           <a:noFill/>
         </p:spPr>
         <p:txBody>
-          <a:bodyPr wrap="square" anchor="t" lIns="0" rIns="0" tIns="0" bIns="0">
+          <a:bodyPr wrap="square" lIns="0" tIns="0" rIns="0" bIns="0" anchor="t">
             <a:spAutoFit/>
           </a:bodyPr>
           <a:lstStyle/>
@@ -17454,6 +19016,7 @@
           <a:lstStyle/>
           <a:p>
             <a:pPr algn="ctr"/>
+            <a:endParaRPr/>
           </a:p>
         </p:txBody>
       </p:sp>
@@ -17474,7 +19037,7 @@
           <a:noFill/>
         </p:spPr>
         <p:txBody>
-          <a:bodyPr wrap="square" anchor="t" lIns="0" rIns="0" tIns="0" bIns="0">
+          <a:bodyPr wrap="square" lIns="0" tIns="0" rIns="0" bIns="0" anchor="t">
             <a:spAutoFit/>
           </a:bodyPr>
           <a:lstStyle/>
@@ -17509,7 +19072,7 @@
           <a:noFill/>
         </p:spPr>
         <p:txBody>
-          <a:bodyPr wrap="square" anchor="t" lIns="0" rIns="0" tIns="0" bIns="0">
+          <a:bodyPr wrap="square" lIns="0" tIns="0" rIns="0" bIns="0" anchor="t">
             <a:spAutoFit/>
           </a:bodyPr>
           <a:lstStyle/>
@@ -17544,7 +19107,7 @@
           <a:noFill/>
         </p:spPr>
         <p:txBody>
-          <a:bodyPr wrap="square" lIns="0" rIns="0" tIns="0" bIns="0">
+          <a:bodyPr wrap="square" lIns="0" tIns="0" rIns="0" bIns="0">
             <a:spAutoFit/>
           </a:bodyPr>
           <a:lstStyle/>
@@ -17643,6 +19206,7 @@
           <a:lstStyle/>
           <a:p>
             <a:pPr algn="ctr"/>
+            <a:endParaRPr/>
           </a:p>
         </p:txBody>
       </p:sp>
@@ -17687,6 +19251,7 @@
           <a:lstStyle/>
           <a:p>
             <a:pPr algn="ctr"/>
+            <a:endParaRPr/>
           </a:p>
         </p:txBody>
       </p:sp>
@@ -17707,7 +19272,7 @@
           <a:noFill/>
         </p:spPr>
         <p:txBody>
-          <a:bodyPr wrap="square" anchor="t" lIns="0" rIns="0" tIns="0" bIns="0">
+          <a:bodyPr wrap="square" lIns="0" tIns="0" rIns="0" bIns="0" anchor="t">
             <a:spAutoFit/>
           </a:bodyPr>
           <a:lstStyle/>
